--- a/output/wordlabs-photo-3day.pptx
+++ b/output/wordlabs-photo-3day.pptx
@@ -4279,7 +4279,7 @@
                 <a:ea typeface="Calibri" pitchFamily="34" charset="-122"/>
                 <a:cs typeface="Calibri" pitchFamily="34" charset="-120"/>
               </a:rPr>
-              <a:t>Origin: Greek: phos/photos</a:t>
+              <a:t>Origin: Greek: phōs, phōtos</a:t>
             </a:r>
             <a:endParaRPr lang="en-US" sz="1300" dirty="0"/>
           </a:p>
@@ -6071,7 +6071,7 @@
                 <a:ea typeface="Calibri" pitchFamily="34" charset="-122"/>
                 <a:cs typeface="Calibri" pitchFamily="34" charset="-120"/>
               </a:rPr>
-              <a:t> made a </a:t>
+              <a:t> took a </a:t>
             </a:r>
             <a:pPr algn="l" indent="0" marL="0">
               <a:buNone/>
@@ -6102,7 +6102,7 @@
                 <a:ea typeface="Calibri" pitchFamily="34" charset="-122"/>
                 <a:cs typeface="Calibri" pitchFamily="34" charset="-120"/>
               </a:rPr>
-              <a:t> of the permission slip before the excursion.</a:t>
+              <a:t> of the old map to keep it safe.</a:t>
             </a:r>
             <a:endParaRPr lang="en-US" sz="1800" dirty="0"/>
           </a:p>
@@ -8084,7 +8084,7 @@
                 <a:ea typeface="Calibri" pitchFamily="34" charset="-122"/>
                 <a:cs typeface="Calibri" pitchFamily="34" charset="-120"/>
               </a:rPr>
-              <a:t>a person who does something</a:t>
+              <a:t>person who does something</a:t>
             </a:r>
             <a:endParaRPr lang="en-US" sz="850" dirty="0"/>
           </a:p>
@@ -9181,7 +9181,7 @@
                 <a:ea typeface="Calibri" pitchFamily="34" charset="-122"/>
                 <a:cs typeface="Calibri" pitchFamily="34" charset="-120"/>
               </a:rPr>
-              <a:t>a person who does something</a:t>
+              <a:t>person who does something</a:t>
             </a:r>
             <a:endParaRPr lang="en-US" sz="850" dirty="0"/>
           </a:p>
@@ -10620,7 +10620,7 @@
                 <a:ea typeface="Calibri" pitchFamily="34" charset="-122"/>
                 <a:cs typeface="Calibri" pitchFamily="34" charset="-120"/>
               </a:rPr>
-              <a:t>a person who does something</a:t>
+              <a:t>person who does something</a:t>
             </a:r>
             <a:endParaRPr lang="en-US" sz="850" dirty="0"/>
           </a:p>
@@ -18514,7 +18514,7 @@
                 <a:ea typeface="Calibri" pitchFamily="34" charset="-122"/>
                 <a:cs typeface="Calibri" pitchFamily="34" charset="-120"/>
               </a:rPr>
-              <a:t>, plants absorb light, and a </a:t>
+              <a:t>, plants absorb light, which is why a </a:t>
             </a:r>
             <a:pPr algn="l" indent="0" marL="0">
               <a:buNone/>
@@ -18531,7 +18531,7 @@
                 <a:ea typeface="Calibri" pitchFamily="34" charset="-122"/>
                 <a:cs typeface="Calibri" pitchFamily="34" charset="-120"/>
               </a:rPr>
-              <a:t>photosensitive</a:t>
+              <a:t>telephoto</a:t>
             </a:r>
             <a:pPr algn="l" indent="0" marL="0">
               <a:buNone/>
@@ -18545,118 +18545,343 @@
                 <a:ea typeface="Calibri" pitchFamily="34" charset="-122"/>
                 <a:cs typeface="Calibri" pitchFamily="34" charset="-120"/>
               </a:rPr>
-              <a:t> film inside the old camera helped the </a:t>
-            </a:r>
+              <a:t> lens can capture them in detail from far away.</a:t>
+            </a:r>
+            <a:endParaRPr lang="en-US" sz="1800" dirty="0"/>
+          </a:p>
+        </p:txBody>
+      </p:sp>
+      <p:sp>
+        <p:nvSpPr>
+          <p:cNvPr id="13" name="Shape 11"/>
+          <p:cNvSpPr/>
+          <p:nvPr/>
+        </p:nvSpPr>
+        <p:spPr>
+          <a:xfrm>
+            <a:off x="365760" y="2852928"/>
+            <a:ext cx="8412480" cy="475488"/>
+          </a:xfrm>
+          <a:prstGeom prst="rect">
+            <a:avLst>
+              <a:gd name="adj" fmla="val 15385"/>
+            </a:avLst>
+          </a:prstGeom>
+          <a:solidFill>
+            <a:srgbClr val="CCFBF1"/>
+          </a:solidFill>
+          <a:ln w="12700">
+            <a:solidFill>
+              <a:srgbClr val="0D9488"/>
+            </a:solidFill>
+            <a:prstDash val="solid"/>
+          </a:ln>
+        </p:spPr>
+      </p:sp>
+      <p:sp>
+        <p:nvSpPr>
+          <p:cNvPr id="14" name="Text 12"/>
+          <p:cNvSpPr/>
+          <p:nvPr/>
+        </p:nvSpPr>
+        <p:spPr>
+          <a:xfrm>
+            <a:off x="502920" y="2852928"/>
+            <a:ext cx="8229600" cy="475488"/>
+          </a:xfrm>
+          <a:prstGeom prst="rect">
+            <a:avLst/>
+          </a:prstGeom>
+          <a:noFill/>
+          <a:ln/>
+        </p:spPr>
+        <p:txBody>
+          <a:bodyPr wrap="square" rtlCol="0" anchor="ctr"/>
+          <a:lstStyle/>
+          <a:p>
             <a:pPr algn="l" indent="0" marL="0">
               <a:buNone/>
             </a:pPr>
             <a:r>
-              <a:rPr lang="en-US" sz="1800" b="1" dirty="0">
-                <a:solidFill>
-                  <a:srgbClr val="0D9488"/>
-                </a:solidFill>
-                <a:highlight>
-                  <a:srgbClr val="CCFBF1"/>
-                </a:highlight>
+              <a:rPr lang="en-US" sz="1200" b="1" dirty="0">
+                <a:solidFill>
+                  <a:srgbClr val="0F766E"/>
+                </a:solidFill>
                 <a:latin typeface="Calibri" pitchFamily="34" charset="0"/>
                 <a:ea typeface="Calibri" pitchFamily="34" charset="-122"/>
                 <a:cs typeface="Calibri" pitchFamily="34" charset="-120"/>
               </a:rPr>
-              <a:t>photographer</a:t>
-            </a:r>
-            <a:pPr algn="l" indent="0" marL="0">
-              <a:buNone/>
-            </a:pPr>
-            <a:r>
-              <a:rPr lang="en-US" sz="1800" dirty="0">
-                <a:solidFill>
-                  <a:srgbClr val="0F172A"/>
+              <a:t>Now rewrite each focus word below with space between letters — leave room for your breakdown.</a:t>
+            </a:r>
+            <a:endParaRPr lang="en-US" sz="1200" dirty="0"/>
+          </a:p>
+        </p:txBody>
+      </p:sp>
+      <p:sp>
+        <p:nvSpPr>
+          <p:cNvPr id="15" name="Shape 13"/>
+          <p:cNvSpPr/>
+          <p:nvPr/>
+        </p:nvSpPr>
+        <p:spPr>
+          <a:xfrm>
+            <a:off x="411480" y="3456432"/>
+            <a:ext cx="2499360" cy="1005840"/>
+          </a:xfrm>
+          <a:prstGeom prst="rect">
+            <a:avLst>
+              <a:gd name="adj" fmla="val 7273"/>
+            </a:avLst>
+          </a:prstGeom>
+          <a:solidFill>
+            <a:srgbClr val="F8FAFC"/>
+          </a:solidFill>
+          <a:ln w="12700">
+            <a:solidFill>
+              <a:srgbClr val="E2E8F0"/>
+            </a:solidFill>
+            <a:prstDash val="solid"/>
+          </a:ln>
+        </p:spPr>
+      </p:sp>
+      <p:sp>
+        <p:nvSpPr>
+          <p:cNvPr id="16" name="Shape 14"/>
+          <p:cNvSpPr/>
+          <p:nvPr/>
+        </p:nvSpPr>
+        <p:spPr>
+          <a:xfrm>
+            <a:off x="411480" y="3977640"/>
+            <a:ext cx="2499360" cy="0"/>
+          </a:xfrm>
+          <a:prstGeom prst="line">
+            <a:avLst/>
+          </a:prstGeom>
+          <a:noFill/>
+          <a:ln w="12700">
+            <a:solidFill>
+              <a:srgbClr val="E2E8F0"/>
+            </a:solidFill>
+            <a:prstDash val="dash"/>
+          </a:ln>
+        </p:spPr>
+      </p:sp>
+      <p:sp>
+        <p:nvSpPr>
+          <p:cNvPr id="17" name="Text 15"/>
+          <p:cNvSpPr/>
+          <p:nvPr/>
+        </p:nvSpPr>
+        <p:spPr>
+          <a:xfrm>
+            <a:off x="411480" y="3456432"/>
+            <a:ext cx="2499360" cy="502920"/>
+          </a:xfrm>
+          <a:prstGeom prst="rect">
+            <a:avLst/>
+          </a:prstGeom>
+          <a:noFill/>
+          <a:ln/>
+        </p:spPr>
+        <p:txBody>
+          <a:bodyPr wrap="square" lIns="0" tIns="0" rIns="0" bIns="0" rtlCol="0" anchor="ctr"/>
+          <a:lstStyle/>
+          <a:p>
+            <a:pPr algn="ctr" indent="0" marL="0">
+              <a:buNone/>
+            </a:pPr>
+            <a:r>
+              <a:rPr lang="en-US" sz="1400" b="1" dirty="0">
+                <a:solidFill>
+                  <a:srgbClr val="0D9488"/>
+                </a:solidFill>
+                <a:latin typeface="Trebuchet MS" pitchFamily="34" charset="0"/>
+                <a:ea typeface="Trebuchet MS" pitchFamily="34" charset="-122"/>
+                <a:cs typeface="Trebuchet MS" pitchFamily="34" charset="-120"/>
+              </a:rPr>
+              <a:t>photosynthesis</a:t>
+            </a:r>
+            <a:endParaRPr lang="en-US" sz="1400" dirty="0"/>
+          </a:p>
+        </p:txBody>
+      </p:sp>
+      <p:sp>
+        <p:nvSpPr>
+          <p:cNvPr id="18" name="Text 16"/>
+          <p:cNvSpPr/>
+          <p:nvPr/>
+        </p:nvSpPr>
+        <p:spPr>
+          <a:xfrm>
+            <a:off x="411480" y="4005072"/>
+            <a:ext cx="2499360" cy="457200"/>
+          </a:xfrm>
+          <a:prstGeom prst="rect">
+            <a:avLst/>
+          </a:prstGeom>
+          <a:noFill/>
+          <a:ln/>
+        </p:spPr>
+        <p:txBody>
+          <a:bodyPr wrap="square" lIns="0" tIns="0" rIns="0" bIns="0" rtlCol="0" anchor="ctr"/>
+          <a:lstStyle/>
+          <a:p>
+            <a:pPr algn="ctr" indent="0" marL="0">
+              <a:buNone/>
+            </a:pPr>
+            <a:r>
+              <a:rPr lang="en-US" sz="900" i="1" dirty="0">
+                <a:solidFill>
+                  <a:srgbClr val="475569"/>
                 </a:solidFill>
                 <a:latin typeface="Calibri" pitchFamily="34" charset="0"/>
                 <a:ea typeface="Calibri" pitchFamily="34" charset="-122"/>
                 <a:cs typeface="Calibri" pitchFamily="34" charset="-120"/>
               </a:rPr>
-              <a:t> capture the image.</a:t>
-            </a:r>
-            <a:endParaRPr lang="en-US" sz="1800" dirty="0"/>
-          </a:p>
-        </p:txBody>
-      </p:sp>
-      <p:sp>
-        <p:nvSpPr>
-          <p:cNvPr id="13" name="Shape 11"/>
-          <p:cNvSpPr/>
-          <p:nvPr/>
-        </p:nvSpPr>
-        <p:spPr>
-          <a:xfrm>
-            <a:off x="365760" y="2852928"/>
-            <a:ext cx="8412480" cy="475488"/>
+              <a:t>write your breakdown below</a:t>
+            </a:r>
+            <a:endParaRPr lang="en-US" sz="900" dirty="0"/>
+          </a:p>
+        </p:txBody>
+      </p:sp>
+      <p:sp>
+        <p:nvSpPr>
+          <p:cNvPr id="19" name="Shape 17"/>
+          <p:cNvSpPr/>
+          <p:nvPr/>
+        </p:nvSpPr>
+        <p:spPr>
+          <a:xfrm>
+            <a:off x="3185160" y="3456432"/>
+            <a:ext cx="2499360" cy="1005840"/>
           </a:xfrm>
           <a:prstGeom prst="rect">
             <a:avLst>
-              <a:gd name="adj" fmla="val 15385"/>
+              <a:gd name="adj" fmla="val 7273"/>
             </a:avLst>
           </a:prstGeom>
           <a:solidFill>
-            <a:srgbClr val="CCFBF1"/>
-          </a:solidFill>
-          <a:ln w="12700">
-            <a:solidFill>
-              <a:srgbClr val="0D9488"/>
-            </a:solidFill>
-            <a:prstDash val="solid"/>
-          </a:ln>
-        </p:spPr>
-      </p:sp>
-      <p:sp>
-        <p:nvSpPr>
-          <p:cNvPr id="14" name="Text 12"/>
-          <p:cNvSpPr/>
-          <p:nvPr/>
-        </p:nvSpPr>
-        <p:spPr>
-          <a:xfrm>
-            <a:off x="502920" y="2852928"/>
-            <a:ext cx="8229600" cy="475488"/>
-          </a:xfrm>
-          <a:prstGeom prst="rect">
-            <a:avLst/>
-          </a:prstGeom>
-          <a:noFill/>
-          <a:ln/>
-        </p:spPr>
-        <p:txBody>
-          <a:bodyPr wrap="square" rtlCol="0" anchor="ctr"/>
-          <a:lstStyle/>
-          <a:p>
-            <a:pPr algn="l" indent="0" marL="0">
-              <a:buNone/>
-            </a:pPr>
-            <a:r>
-              <a:rPr lang="en-US" sz="1200" b="1" dirty="0">
-                <a:solidFill>
-                  <a:srgbClr val="0F766E"/>
+            <a:srgbClr val="F8FAFC"/>
+          </a:solidFill>
+          <a:ln w="12700">
+            <a:solidFill>
+              <a:srgbClr val="E2E8F0"/>
+            </a:solidFill>
+            <a:prstDash val="solid"/>
+          </a:ln>
+        </p:spPr>
+      </p:sp>
+      <p:sp>
+        <p:nvSpPr>
+          <p:cNvPr id="20" name="Shape 18"/>
+          <p:cNvSpPr/>
+          <p:nvPr/>
+        </p:nvSpPr>
+        <p:spPr>
+          <a:xfrm>
+            <a:off x="3185160" y="3977640"/>
+            <a:ext cx="2499360" cy="0"/>
+          </a:xfrm>
+          <a:prstGeom prst="line">
+            <a:avLst/>
+          </a:prstGeom>
+          <a:noFill/>
+          <a:ln w="12700">
+            <a:solidFill>
+              <a:srgbClr val="E2E8F0"/>
+            </a:solidFill>
+            <a:prstDash val="dash"/>
+          </a:ln>
+        </p:spPr>
+      </p:sp>
+      <p:sp>
+        <p:nvSpPr>
+          <p:cNvPr id="21" name="Text 19"/>
+          <p:cNvSpPr/>
+          <p:nvPr/>
+        </p:nvSpPr>
+        <p:spPr>
+          <a:xfrm>
+            <a:off x="3185160" y="3456432"/>
+            <a:ext cx="2499360" cy="502920"/>
+          </a:xfrm>
+          <a:prstGeom prst="rect">
+            <a:avLst/>
+          </a:prstGeom>
+          <a:noFill/>
+          <a:ln/>
+        </p:spPr>
+        <p:txBody>
+          <a:bodyPr wrap="square" lIns="0" tIns="0" rIns="0" bIns="0" rtlCol="0" anchor="ctr"/>
+          <a:lstStyle/>
+          <a:p>
+            <a:pPr algn="ctr" indent="0" marL="0">
+              <a:buNone/>
+            </a:pPr>
+            <a:r>
+              <a:rPr lang="en-US" sz="1400" b="1" dirty="0">
+                <a:solidFill>
+                  <a:srgbClr val="0D9488"/>
+                </a:solidFill>
+                <a:latin typeface="Trebuchet MS" pitchFamily="34" charset="0"/>
+                <a:ea typeface="Trebuchet MS" pitchFamily="34" charset="-122"/>
+                <a:cs typeface="Trebuchet MS" pitchFamily="34" charset="-120"/>
+              </a:rPr>
+              <a:t>telephoto</a:t>
+            </a:r>
+            <a:endParaRPr lang="en-US" sz="1400" dirty="0"/>
+          </a:p>
+        </p:txBody>
+      </p:sp>
+      <p:sp>
+        <p:nvSpPr>
+          <p:cNvPr id="22" name="Text 20"/>
+          <p:cNvSpPr/>
+          <p:nvPr/>
+        </p:nvSpPr>
+        <p:spPr>
+          <a:xfrm>
+            <a:off x="3185160" y="4005072"/>
+            <a:ext cx="2499360" cy="457200"/>
+          </a:xfrm>
+          <a:prstGeom prst="rect">
+            <a:avLst/>
+          </a:prstGeom>
+          <a:noFill/>
+          <a:ln/>
+        </p:spPr>
+        <p:txBody>
+          <a:bodyPr wrap="square" lIns="0" tIns="0" rIns="0" bIns="0" rtlCol="0" anchor="ctr"/>
+          <a:lstStyle/>
+          <a:p>
+            <a:pPr algn="ctr" indent="0" marL="0">
+              <a:buNone/>
+            </a:pPr>
+            <a:r>
+              <a:rPr lang="en-US" sz="900" i="1" dirty="0">
+                <a:solidFill>
+                  <a:srgbClr val="475569"/>
                 </a:solidFill>
                 <a:latin typeface="Calibri" pitchFamily="34" charset="0"/>
                 <a:ea typeface="Calibri" pitchFamily="34" charset="-122"/>
                 <a:cs typeface="Calibri" pitchFamily="34" charset="-120"/>
               </a:rPr>
-              <a:t>Now rewrite each focus word below with space between letters — leave room for your breakdown.</a:t>
-            </a:r>
-            <a:endParaRPr lang="en-US" sz="1200" dirty="0"/>
-          </a:p>
-        </p:txBody>
-      </p:sp>
-      <p:sp>
-        <p:nvSpPr>
-          <p:cNvPr id="15" name="Shape 13"/>
-          <p:cNvSpPr/>
-          <p:nvPr/>
-        </p:nvSpPr>
-        <p:spPr>
-          <a:xfrm>
-            <a:off x="411480" y="3456432"/>
+              <a:t>write your breakdown below</a:t>
+            </a:r>
+            <a:endParaRPr lang="en-US" sz="900" dirty="0"/>
+          </a:p>
+        </p:txBody>
+      </p:sp>
+      <p:sp>
+        <p:nvSpPr>
+          <p:cNvPr id="23" name="Shape 21"/>
+          <p:cNvSpPr/>
+          <p:nvPr/>
+        </p:nvSpPr>
+        <p:spPr>
+          <a:xfrm>
+            <a:off x="5958840" y="3456432"/>
             <a:ext cx="2499360" cy="1005840"/>
           </a:xfrm>
           <a:prstGeom prst="rect">
@@ -18677,13 +18902,13 @@
       </p:sp>
       <p:sp>
         <p:nvSpPr>
-          <p:cNvPr id="16" name="Shape 14"/>
-          <p:cNvSpPr/>
-          <p:nvPr/>
-        </p:nvSpPr>
-        <p:spPr>
-          <a:xfrm>
-            <a:off x="411480" y="3977640"/>
+          <p:cNvPr id="24" name="Shape 22"/>
+          <p:cNvSpPr/>
+          <p:nvPr/>
+        </p:nvSpPr>
+        <p:spPr>
+          <a:xfrm>
+            <a:off x="5958840" y="3977640"/>
             <a:ext cx="2499360" cy="0"/>
           </a:xfrm>
           <a:prstGeom prst="line">
@@ -18700,13 +18925,13 @@
       </p:sp>
       <p:sp>
         <p:nvSpPr>
-          <p:cNvPr id="17" name="Text 15"/>
-          <p:cNvSpPr/>
-          <p:nvPr/>
-        </p:nvSpPr>
-        <p:spPr>
-          <a:xfrm>
-            <a:off x="411480" y="3456432"/>
+          <p:cNvPr id="25" name="Text 23"/>
+          <p:cNvSpPr/>
+          <p:nvPr/>
+        </p:nvSpPr>
+        <p:spPr>
+          <a:xfrm>
+            <a:off x="5958840" y="3456432"/>
             <a:ext cx="2499360" cy="502920"/>
           </a:xfrm>
           <a:prstGeom prst="rect">
@@ -18731,263 +18956,7 @@
                 <a:ea typeface="Trebuchet MS" pitchFamily="34" charset="-122"/>
                 <a:cs typeface="Trebuchet MS" pitchFamily="34" charset="-120"/>
               </a:rPr>
-              <a:t>photosynthesis</a:t>
-            </a:r>
-            <a:endParaRPr lang="en-US" sz="1400" dirty="0"/>
-          </a:p>
-        </p:txBody>
-      </p:sp>
-      <p:sp>
-        <p:nvSpPr>
-          <p:cNvPr id="18" name="Text 16"/>
-          <p:cNvSpPr/>
-          <p:nvPr/>
-        </p:nvSpPr>
-        <p:spPr>
-          <a:xfrm>
-            <a:off x="411480" y="4005072"/>
-            <a:ext cx="2499360" cy="457200"/>
-          </a:xfrm>
-          <a:prstGeom prst="rect">
-            <a:avLst/>
-          </a:prstGeom>
-          <a:noFill/>
-          <a:ln/>
-        </p:spPr>
-        <p:txBody>
-          <a:bodyPr wrap="square" lIns="0" tIns="0" rIns="0" bIns="0" rtlCol="0" anchor="ctr"/>
-          <a:lstStyle/>
-          <a:p>
-            <a:pPr algn="ctr" indent="0" marL="0">
-              <a:buNone/>
-            </a:pPr>
-            <a:r>
-              <a:rPr lang="en-US" sz="900" i="1" dirty="0">
-                <a:solidFill>
-                  <a:srgbClr val="475569"/>
-                </a:solidFill>
-                <a:latin typeface="Calibri" pitchFamily="34" charset="0"/>
-                <a:ea typeface="Calibri" pitchFamily="34" charset="-122"/>
-                <a:cs typeface="Calibri" pitchFamily="34" charset="-120"/>
-              </a:rPr>
-              <a:t>write your breakdown below</a:t>
-            </a:r>
-            <a:endParaRPr lang="en-US" sz="900" dirty="0"/>
-          </a:p>
-        </p:txBody>
-      </p:sp>
-      <p:sp>
-        <p:nvSpPr>
-          <p:cNvPr id="19" name="Shape 17"/>
-          <p:cNvSpPr/>
-          <p:nvPr/>
-        </p:nvSpPr>
-        <p:spPr>
-          <a:xfrm>
-            <a:off x="3185160" y="3456432"/>
-            <a:ext cx="2499360" cy="1005840"/>
-          </a:xfrm>
-          <a:prstGeom prst="rect">
-            <a:avLst>
-              <a:gd name="adj" fmla="val 7273"/>
-            </a:avLst>
-          </a:prstGeom>
-          <a:solidFill>
-            <a:srgbClr val="F8FAFC"/>
-          </a:solidFill>
-          <a:ln w="12700">
-            <a:solidFill>
-              <a:srgbClr val="E2E8F0"/>
-            </a:solidFill>
-            <a:prstDash val="solid"/>
-          </a:ln>
-        </p:spPr>
-      </p:sp>
-      <p:sp>
-        <p:nvSpPr>
-          <p:cNvPr id="20" name="Shape 18"/>
-          <p:cNvSpPr/>
-          <p:nvPr/>
-        </p:nvSpPr>
-        <p:spPr>
-          <a:xfrm>
-            <a:off x="3185160" y="3977640"/>
-            <a:ext cx="2499360" cy="0"/>
-          </a:xfrm>
-          <a:prstGeom prst="line">
-            <a:avLst/>
-          </a:prstGeom>
-          <a:noFill/>
-          <a:ln w="12700">
-            <a:solidFill>
-              <a:srgbClr val="E2E8F0"/>
-            </a:solidFill>
-            <a:prstDash val="dash"/>
-          </a:ln>
-        </p:spPr>
-      </p:sp>
-      <p:sp>
-        <p:nvSpPr>
-          <p:cNvPr id="21" name="Text 19"/>
-          <p:cNvSpPr/>
-          <p:nvPr/>
-        </p:nvSpPr>
-        <p:spPr>
-          <a:xfrm>
-            <a:off x="3185160" y="3456432"/>
-            <a:ext cx="2499360" cy="502920"/>
-          </a:xfrm>
-          <a:prstGeom prst="rect">
-            <a:avLst/>
-          </a:prstGeom>
-          <a:noFill/>
-          <a:ln/>
-        </p:spPr>
-        <p:txBody>
-          <a:bodyPr wrap="square" lIns="0" tIns="0" rIns="0" bIns="0" rtlCol="0" anchor="ctr"/>
-          <a:lstStyle/>
-          <a:p>
-            <a:pPr algn="ctr" indent="0" marL="0">
-              <a:buNone/>
-            </a:pPr>
-            <a:r>
-              <a:rPr lang="en-US" sz="1400" b="1" dirty="0">
-                <a:solidFill>
-                  <a:srgbClr val="0D9488"/>
-                </a:solidFill>
-                <a:latin typeface="Trebuchet MS" pitchFamily="34" charset="0"/>
-                <a:ea typeface="Trebuchet MS" pitchFamily="34" charset="-122"/>
-                <a:cs typeface="Trebuchet MS" pitchFamily="34" charset="-120"/>
-              </a:rPr>
-              <a:t>photosensitive</a:t>
-            </a:r>
-            <a:endParaRPr lang="en-US" sz="1400" dirty="0"/>
-          </a:p>
-        </p:txBody>
-      </p:sp>
-      <p:sp>
-        <p:nvSpPr>
-          <p:cNvPr id="22" name="Text 20"/>
-          <p:cNvSpPr/>
-          <p:nvPr/>
-        </p:nvSpPr>
-        <p:spPr>
-          <a:xfrm>
-            <a:off x="3185160" y="4005072"/>
-            <a:ext cx="2499360" cy="457200"/>
-          </a:xfrm>
-          <a:prstGeom prst="rect">
-            <a:avLst/>
-          </a:prstGeom>
-          <a:noFill/>
-          <a:ln/>
-        </p:spPr>
-        <p:txBody>
-          <a:bodyPr wrap="square" lIns="0" tIns="0" rIns="0" bIns="0" rtlCol="0" anchor="ctr"/>
-          <a:lstStyle/>
-          <a:p>
-            <a:pPr algn="ctr" indent="0" marL="0">
-              <a:buNone/>
-            </a:pPr>
-            <a:r>
-              <a:rPr lang="en-US" sz="900" i="1" dirty="0">
-                <a:solidFill>
-                  <a:srgbClr val="475569"/>
-                </a:solidFill>
-                <a:latin typeface="Calibri" pitchFamily="34" charset="0"/>
-                <a:ea typeface="Calibri" pitchFamily="34" charset="-122"/>
-                <a:cs typeface="Calibri" pitchFamily="34" charset="-120"/>
-              </a:rPr>
-              <a:t>write your breakdown below</a:t>
-            </a:r>
-            <a:endParaRPr lang="en-US" sz="900" dirty="0"/>
-          </a:p>
-        </p:txBody>
-      </p:sp>
-      <p:sp>
-        <p:nvSpPr>
-          <p:cNvPr id="23" name="Shape 21"/>
-          <p:cNvSpPr/>
-          <p:nvPr/>
-        </p:nvSpPr>
-        <p:spPr>
-          <a:xfrm>
-            <a:off x="5958840" y="3456432"/>
-            <a:ext cx="2499360" cy="1005840"/>
-          </a:xfrm>
-          <a:prstGeom prst="rect">
-            <a:avLst>
-              <a:gd name="adj" fmla="val 7273"/>
-            </a:avLst>
-          </a:prstGeom>
-          <a:solidFill>
-            <a:srgbClr val="F8FAFC"/>
-          </a:solidFill>
-          <a:ln w="12700">
-            <a:solidFill>
-              <a:srgbClr val="E2E8F0"/>
-            </a:solidFill>
-            <a:prstDash val="solid"/>
-          </a:ln>
-        </p:spPr>
-      </p:sp>
-      <p:sp>
-        <p:nvSpPr>
-          <p:cNvPr id="24" name="Shape 22"/>
-          <p:cNvSpPr/>
-          <p:nvPr/>
-        </p:nvSpPr>
-        <p:spPr>
-          <a:xfrm>
-            <a:off x="5958840" y="3977640"/>
-            <a:ext cx="2499360" cy="0"/>
-          </a:xfrm>
-          <a:prstGeom prst="line">
-            <a:avLst/>
-          </a:prstGeom>
-          <a:noFill/>
-          <a:ln w="12700">
-            <a:solidFill>
-              <a:srgbClr val="E2E8F0"/>
-            </a:solidFill>
-            <a:prstDash val="dash"/>
-          </a:ln>
-        </p:spPr>
-      </p:sp>
-      <p:sp>
-        <p:nvSpPr>
-          <p:cNvPr id="25" name="Text 23"/>
-          <p:cNvSpPr/>
-          <p:nvPr/>
-        </p:nvSpPr>
-        <p:spPr>
-          <a:xfrm>
-            <a:off x="5958840" y="3456432"/>
-            <a:ext cx="2499360" cy="502920"/>
-          </a:xfrm>
-          <a:prstGeom prst="rect">
-            <a:avLst/>
-          </a:prstGeom>
-          <a:noFill/>
-          <a:ln/>
-        </p:spPr>
-        <p:txBody>
-          <a:bodyPr wrap="square" lIns="0" tIns="0" rIns="0" bIns="0" rtlCol="0" anchor="ctr"/>
-          <a:lstStyle/>
-          <a:p>
-            <a:pPr algn="ctr" indent="0" marL="0">
-              <a:buNone/>
-            </a:pPr>
-            <a:r>
-              <a:rPr lang="en-US" sz="1400" b="1" dirty="0">
-                <a:solidFill>
-                  <a:srgbClr val="0D9488"/>
-                </a:solidFill>
-                <a:latin typeface="Trebuchet MS" pitchFamily="34" charset="0"/>
-                <a:ea typeface="Trebuchet MS" pitchFamily="34" charset="-122"/>
-                <a:cs typeface="Trebuchet MS" pitchFamily="34" charset="-120"/>
-              </a:rPr>
-              <a:t>photographer</a:t>
+              <a:t>photogenic</a:t>
             </a:r>
             <a:endParaRPr lang="en-US" sz="1400" dirty="0"/>
           </a:p>
@@ -20686,7 +20655,7 @@
                 <a:ea typeface="Calibri" pitchFamily="34" charset="-122"/>
                 <a:cs typeface="Calibri" pitchFamily="34" charset="-120"/>
               </a:rPr>
-              <a:t>putting or placing</a:t>
+              <a:t>placing or arranging</a:t>
             </a:r>
             <a:endParaRPr lang="en-US" sz="850" dirty="0"/>
           </a:p>
@@ -21783,7 +21752,7 @@
                 <a:ea typeface="Calibri" pitchFamily="34" charset="-122"/>
                 <a:cs typeface="Calibri" pitchFamily="34" charset="-120"/>
               </a:rPr>
-              <a:t>putting or placing</a:t>
+              <a:t>placing or arranging</a:t>
             </a:r>
             <a:endParaRPr lang="en-US" sz="850" dirty="0"/>
           </a:p>
@@ -23327,7 +23296,7 @@
                 <a:ea typeface="Calibri" pitchFamily="34" charset="-122"/>
                 <a:cs typeface="Calibri" pitchFamily="34" charset="-120"/>
               </a:rPr>
-              <a:t>putting or placing</a:t>
+              <a:t>placing or arranging</a:t>
             </a:r>
             <a:endParaRPr lang="en-US" sz="850" dirty="0"/>
           </a:p>
@@ -25261,7 +25230,7 @@
                 <a:ea typeface="Trebuchet MS" pitchFamily="34" charset="-122"/>
                 <a:cs typeface="Trebuchet MS" pitchFamily="34" charset="-120"/>
               </a:rPr>
-              <a:t>photosensitive</a:t>
+              <a:t>telephoto</a:t>
             </a:r>
             <a:endParaRPr lang="en-US" sz="2800" dirty="0"/>
           </a:p>
@@ -26088,7 +26057,7 @@
                 <a:ea typeface="Trebuchet MS" pitchFamily="34" charset="-122"/>
                 <a:cs typeface="Trebuchet MS" pitchFamily="34" charset="-120"/>
               </a:rPr>
-              <a:t>photosensitive</a:t>
+              <a:t>telephoto</a:t>
             </a:r>
             <a:endParaRPr lang="en-US" sz="2800" dirty="0"/>
           </a:p>
@@ -26168,7 +26137,7 @@
         </p:nvSpPr>
         <p:spPr>
           <a:xfrm>
-            <a:off x="2221992" y="2258568"/>
+            <a:off x="2938272" y="2258568"/>
             <a:ext cx="1828800" cy="292608"/>
           </a:xfrm>
           <a:prstGeom prst="rect">
@@ -26177,11 +26146,11 @@
             </a:avLst>
           </a:prstGeom>
           <a:solidFill>
-            <a:srgbClr val="CCFBF1"/>
+            <a:srgbClr val="DDD6FE"/>
           </a:solidFill>
           <a:ln w="19050">
             <a:solidFill>
-              <a:srgbClr val="0D9488"/>
+              <a:srgbClr val="7C3AED"/>
             </a:solidFill>
             <a:prstDash val="solid"/>
           </a:ln>
@@ -26202,7 +26171,7 @@
         </p:nvSpPr>
         <p:spPr>
           <a:xfrm>
-            <a:off x="2221992" y="2258568"/>
+            <a:off x="2938272" y="2258568"/>
             <a:ext cx="1828800" cy="292608"/>
           </a:xfrm>
           <a:prstGeom prst="rect">
@@ -26221,13 +26190,13 @@
             <a:r>
               <a:rPr lang="en-US" sz="1300" b="1" dirty="0">
                 <a:solidFill>
-                  <a:srgbClr val="0F766E"/>
+                  <a:srgbClr val="4C1D95"/>
                 </a:solidFill>
                 <a:latin typeface="Trebuchet MS" pitchFamily="34" charset="0"/>
                 <a:ea typeface="Trebuchet MS" pitchFamily="34" charset="-122"/>
                 <a:cs typeface="Trebuchet MS" pitchFamily="34" charset="-120"/>
               </a:rPr>
-              <a:t>photo</a:t>
+              <a:t>tele</a:t>
             </a:r>
             <a:endParaRPr lang="en-US" sz="1300" dirty="0"/>
           </a:p>
@@ -26241,7 +26210,7 @@
         </p:nvSpPr>
         <p:spPr>
           <a:xfrm>
-            <a:off x="2221992" y="2569464"/>
+            <a:off x="2938272" y="2569464"/>
             <a:ext cx="1828800" cy="201168"/>
           </a:xfrm>
           <a:prstGeom prst="rect">
@@ -26266,7 +26235,7 @@
                 <a:ea typeface="Calibri" pitchFamily="34" charset="-122"/>
                 <a:cs typeface="Calibri" pitchFamily="34" charset="-120"/>
               </a:rPr>
-              <a:t>light</a:t>
+              <a:t>far away</a:t>
             </a:r>
             <a:endParaRPr lang="en-US" sz="850" dirty="0"/>
           </a:p>
@@ -26280,7 +26249,7 @@
         </p:nvSpPr>
         <p:spPr>
           <a:xfrm>
-            <a:off x="4370832" y="2258568"/>
+            <a:off x="5803392" y="2258568"/>
             <a:ext cx="1828800" cy="292608"/>
           </a:xfrm>
           <a:prstGeom prst="rect">
@@ -26289,11 +26258,11 @@
             </a:avLst>
           </a:prstGeom>
           <a:solidFill>
-            <a:srgbClr val="FCE7F3"/>
+            <a:srgbClr val="CCFBF1"/>
           </a:solidFill>
           <a:ln w="19050">
             <a:solidFill>
-              <a:srgbClr val="DB2777"/>
+              <a:srgbClr val="0D9488"/>
             </a:solidFill>
             <a:prstDash val="solid"/>
           </a:ln>
@@ -26314,7 +26283,7 @@
         </p:nvSpPr>
         <p:spPr>
           <a:xfrm>
-            <a:off x="4370832" y="2258568"/>
+            <a:off x="5803392" y="2258568"/>
             <a:ext cx="1828800" cy="292608"/>
           </a:xfrm>
           <a:prstGeom prst="rect">
@@ -26333,13 +26302,13 @@
             <a:r>
               <a:rPr lang="en-US" sz="1300" b="1" dirty="0">
                 <a:solidFill>
-                  <a:srgbClr val="9D174D"/>
+                  <a:srgbClr val="0F766E"/>
                 </a:solidFill>
                 <a:latin typeface="Trebuchet MS" pitchFamily="34" charset="0"/>
                 <a:ea typeface="Trebuchet MS" pitchFamily="34" charset="-122"/>
                 <a:cs typeface="Trebuchet MS" pitchFamily="34" charset="-120"/>
               </a:rPr>
-              <a:t>sens</a:t>
+              <a:t>photo</a:t>
             </a:r>
             <a:endParaRPr lang="en-US" sz="1300" dirty="0"/>
           </a:p>
@@ -26353,7 +26322,7 @@
         </p:nvSpPr>
         <p:spPr>
           <a:xfrm>
-            <a:off x="4370832" y="2569464"/>
+            <a:off x="5803392" y="2569464"/>
             <a:ext cx="1828800" cy="201168"/>
           </a:xfrm>
           <a:prstGeom prst="rect">
@@ -26378,7 +26347,7 @@
                 <a:ea typeface="Calibri" pitchFamily="34" charset="-122"/>
                 <a:cs typeface="Calibri" pitchFamily="34" charset="-120"/>
               </a:rPr>
-              <a:t>feel or perceive</a:t>
+              <a:t>light</a:t>
             </a:r>
             <a:endParaRPr lang="en-US" sz="850" dirty="0"/>
           </a:p>
@@ -26392,30 +26361,23 @@
         </p:nvSpPr>
         <p:spPr>
           <a:xfrm>
-            <a:off x="6519672" y="2258568"/>
-            <a:ext cx="1828800" cy="292608"/>
+            <a:off x="365760" y="3273552"/>
+            <a:ext cx="1371600" cy="658368"/>
           </a:xfrm>
           <a:prstGeom prst="rect">
             <a:avLst>
-              <a:gd name="adj" fmla="val 25000"/>
+              <a:gd name="adj" fmla="val 8333"/>
             </a:avLst>
           </a:prstGeom>
           <a:solidFill>
-            <a:srgbClr val="FCE7F3"/>
-          </a:solidFill>
-          <a:ln w="19050">
-            <a:solidFill>
-              <a:srgbClr val="DB2777"/>
-            </a:solidFill>
-            <a:prstDash val="solid"/>
-          </a:ln>
-          <a:effectLst>
-            <a:outerShdw sx="100000" sy="100000" kx="0" ky="0" algn="bl" rotWithShape="0" blurRad="101600" dist="38100" dir="8100000">
-              <a:srgbClr val="000000">
-                <a:alpha val="12000"/>
-              </a:srgbClr>
-            </a:outerShdw>
-          </a:effectLst>
+            <a:srgbClr val="E2E8F0"/>
+          </a:solidFill>
+          <a:ln w="12700">
+            <a:solidFill>
+              <a:srgbClr val="E2E8F0"/>
+            </a:solidFill>
+            <a:prstDash val="solid"/>
+          </a:ln>
         </p:spPr>
       </p:sp>
       <p:sp>
@@ -26426,90 +26388,117 @@
         </p:nvSpPr>
         <p:spPr>
           <a:xfrm>
-            <a:off x="6519672" y="2258568"/>
-            <a:ext cx="1828800" cy="292608"/>
-          </a:xfrm>
-          <a:prstGeom prst="rect">
-            <a:avLst/>
-          </a:prstGeom>
-          <a:noFill/>
-          <a:ln/>
-        </p:spPr>
-        <p:txBody>
-          <a:bodyPr wrap="square" lIns="0" tIns="0" rIns="0" bIns="0" rtlCol="0" anchor="ctr"/>
-          <a:lstStyle/>
-          <a:p>
-            <a:pPr algn="ctr" indent="0" marL="0">
-              <a:buNone/>
-            </a:pPr>
-            <a:r>
-              <a:rPr lang="en-US" sz="1300" b="1" dirty="0">
-                <a:solidFill>
-                  <a:srgbClr val="9D174D"/>
+            <a:off x="365760" y="3273552"/>
+            <a:ext cx="1371600" cy="658368"/>
+          </a:xfrm>
+          <a:prstGeom prst="rect">
+            <a:avLst/>
+          </a:prstGeom>
+          <a:noFill/>
+          <a:ln/>
+        </p:spPr>
+        <p:txBody>
+          <a:bodyPr wrap="square" lIns="0" tIns="0" rIns="0" bIns="0" rtlCol="0" anchor="ctr"/>
+          <a:lstStyle/>
+          <a:p>
+            <a:pPr algn="ctr" indent="0" marL="0">
+              <a:buNone/>
+            </a:pPr>
+            <a:r>
+              <a:rPr lang="en-US" sz="1100" b="1" dirty="0">
+                <a:solidFill>
+                  <a:srgbClr val="475569"/>
                 </a:solidFill>
                 <a:latin typeface="Trebuchet MS" pitchFamily="34" charset="0"/>
                 <a:ea typeface="Trebuchet MS" pitchFamily="34" charset="-122"/>
                 <a:cs typeface="Trebuchet MS" pitchFamily="34" charset="-120"/>
               </a:rPr>
-              <a:t>itive</a:t>
-            </a:r>
-            <a:endParaRPr lang="en-US" sz="1300" dirty="0"/>
-          </a:p>
-        </p:txBody>
-      </p:sp>
-      <p:sp>
-        <p:nvSpPr>
-          <p:cNvPr id="24" name="Text 22"/>
-          <p:cNvSpPr/>
-          <p:nvPr/>
-        </p:nvSpPr>
-        <p:spPr>
-          <a:xfrm>
-            <a:off x="6519672" y="2569464"/>
-            <a:ext cx="1828800" cy="201168"/>
-          </a:xfrm>
-          <a:prstGeom prst="rect">
-            <a:avLst/>
-          </a:prstGeom>
-          <a:noFill/>
-          <a:ln/>
-        </p:spPr>
-        <p:txBody>
-          <a:bodyPr wrap="square" lIns="0" tIns="0" rIns="0" bIns="0" rtlCol="0" anchor="t"/>
-          <a:lstStyle/>
-          <a:p>
-            <a:pPr algn="ctr" indent="0" marL="0">
-              <a:buNone/>
-            </a:pPr>
-            <a:r>
-              <a:rPr lang="en-US" sz="850" dirty="0">
-                <a:solidFill>
-                  <a:srgbClr val="475569"/>
+              <a:t>Syllables</a:t>
+            </a:r>
+            <a:endParaRPr lang="en-US" sz="1100" dirty="0"/>
+          </a:p>
+        </p:txBody>
+      </p:sp>
+      <p:sp>
+        <p:nvSpPr>
+          <p:cNvPr id="24" name="Shape 22"/>
+          <p:cNvSpPr/>
+          <p:nvPr/>
+        </p:nvSpPr>
+        <p:spPr>
+          <a:xfrm>
+            <a:off x="1874520" y="3273552"/>
+            <a:ext cx="6903720" cy="658368"/>
+          </a:xfrm>
+          <a:prstGeom prst="rect">
+            <a:avLst>
+              <a:gd name="adj" fmla="val 8333"/>
+            </a:avLst>
+          </a:prstGeom>
+          <a:solidFill>
+            <a:srgbClr val="F8FAFC"/>
+          </a:solidFill>
+          <a:ln w="12700">
+            <a:solidFill>
+              <a:srgbClr val="E2E8F0"/>
+            </a:solidFill>
+            <a:prstDash val="dash"/>
+          </a:ln>
+        </p:spPr>
+      </p:sp>
+      <p:sp>
+        <p:nvSpPr>
+          <p:cNvPr id="25" name="Text 23"/>
+          <p:cNvSpPr/>
+          <p:nvPr/>
+        </p:nvSpPr>
+        <p:spPr>
+          <a:xfrm>
+            <a:off x="1874520" y="3273552"/>
+            <a:ext cx="6903720" cy="658368"/>
+          </a:xfrm>
+          <a:prstGeom prst="rect">
+            <a:avLst/>
+          </a:prstGeom>
+          <a:noFill/>
+          <a:ln/>
+        </p:spPr>
+        <p:txBody>
+          <a:bodyPr wrap="square" rtlCol="0" anchor="ctr"/>
+          <a:lstStyle/>
+          <a:p>
+            <a:pPr algn="ctr" indent="0" marL="0">
+              <a:buNone/>
+            </a:pPr>
+            <a:r>
+              <a:rPr lang="en-US" sz="1100" i="1" dirty="0">
+                <a:solidFill>
+                  <a:srgbClr val="CBD5E1"/>
                 </a:solidFill>
                 <a:latin typeface="Calibri" pitchFamily="34" charset="0"/>
                 <a:ea typeface="Calibri" pitchFamily="34" charset="-122"/>
                 <a:cs typeface="Calibri" pitchFamily="34" charset="-120"/>
               </a:rPr>
-              <a:t>having the quality of</a:t>
-            </a:r>
-            <a:endParaRPr lang="en-US" sz="850" dirty="0"/>
-          </a:p>
-        </p:txBody>
-      </p:sp>
-      <p:sp>
-        <p:nvSpPr>
-          <p:cNvPr id="25" name="Shape 23"/>
-          <p:cNvSpPr/>
-          <p:nvPr/>
-        </p:nvSpPr>
-        <p:spPr>
-          <a:xfrm>
-            <a:off x="365760" y="3273552"/>
-            <a:ext cx="1371600" cy="658368"/>
+              <a:t>Write here...</a:t>
+            </a:r>
+            <a:endParaRPr lang="en-US" sz="1100" dirty="0"/>
+          </a:p>
+        </p:txBody>
+      </p:sp>
+      <p:sp>
+        <p:nvSpPr>
+          <p:cNvPr id="26" name="Shape 24"/>
+          <p:cNvSpPr/>
+          <p:nvPr/>
+        </p:nvSpPr>
+        <p:spPr>
+          <a:xfrm>
+            <a:off x="365760" y="4096512"/>
+            <a:ext cx="1371600" cy="804672"/>
           </a:xfrm>
           <a:prstGeom prst="rect">
             <a:avLst>
-              <a:gd name="adj" fmla="val 8333"/>
+              <a:gd name="adj" fmla="val 6818"/>
             </a:avLst>
           </a:prstGeom>
           <a:solidFill>
@@ -26525,14 +26514,14 @@
       </p:sp>
       <p:sp>
         <p:nvSpPr>
-          <p:cNvPr id="26" name="Text 24"/>
-          <p:cNvSpPr/>
-          <p:nvPr/>
-        </p:nvSpPr>
-        <p:spPr>
-          <a:xfrm>
-            <a:off x="365760" y="3273552"/>
-            <a:ext cx="1371600" cy="658368"/>
+          <p:cNvPr id="27" name="Text 25"/>
+          <p:cNvSpPr/>
+          <p:nvPr/>
+        </p:nvSpPr>
+        <p:spPr>
+          <a:xfrm>
+            <a:off x="365760" y="4096512"/>
+            <a:ext cx="1371600" cy="804672"/>
           </a:xfrm>
           <a:prstGeom prst="rect">
             <a:avLst/>
@@ -26556,7 +26545,7 @@
                 <a:ea typeface="Trebuchet MS" pitchFamily="34" charset="-122"/>
                 <a:cs typeface="Trebuchet MS" pitchFamily="34" charset="-120"/>
               </a:rPr>
-              <a:t>Syllables</a:t>
+              <a:t>Phonemes</a:t>
             </a:r>
             <a:endParaRPr lang="en-US" sz="1100" dirty="0"/>
           </a:p>
@@ -26564,80 +26553,14 @@
       </p:sp>
       <p:sp>
         <p:nvSpPr>
-          <p:cNvPr id="27" name="Shape 25"/>
-          <p:cNvSpPr/>
-          <p:nvPr/>
-        </p:nvSpPr>
-        <p:spPr>
-          <a:xfrm>
-            <a:off x="1874520" y="3273552"/>
-            <a:ext cx="6903720" cy="658368"/>
-          </a:xfrm>
-          <a:prstGeom prst="rect">
-            <a:avLst>
-              <a:gd name="adj" fmla="val 8333"/>
-            </a:avLst>
-          </a:prstGeom>
-          <a:solidFill>
-            <a:srgbClr val="F8FAFC"/>
-          </a:solidFill>
-          <a:ln w="12700">
-            <a:solidFill>
-              <a:srgbClr val="E2E8F0"/>
-            </a:solidFill>
-            <a:prstDash val="dash"/>
-          </a:ln>
-        </p:spPr>
-      </p:sp>
-      <p:sp>
-        <p:nvSpPr>
-          <p:cNvPr id="28" name="Text 26"/>
-          <p:cNvSpPr/>
-          <p:nvPr/>
-        </p:nvSpPr>
-        <p:spPr>
-          <a:xfrm>
-            <a:off x="1874520" y="3273552"/>
-            <a:ext cx="6903720" cy="658368"/>
-          </a:xfrm>
-          <a:prstGeom prst="rect">
-            <a:avLst/>
-          </a:prstGeom>
-          <a:noFill/>
-          <a:ln/>
-        </p:spPr>
-        <p:txBody>
-          <a:bodyPr wrap="square" rtlCol="0" anchor="ctr"/>
-          <a:lstStyle/>
-          <a:p>
-            <a:pPr algn="ctr" indent="0" marL="0">
-              <a:buNone/>
-            </a:pPr>
-            <a:r>
-              <a:rPr lang="en-US" sz="1100" i="1" dirty="0">
-                <a:solidFill>
-                  <a:srgbClr val="CBD5E1"/>
-                </a:solidFill>
-                <a:latin typeface="Calibri" pitchFamily="34" charset="0"/>
-                <a:ea typeface="Calibri" pitchFamily="34" charset="-122"/>
-                <a:cs typeface="Calibri" pitchFamily="34" charset="-120"/>
-              </a:rPr>
-              <a:t>Write here...</a:t>
-            </a:r>
-            <a:endParaRPr lang="en-US" sz="1100" dirty="0"/>
-          </a:p>
-        </p:txBody>
-      </p:sp>
-      <p:sp>
-        <p:nvSpPr>
-          <p:cNvPr id="29" name="Shape 27"/>
-          <p:cNvSpPr/>
-          <p:nvPr/>
-        </p:nvSpPr>
-        <p:spPr>
-          <a:xfrm>
-            <a:off x="365760" y="4096512"/>
-            <a:ext cx="1371600" cy="804672"/>
+          <p:cNvPr id="28" name="Shape 26"/>
+          <p:cNvSpPr/>
+          <p:nvPr/>
+        </p:nvSpPr>
+        <p:spPr>
+          <a:xfrm>
+            <a:off x="1874520" y="4096512"/>
+            <a:ext cx="6903720" cy="804672"/>
           </a:xfrm>
           <a:prstGeom prst="rect">
             <a:avLst>
@@ -26645,85 +26568,19 @@
             </a:avLst>
           </a:prstGeom>
           <a:solidFill>
-            <a:srgbClr val="E2E8F0"/>
+            <a:srgbClr val="F8FAFC"/>
           </a:solidFill>
           <a:ln w="12700">
             <a:solidFill>
               <a:srgbClr val="E2E8F0"/>
             </a:solidFill>
-            <a:prstDash val="solid"/>
-          </a:ln>
-        </p:spPr>
-      </p:sp>
-      <p:sp>
-        <p:nvSpPr>
-          <p:cNvPr id="30" name="Text 28"/>
-          <p:cNvSpPr/>
-          <p:nvPr/>
-        </p:nvSpPr>
-        <p:spPr>
-          <a:xfrm>
-            <a:off x="365760" y="4096512"/>
-            <a:ext cx="1371600" cy="804672"/>
-          </a:xfrm>
-          <a:prstGeom prst="rect">
-            <a:avLst/>
-          </a:prstGeom>
-          <a:noFill/>
-          <a:ln/>
-        </p:spPr>
-        <p:txBody>
-          <a:bodyPr wrap="square" lIns="0" tIns="0" rIns="0" bIns="0" rtlCol="0" anchor="ctr"/>
-          <a:lstStyle/>
-          <a:p>
-            <a:pPr algn="ctr" indent="0" marL="0">
-              <a:buNone/>
-            </a:pPr>
-            <a:r>
-              <a:rPr lang="en-US" sz="1100" b="1" dirty="0">
-                <a:solidFill>
-                  <a:srgbClr val="475569"/>
-                </a:solidFill>
-                <a:latin typeface="Trebuchet MS" pitchFamily="34" charset="0"/>
-                <a:ea typeface="Trebuchet MS" pitchFamily="34" charset="-122"/>
-                <a:cs typeface="Trebuchet MS" pitchFamily="34" charset="-120"/>
-              </a:rPr>
-              <a:t>Phonemes</a:t>
-            </a:r>
-            <a:endParaRPr lang="en-US" sz="1100" dirty="0"/>
-          </a:p>
-        </p:txBody>
-      </p:sp>
-      <p:sp>
-        <p:nvSpPr>
-          <p:cNvPr id="31" name="Shape 29"/>
-          <p:cNvSpPr/>
-          <p:nvPr/>
-        </p:nvSpPr>
-        <p:spPr>
-          <a:xfrm>
-            <a:off x="1874520" y="4096512"/>
-            <a:ext cx="6903720" cy="804672"/>
-          </a:xfrm>
-          <a:prstGeom prst="rect">
-            <a:avLst>
-              <a:gd name="adj" fmla="val 6818"/>
-            </a:avLst>
-          </a:prstGeom>
-          <a:solidFill>
-            <a:srgbClr val="F8FAFC"/>
-          </a:solidFill>
-          <a:ln w="12700">
-            <a:solidFill>
-              <a:srgbClr val="E2E8F0"/>
-            </a:solidFill>
             <a:prstDash val="dash"/>
           </a:ln>
         </p:spPr>
       </p:sp>
       <p:sp>
         <p:nvSpPr>
-          <p:cNvPr id="32" name="Text 30"/>
+          <p:cNvPr id="29" name="Text 27"/>
           <p:cNvSpPr/>
           <p:nvPr/>
         </p:nvSpPr>
@@ -27904,7 +27761,7 @@
                 <a:ea typeface="Trebuchet MS" pitchFamily="34" charset="-122"/>
                 <a:cs typeface="Trebuchet MS" pitchFamily="34" charset="-120"/>
               </a:rPr>
-              <a:t>photosensitive</a:t>
+              <a:t>telephoto</a:t>
             </a:r>
             <a:endParaRPr lang="en-US" sz="2800" dirty="0"/>
           </a:p>
@@ -27984,7 +27841,7 @@
         </p:nvSpPr>
         <p:spPr>
           <a:xfrm>
-            <a:off x="2221992" y="2258568"/>
+            <a:off x="2938272" y="2258568"/>
             <a:ext cx="1828800" cy="292608"/>
           </a:xfrm>
           <a:prstGeom prst="rect">
@@ -27993,11 +27850,11 @@
             </a:avLst>
           </a:prstGeom>
           <a:solidFill>
-            <a:srgbClr val="CCFBF1"/>
+            <a:srgbClr val="DDD6FE"/>
           </a:solidFill>
           <a:ln w="19050">
             <a:solidFill>
-              <a:srgbClr val="0D9488"/>
+              <a:srgbClr val="7C3AED"/>
             </a:solidFill>
             <a:prstDash val="solid"/>
           </a:ln>
@@ -28018,7 +27875,7 @@
         </p:nvSpPr>
         <p:spPr>
           <a:xfrm>
-            <a:off x="2221992" y="2258568"/>
+            <a:off x="2938272" y="2258568"/>
             <a:ext cx="1828800" cy="292608"/>
           </a:xfrm>
           <a:prstGeom prst="rect">
@@ -28037,13 +27894,13 @@
             <a:r>
               <a:rPr lang="en-US" sz="1300" b="1" dirty="0">
                 <a:solidFill>
-                  <a:srgbClr val="0F766E"/>
+                  <a:srgbClr val="4C1D95"/>
                 </a:solidFill>
                 <a:latin typeface="Trebuchet MS" pitchFamily="34" charset="0"/>
                 <a:ea typeface="Trebuchet MS" pitchFamily="34" charset="-122"/>
                 <a:cs typeface="Trebuchet MS" pitchFamily="34" charset="-120"/>
               </a:rPr>
-              <a:t>photo</a:t>
+              <a:t>tele</a:t>
             </a:r>
             <a:endParaRPr lang="en-US" sz="1300" dirty="0"/>
           </a:p>
@@ -28057,7 +27914,7 @@
         </p:nvSpPr>
         <p:spPr>
           <a:xfrm>
-            <a:off x="2221992" y="2569464"/>
+            <a:off x="2938272" y="2569464"/>
             <a:ext cx="1828800" cy="201168"/>
           </a:xfrm>
           <a:prstGeom prst="rect">
@@ -28082,7 +27939,7 @@
                 <a:ea typeface="Calibri" pitchFamily="34" charset="-122"/>
                 <a:cs typeface="Calibri" pitchFamily="34" charset="-120"/>
               </a:rPr>
-              <a:t>light</a:t>
+              <a:t>far away</a:t>
             </a:r>
             <a:endParaRPr lang="en-US" sz="850" dirty="0"/>
           </a:p>
@@ -28096,7 +27953,7 @@
         </p:nvSpPr>
         <p:spPr>
           <a:xfrm>
-            <a:off x="4370832" y="2258568"/>
+            <a:off x="5803392" y="2258568"/>
             <a:ext cx="1828800" cy="292608"/>
           </a:xfrm>
           <a:prstGeom prst="rect">
@@ -28105,11 +27962,11 @@
             </a:avLst>
           </a:prstGeom>
           <a:solidFill>
-            <a:srgbClr val="FCE7F3"/>
+            <a:srgbClr val="CCFBF1"/>
           </a:solidFill>
           <a:ln w="19050">
             <a:solidFill>
-              <a:srgbClr val="DB2777"/>
+              <a:srgbClr val="0D9488"/>
             </a:solidFill>
             <a:prstDash val="solid"/>
           </a:ln>
@@ -28130,7 +27987,7 @@
         </p:nvSpPr>
         <p:spPr>
           <a:xfrm>
-            <a:off x="4370832" y="2258568"/>
+            <a:off x="5803392" y="2258568"/>
             <a:ext cx="1828800" cy="292608"/>
           </a:xfrm>
           <a:prstGeom prst="rect">
@@ -28149,13 +28006,13 @@
             <a:r>
               <a:rPr lang="en-US" sz="1300" b="1" dirty="0">
                 <a:solidFill>
-                  <a:srgbClr val="9D174D"/>
+                  <a:srgbClr val="0F766E"/>
                 </a:solidFill>
                 <a:latin typeface="Trebuchet MS" pitchFamily="34" charset="0"/>
                 <a:ea typeface="Trebuchet MS" pitchFamily="34" charset="-122"/>
                 <a:cs typeface="Trebuchet MS" pitchFamily="34" charset="-120"/>
               </a:rPr>
-              <a:t>sens</a:t>
+              <a:t>photo</a:t>
             </a:r>
             <a:endParaRPr lang="en-US" sz="1300" dirty="0"/>
           </a:p>
@@ -28169,7 +28026,7 @@
         </p:nvSpPr>
         <p:spPr>
           <a:xfrm>
-            <a:off x="4370832" y="2569464"/>
+            <a:off x="5803392" y="2569464"/>
             <a:ext cx="1828800" cy="201168"/>
           </a:xfrm>
           <a:prstGeom prst="rect">
@@ -28194,7 +28051,7 @@
                 <a:ea typeface="Calibri" pitchFamily="34" charset="-122"/>
                 <a:cs typeface="Calibri" pitchFamily="34" charset="-120"/>
               </a:rPr>
-              <a:t>feel or perceive</a:t>
+              <a:t>light</a:t>
             </a:r>
             <a:endParaRPr lang="en-US" sz="850" dirty="0"/>
           </a:p>
@@ -28208,30 +28065,23 @@
         </p:nvSpPr>
         <p:spPr>
           <a:xfrm>
-            <a:off x="6519672" y="2258568"/>
-            <a:ext cx="1828800" cy="292608"/>
+            <a:off x="365760" y="3273552"/>
+            <a:ext cx="1371600" cy="658368"/>
           </a:xfrm>
           <a:prstGeom prst="rect">
             <a:avLst>
-              <a:gd name="adj" fmla="val 25000"/>
+              <a:gd name="adj" fmla="val 8333"/>
             </a:avLst>
           </a:prstGeom>
           <a:solidFill>
-            <a:srgbClr val="FCE7F3"/>
-          </a:solidFill>
-          <a:ln w="19050">
-            <a:solidFill>
-              <a:srgbClr val="DB2777"/>
-            </a:solidFill>
-            <a:prstDash val="solid"/>
-          </a:ln>
-          <a:effectLst>
-            <a:outerShdw sx="100000" sy="100000" kx="0" ky="0" algn="bl" rotWithShape="0" blurRad="101600" dist="38100" dir="8100000">
-              <a:srgbClr val="000000">
-                <a:alpha val="12000"/>
-              </a:srgbClr>
-            </a:outerShdw>
-          </a:effectLst>
+            <a:srgbClr val="E2E8F0"/>
+          </a:solidFill>
+          <a:ln w="12700">
+            <a:solidFill>
+              <a:srgbClr val="E2E8F0"/>
+            </a:solidFill>
+            <a:prstDash val="solid"/>
+          </a:ln>
         </p:spPr>
       </p:sp>
       <p:sp>
@@ -28242,86 +28092,47 @@
         </p:nvSpPr>
         <p:spPr>
           <a:xfrm>
-            <a:off x="6519672" y="2258568"/>
-            <a:ext cx="1828800" cy="292608"/>
-          </a:xfrm>
-          <a:prstGeom prst="rect">
-            <a:avLst/>
-          </a:prstGeom>
-          <a:noFill/>
-          <a:ln/>
-        </p:spPr>
-        <p:txBody>
-          <a:bodyPr wrap="square" lIns="0" tIns="0" rIns="0" bIns="0" rtlCol="0" anchor="ctr"/>
-          <a:lstStyle/>
-          <a:p>
-            <a:pPr algn="ctr" indent="0" marL="0">
-              <a:buNone/>
-            </a:pPr>
-            <a:r>
-              <a:rPr lang="en-US" sz="1300" b="1" dirty="0">
-                <a:solidFill>
-                  <a:srgbClr val="9D174D"/>
+            <a:off x="365760" y="3273552"/>
+            <a:ext cx="1371600" cy="658368"/>
+          </a:xfrm>
+          <a:prstGeom prst="rect">
+            <a:avLst/>
+          </a:prstGeom>
+          <a:noFill/>
+          <a:ln/>
+        </p:spPr>
+        <p:txBody>
+          <a:bodyPr wrap="square" lIns="0" tIns="0" rIns="0" bIns="0" rtlCol="0" anchor="ctr"/>
+          <a:lstStyle/>
+          <a:p>
+            <a:pPr algn="ctr" indent="0" marL="0">
+              <a:buNone/>
+            </a:pPr>
+            <a:r>
+              <a:rPr lang="en-US" sz="1100" b="1" dirty="0">
+                <a:solidFill>
+                  <a:srgbClr val="475569"/>
                 </a:solidFill>
                 <a:latin typeface="Trebuchet MS" pitchFamily="34" charset="0"/>
                 <a:ea typeface="Trebuchet MS" pitchFamily="34" charset="-122"/>
                 <a:cs typeface="Trebuchet MS" pitchFamily="34" charset="-120"/>
               </a:rPr>
-              <a:t>itive</a:t>
-            </a:r>
-            <a:endParaRPr lang="en-US" sz="1300" dirty="0"/>
-          </a:p>
-        </p:txBody>
-      </p:sp>
-      <p:sp>
-        <p:nvSpPr>
-          <p:cNvPr id="24" name="Text 22"/>
-          <p:cNvSpPr/>
-          <p:nvPr/>
-        </p:nvSpPr>
-        <p:spPr>
-          <a:xfrm>
-            <a:off x="6519672" y="2569464"/>
-            <a:ext cx="1828800" cy="201168"/>
-          </a:xfrm>
-          <a:prstGeom prst="rect">
-            <a:avLst/>
-          </a:prstGeom>
-          <a:noFill/>
-          <a:ln/>
-        </p:spPr>
-        <p:txBody>
-          <a:bodyPr wrap="square" lIns="0" tIns="0" rIns="0" bIns="0" rtlCol="0" anchor="t"/>
-          <a:lstStyle/>
-          <a:p>
-            <a:pPr algn="ctr" indent="0" marL="0">
-              <a:buNone/>
-            </a:pPr>
-            <a:r>
-              <a:rPr lang="en-US" sz="850" dirty="0">
-                <a:solidFill>
-                  <a:srgbClr val="475569"/>
-                </a:solidFill>
-                <a:latin typeface="Calibri" pitchFamily="34" charset="0"/>
-                <a:ea typeface="Calibri" pitchFamily="34" charset="-122"/>
-                <a:cs typeface="Calibri" pitchFamily="34" charset="-120"/>
-              </a:rPr>
-              <a:t>having the quality of</a:t>
-            </a:r>
-            <a:endParaRPr lang="en-US" sz="850" dirty="0"/>
-          </a:p>
-        </p:txBody>
-      </p:sp>
-      <p:sp>
-        <p:nvSpPr>
-          <p:cNvPr id="25" name="Shape 23"/>
-          <p:cNvSpPr/>
-          <p:nvPr/>
-        </p:nvSpPr>
-        <p:spPr>
-          <a:xfrm>
-            <a:off x="365760" y="3273552"/>
-            <a:ext cx="1371600" cy="658368"/>
+              <a:t>Syllables</a:t>
+            </a:r>
+            <a:endParaRPr lang="en-US" sz="1100" dirty="0"/>
+          </a:p>
+        </p:txBody>
+      </p:sp>
+      <p:sp>
+        <p:nvSpPr>
+          <p:cNvPr id="24" name="Shape 22"/>
+          <p:cNvSpPr/>
+          <p:nvPr/>
+        </p:nvSpPr>
+        <p:spPr>
+          <a:xfrm>
+            <a:off x="1874520" y="3273552"/>
+            <a:ext cx="6903720" cy="658368"/>
           </a:xfrm>
           <a:prstGeom prst="rect">
             <a:avLst>
@@ -28329,11 +28140,38 @@
             </a:avLst>
           </a:prstGeom>
           <a:solidFill>
-            <a:srgbClr val="E2E8F0"/>
-          </a:solidFill>
-          <a:ln w="12700">
-            <a:solidFill>
-              <a:srgbClr val="E2E8F0"/>
+            <a:srgbClr val="CCFBF1"/>
+          </a:solidFill>
+          <a:ln w="12700">
+            <a:solidFill>
+              <a:srgbClr val="0D9488"/>
+            </a:solidFill>
+            <a:prstDash val="solid"/>
+          </a:ln>
+        </p:spPr>
+      </p:sp>
+      <p:sp>
+        <p:nvSpPr>
+          <p:cNvPr id="25" name="Shape 23"/>
+          <p:cNvSpPr/>
+          <p:nvPr/>
+        </p:nvSpPr>
+        <p:spPr>
+          <a:xfrm>
+            <a:off x="1975104" y="3364992"/>
+            <a:ext cx="1554480" cy="475488"/>
+          </a:xfrm>
+          <a:prstGeom prst="rect">
+            <a:avLst>
+              <a:gd name="adj" fmla="val 9615"/>
+            </a:avLst>
+          </a:prstGeom>
+          <a:solidFill>
+            <a:srgbClr val="FFFFFF"/>
+          </a:solidFill>
+          <a:ln w="12700">
+            <a:solidFill>
+              <a:srgbClr val="0D9488"/>
             </a:solidFill>
             <a:prstDash val="solid"/>
           </a:ln>
@@ -28347,63 +28185,75 @@
         </p:nvSpPr>
         <p:spPr>
           <a:xfrm>
-            <a:off x="365760" y="3273552"/>
-            <a:ext cx="1371600" cy="658368"/>
-          </a:xfrm>
-          <a:prstGeom prst="rect">
-            <a:avLst/>
-          </a:prstGeom>
-          <a:noFill/>
-          <a:ln/>
-        </p:spPr>
-        <p:txBody>
-          <a:bodyPr wrap="square" lIns="0" tIns="0" rIns="0" bIns="0" rtlCol="0" anchor="ctr"/>
-          <a:lstStyle/>
-          <a:p>
-            <a:pPr algn="ctr" indent="0" marL="0">
-              <a:buNone/>
-            </a:pPr>
-            <a:r>
-              <a:rPr lang="en-US" sz="1100" b="1" dirty="0">
-                <a:solidFill>
-                  <a:srgbClr val="475569"/>
+            <a:off x="1975104" y="3364992"/>
+            <a:ext cx="1554480" cy="475488"/>
+          </a:xfrm>
+          <a:prstGeom prst="rect">
+            <a:avLst/>
+          </a:prstGeom>
+          <a:noFill/>
+          <a:ln/>
+        </p:spPr>
+        <p:txBody>
+          <a:bodyPr wrap="square" lIns="0" tIns="0" rIns="0" bIns="0" rtlCol="0" anchor="ctr"/>
+          <a:lstStyle/>
+          <a:p>
+            <a:pPr algn="ctr" indent="0" marL="0">
+              <a:buNone/>
+            </a:pPr>
+            <a:r>
+              <a:rPr lang="en-US" sz="1400" b="1" dirty="0">
+                <a:solidFill>
+                  <a:srgbClr val="0D9488"/>
                 </a:solidFill>
                 <a:latin typeface="Trebuchet MS" pitchFamily="34" charset="0"/>
                 <a:ea typeface="Trebuchet MS" pitchFamily="34" charset="-122"/>
                 <a:cs typeface="Trebuchet MS" pitchFamily="34" charset="-120"/>
               </a:rPr>
-              <a:t>Syllables</a:t>
-            </a:r>
-            <a:endParaRPr lang="en-US" sz="1100" dirty="0"/>
-          </a:p>
-        </p:txBody>
-      </p:sp>
-      <p:sp>
-        <p:nvSpPr>
-          <p:cNvPr id="27" name="Shape 25"/>
-          <p:cNvSpPr/>
-          <p:nvPr/>
-        </p:nvSpPr>
-        <p:spPr>
-          <a:xfrm>
-            <a:off x="1874520" y="3273552"/>
-            <a:ext cx="6903720" cy="658368"/>
-          </a:xfrm>
-          <a:prstGeom prst="rect">
-            <a:avLst>
-              <a:gd name="adj" fmla="val 8333"/>
-            </a:avLst>
-          </a:prstGeom>
-          <a:solidFill>
-            <a:srgbClr val="CCFBF1"/>
-          </a:solidFill>
-          <a:ln w="12700">
-            <a:solidFill>
-              <a:srgbClr val="0D9488"/>
-            </a:solidFill>
-            <a:prstDash val="solid"/>
-          </a:ln>
-        </p:spPr>
+              <a:t>tel</a:t>
+            </a:r>
+            <a:endParaRPr lang="en-US" sz="1400" dirty="0"/>
+          </a:p>
+        </p:txBody>
+      </p:sp>
+      <p:sp>
+        <p:nvSpPr>
+          <p:cNvPr id="27" name="Text 25"/>
+          <p:cNvSpPr/>
+          <p:nvPr/>
+        </p:nvSpPr>
+        <p:spPr>
+          <a:xfrm>
+            <a:off x="3529584" y="3364992"/>
+            <a:ext cx="73152" cy="475488"/>
+          </a:xfrm>
+          <a:prstGeom prst="rect">
+            <a:avLst/>
+          </a:prstGeom>
+          <a:noFill/>
+          <a:ln/>
+        </p:spPr>
+        <p:txBody>
+          <a:bodyPr wrap="square" lIns="0" tIns="0" rIns="0" bIns="0" rtlCol="0" anchor="ctr"/>
+          <a:lstStyle/>
+          <a:p>
+            <a:pPr algn="ctr" indent="0" marL="0">
+              <a:buNone/>
+            </a:pPr>
+            <a:r>
+              <a:rPr lang="en-US" sz="1600" b="1" dirty="0">
+                <a:solidFill>
+                  <a:srgbClr val="0D9488"/>
+                </a:solidFill>
+                <a:latin typeface="Trebuchet MS" pitchFamily="34" charset="0"/>
+                <a:ea typeface="Trebuchet MS" pitchFamily="34" charset="-122"/>
+                <a:cs typeface="Trebuchet MS" pitchFamily="34" charset="-120"/>
+              </a:rPr>
+              <a:t>·</a:t>
+            </a:r>
+            <a:endParaRPr lang="en-US" sz="1600" dirty="0"/>
+          </a:p>
+        </p:txBody>
       </p:sp>
       <p:sp>
         <p:nvSpPr>
@@ -28413,8 +28263,8 @@
         </p:nvSpPr>
         <p:spPr>
           <a:xfrm>
-            <a:off x="1978152" y="3364992"/>
-            <a:ext cx="1225296" cy="475488"/>
+            <a:off x="3602736" y="3364992"/>
+            <a:ext cx="1554480" cy="475488"/>
           </a:xfrm>
           <a:prstGeom prst="rect">
             <a:avLst>
@@ -28440,8 +28290,8 @@
         </p:nvSpPr>
         <p:spPr>
           <a:xfrm>
-            <a:off x="1978152" y="3364992"/>
-            <a:ext cx="1225296" cy="475488"/>
+            <a:off x="3602736" y="3364992"/>
+            <a:ext cx="1554480" cy="475488"/>
           </a:xfrm>
           <a:prstGeom prst="rect">
             <a:avLst/>
@@ -28465,7 +28315,7 @@
                 <a:ea typeface="Trebuchet MS" pitchFamily="34" charset="-122"/>
                 <a:cs typeface="Trebuchet MS" pitchFamily="34" charset="-120"/>
               </a:rPr>
-              <a:t>pho</a:t>
+              <a:t>e</a:t>
             </a:r>
             <a:endParaRPr lang="en-US" sz="1400" dirty="0"/>
           </a:p>
@@ -28479,8 +28329,8 @@
         </p:nvSpPr>
         <p:spPr>
           <a:xfrm>
-            <a:off x="3203448" y="3364992"/>
-            <a:ext cx="76200" cy="475488"/>
+            <a:off x="5157216" y="3364992"/>
+            <a:ext cx="73152" cy="475488"/>
           </a:xfrm>
           <a:prstGeom prst="rect">
             <a:avLst/>
@@ -28518,8 +28368,8 @@
         </p:nvSpPr>
         <p:spPr>
           <a:xfrm>
-            <a:off x="3279648" y="3364992"/>
-            <a:ext cx="1225296" cy="475488"/>
+            <a:off x="5230368" y="3364992"/>
+            <a:ext cx="1554480" cy="475488"/>
           </a:xfrm>
           <a:prstGeom prst="rect">
             <a:avLst>
@@ -28545,8 +28395,8 @@
         </p:nvSpPr>
         <p:spPr>
           <a:xfrm>
-            <a:off x="3279648" y="3364992"/>
-            <a:ext cx="1225296" cy="475488"/>
+            <a:off x="5230368" y="3364992"/>
+            <a:ext cx="1554480" cy="475488"/>
           </a:xfrm>
           <a:prstGeom prst="rect">
             <a:avLst/>
@@ -28570,7 +28420,7 @@
                 <a:ea typeface="Trebuchet MS" pitchFamily="34" charset="-122"/>
                 <a:cs typeface="Trebuchet MS" pitchFamily="34" charset="-120"/>
               </a:rPr>
-              <a:t>to</a:t>
+              <a:t>pho</a:t>
             </a:r>
             <a:endParaRPr lang="en-US" sz="1400" dirty="0"/>
           </a:p>
@@ -28584,8 +28434,8 @@
         </p:nvSpPr>
         <p:spPr>
           <a:xfrm>
-            <a:off x="4504944" y="3364992"/>
-            <a:ext cx="76200" cy="475488"/>
+            <a:off x="6784848" y="3364992"/>
+            <a:ext cx="73152" cy="475488"/>
           </a:xfrm>
           <a:prstGeom prst="rect">
             <a:avLst/>
@@ -28623,8 +28473,8 @@
         </p:nvSpPr>
         <p:spPr>
           <a:xfrm>
-            <a:off x="4581144" y="3364992"/>
-            <a:ext cx="1225296" cy="475488"/>
+            <a:off x="6858000" y="3364992"/>
+            <a:ext cx="1554480" cy="475488"/>
           </a:xfrm>
           <a:prstGeom prst="rect">
             <a:avLst>
@@ -28650,8 +28500,8 @@
         </p:nvSpPr>
         <p:spPr>
           <a:xfrm>
-            <a:off x="4581144" y="3364992"/>
-            <a:ext cx="1225296" cy="475488"/>
+            <a:off x="6858000" y="3364992"/>
+            <a:ext cx="1554480" cy="475488"/>
           </a:xfrm>
           <a:prstGeom prst="rect">
             <a:avLst/>
@@ -28675,7 +28525,7 @@
                 <a:ea typeface="Trebuchet MS" pitchFamily="34" charset="-122"/>
                 <a:cs typeface="Trebuchet MS" pitchFamily="34" charset="-120"/>
               </a:rPr>
-              <a:t>sen</a:t>
+              <a:t>to</a:t>
             </a:r>
             <a:endParaRPr lang="en-US" sz="1400" dirty="0"/>
           </a:p>
@@ -28683,224 +28533,80 @@
       </p:sp>
       <p:sp>
         <p:nvSpPr>
-          <p:cNvPr id="36" name="Text 34"/>
-          <p:cNvSpPr/>
-          <p:nvPr/>
-        </p:nvSpPr>
-        <p:spPr>
-          <a:xfrm>
-            <a:off x="5806440" y="3364992"/>
-            <a:ext cx="76200" cy="475488"/>
-          </a:xfrm>
-          <a:prstGeom prst="rect">
-            <a:avLst/>
-          </a:prstGeom>
-          <a:noFill/>
-          <a:ln/>
-        </p:spPr>
-        <p:txBody>
-          <a:bodyPr wrap="square" lIns="0" tIns="0" rIns="0" bIns="0" rtlCol="0" anchor="ctr"/>
-          <a:lstStyle/>
-          <a:p>
-            <a:pPr algn="ctr" indent="0" marL="0">
-              <a:buNone/>
-            </a:pPr>
-            <a:r>
-              <a:rPr lang="en-US" sz="1600" b="1" dirty="0">
-                <a:solidFill>
-                  <a:srgbClr val="0D9488"/>
+          <p:cNvPr id="36" name="Shape 34"/>
+          <p:cNvSpPr/>
+          <p:nvPr/>
+        </p:nvSpPr>
+        <p:spPr>
+          <a:xfrm>
+            <a:off x="365760" y="4096512"/>
+            <a:ext cx="1371600" cy="804672"/>
+          </a:xfrm>
+          <a:prstGeom prst="rect">
+            <a:avLst>
+              <a:gd name="adj" fmla="val 6818"/>
+            </a:avLst>
+          </a:prstGeom>
+          <a:solidFill>
+            <a:srgbClr val="E2E8F0"/>
+          </a:solidFill>
+          <a:ln w="12700">
+            <a:solidFill>
+              <a:srgbClr val="E2E8F0"/>
+            </a:solidFill>
+            <a:prstDash val="solid"/>
+          </a:ln>
+        </p:spPr>
+      </p:sp>
+      <p:sp>
+        <p:nvSpPr>
+          <p:cNvPr id="37" name="Text 35"/>
+          <p:cNvSpPr/>
+          <p:nvPr/>
+        </p:nvSpPr>
+        <p:spPr>
+          <a:xfrm>
+            <a:off x="365760" y="4096512"/>
+            <a:ext cx="1371600" cy="804672"/>
+          </a:xfrm>
+          <a:prstGeom prst="rect">
+            <a:avLst/>
+          </a:prstGeom>
+          <a:noFill/>
+          <a:ln/>
+        </p:spPr>
+        <p:txBody>
+          <a:bodyPr wrap="square" lIns="0" tIns="0" rIns="0" bIns="0" rtlCol="0" anchor="ctr"/>
+          <a:lstStyle/>
+          <a:p>
+            <a:pPr algn="ctr" indent="0" marL="0">
+              <a:buNone/>
+            </a:pPr>
+            <a:r>
+              <a:rPr lang="en-US" sz="1100" b="1" dirty="0">
+                <a:solidFill>
+                  <a:srgbClr val="475569"/>
                 </a:solidFill>
                 <a:latin typeface="Trebuchet MS" pitchFamily="34" charset="0"/>
                 <a:ea typeface="Trebuchet MS" pitchFamily="34" charset="-122"/>
                 <a:cs typeface="Trebuchet MS" pitchFamily="34" charset="-120"/>
               </a:rPr>
-              <a:t>·</a:t>
-            </a:r>
-            <a:endParaRPr lang="en-US" sz="1600" dirty="0"/>
-          </a:p>
-        </p:txBody>
-      </p:sp>
-      <p:sp>
-        <p:nvSpPr>
-          <p:cNvPr id="37" name="Shape 35"/>
-          <p:cNvSpPr/>
-          <p:nvPr/>
-        </p:nvSpPr>
-        <p:spPr>
-          <a:xfrm>
-            <a:off x="5882640" y="3364992"/>
-            <a:ext cx="1225296" cy="475488"/>
-          </a:xfrm>
-          <a:prstGeom prst="rect">
-            <a:avLst>
-              <a:gd name="adj" fmla="val 9615"/>
-            </a:avLst>
-          </a:prstGeom>
-          <a:solidFill>
-            <a:srgbClr val="FFFFFF"/>
-          </a:solidFill>
-          <a:ln w="12700">
-            <a:solidFill>
-              <a:srgbClr val="0D9488"/>
-            </a:solidFill>
-            <a:prstDash val="solid"/>
-          </a:ln>
-        </p:spPr>
-      </p:sp>
-      <p:sp>
-        <p:nvSpPr>
-          <p:cNvPr id="38" name="Text 36"/>
-          <p:cNvSpPr/>
-          <p:nvPr/>
-        </p:nvSpPr>
-        <p:spPr>
-          <a:xfrm>
-            <a:off x="5882640" y="3364992"/>
-            <a:ext cx="1225296" cy="475488"/>
-          </a:xfrm>
-          <a:prstGeom prst="rect">
-            <a:avLst/>
-          </a:prstGeom>
-          <a:noFill/>
-          <a:ln/>
-        </p:spPr>
-        <p:txBody>
-          <a:bodyPr wrap="square" lIns="0" tIns="0" rIns="0" bIns="0" rtlCol="0" anchor="ctr"/>
-          <a:lstStyle/>
-          <a:p>
-            <a:pPr algn="ctr" indent="0" marL="0">
-              <a:buNone/>
-            </a:pPr>
-            <a:r>
-              <a:rPr lang="en-US" sz="1400" b="1" dirty="0">
-                <a:solidFill>
-                  <a:srgbClr val="0D9488"/>
-                </a:solidFill>
-                <a:latin typeface="Trebuchet MS" pitchFamily="34" charset="0"/>
-                <a:ea typeface="Trebuchet MS" pitchFamily="34" charset="-122"/>
-                <a:cs typeface="Trebuchet MS" pitchFamily="34" charset="-120"/>
-              </a:rPr>
-              <a:t>si</a:t>
-            </a:r>
-            <a:endParaRPr lang="en-US" sz="1400" dirty="0"/>
-          </a:p>
-        </p:txBody>
-      </p:sp>
-      <p:sp>
-        <p:nvSpPr>
-          <p:cNvPr id="39" name="Text 37"/>
-          <p:cNvSpPr/>
-          <p:nvPr/>
-        </p:nvSpPr>
-        <p:spPr>
-          <a:xfrm>
-            <a:off x="7107936" y="3364992"/>
-            <a:ext cx="76200" cy="475488"/>
-          </a:xfrm>
-          <a:prstGeom prst="rect">
-            <a:avLst/>
-          </a:prstGeom>
-          <a:noFill/>
-          <a:ln/>
-        </p:spPr>
-        <p:txBody>
-          <a:bodyPr wrap="square" lIns="0" tIns="0" rIns="0" bIns="0" rtlCol="0" anchor="ctr"/>
-          <a:lstStyle/>
-          <a:p>
-            <a:pPr algn="ctr" indent="0" marL="0">
-              <a:buNone/>
-            </a:pPr>
-            <a:r>
-              <a:rPr lang="en-US" sz="1600" b="1" dirty="0">
-                <a:solidFill>
-                  <a:srgbClr val="0D9488"/>
-                </a:solidFill>
-                <a:latin typeface="Trebuchet MS" pitchFamily="34" charset="0"/>
-                <a:ea typeface="Trebuchet MS" pitchFamily="34" charset="-122"/>
-                <a:cs typeface="Trebuchet MS" pitchFamily="34" charset="-120"/>
-              </a:rPr>
-              <a:t>·</a:t>
-            </a:r>
-            <a:endParaRPr lang="en-US" sz="1600" dirty="0"/>
-          </a:p>
-        </p:txBody>
-      </p:sp>
-      <p:sp>
-        <p:nvSpPr>
-          <p:cNvPr id="40" name="Shape 38"/>
-          <p:cNvSpPr/>
-          <p:nvPr/>
-        </p:nvSpPr>
-        <p:spPr>
-          <a:xfrm>
-            <a:off x="7184136" y="3364992"/>
-            <a:ext cx="1225296" cy="475488"/>
-          </a:xfrm>
-          <a:prstGeom prst="rect">
-            <a:avLst>
-              <a:gd name="adj" fmla="val 9615"/>
-            </a:avLst>
-          </a:prstGeom>
-          <a:solidFill>
-            <a:srgbClr val="FFFFFF"/>
-          </a:solidFill>
-          <a:ln w="12700">
-            <a:solidFill>
-              <a:srgbClr val="0D9488"/>
-            </a:solidFill>
-            <a:prstDash val="solid"/>
-          </a:ln>
-        </p:spPr>
-      </p:sp>
-      <p:sp>
-        <p:nvSpPr>
-          <p:cNvPr id="41" name="Text 39"/>
-          <p:cNvSpPr/>
-          <p:nvPr/>
-        </p:nvSpPr>
-        <p:spPr>
-          <a:xfrm>
-            <a:off x="7184136" y="3364992"/>
-            <a:ext cx="1225296" cy="475488"/>
-          </a:xfrm>
-          <a:prstGeom prst="rect">
-            <a:avLst/>
-          </a:prstGeom>
-          <a:noFill/>
-          <a:ln/>
-        </p:spPr>
-        <p:txBody>
-          <a:bodyPr wrap="square" lIns="0" tIns="0" rIns="0" bIns="0" rtlCol="0" anchor="ctr"/>
-          <a:lstStyle/>
-          <a:p>
-            <a:pPr algn="ctr" indent="0" marL="0">
-              <a:buNone/>
-            </a:pPr>
-            <a:r>
-              <a:rPr lang="en-US" sz="1400" b="1" dirty="0">
-                <a:solidFill>
-                  <a:srgbClr val="0D9488"/>
-                </a:solidFill>
-                <a:latin typeface="Trebuchet MS" pitchFamily="34" charset="0"/>
-                <a:ea typeface="Trebuchet MS" pitchFamily="34" charset="-122"/>
-                <a:cs typeface="Trebuchet MS" pitchFamily="34" charset="-120"/>
-              </a:rPr>
-              <a:t>tive</a:t>
-            </a:r>
-            <a:endParaRPr lang="en-US" sz="1400" dirty="0"/>
-          </a:p>
-        </p:txBody>
-      </p:sp>
-      <p:sp>
-        <p:nvSpPr>
-          <p:cNvPr id="42" name="Shape 40"/>
-          <p:cNvSpPr/>
-          <p:nvPr/>
-        </p:nvSpPr>
-        <p:spPr>
-          <a:xfrm>
-            <a:off x="365760" y="4096512"/>
-            <a:ext cx="1371600" cy="804672"/>
+              <a:t>Phonemes</a:t>
+            </a:r>
+            <a:endParaRPr lang="en-US" sz="1100" dirty="0"/>
+          </a:p>
+        </p:txBody>
+      </p:sp>
+      <p:sp>
+        <p:nvSpPr>
+          <p:cNvPr id="38" name="Shape 36"/>
+          <p:cNvSpPr/>
+          <p:nvPr/>
+        </p:nvSpPr>
+        <p:spPr>
+          <a:xfrm>
+            <a:off x="1874520" y="4096512"/>
+            <a:ext cx="6903720" cy="804672"/>
           </a:xfrm>
           <a:prstGeom prst="rect">
             <a:avLst>
@@ -28908,85 +28614,19 @@
             </a:avLst>
           </a:prstGeom>
           <a:solidFill>
-            <a:srgbClr val="E2E8F0"/>
+            <a:srgbClr val="F8FAFC"/>
           </a:solidFill>
           <a:ln w="12700">
             <a:solidFill>
               <a:srgbClr val="E2E8F0"/>
             </a:solidFill>
-            <a:prstDash val="solid"/>
-          </a:ln>
-        </p:spPr>
-      </p:sp>
-      <p:sp>
-        <p:nvSpPr>
-          <p:cNvPr id="43" name="Text 41"/>
-          <p:cNvSpPr/>
-          <p:nvPr/>
-        </p:nvSpPr>
-        <p:spPr>
-          <a:xfrm>
-            <a:off x="365760" y="4096512"/>
-            <a:ext cx="1371600" cy="804672"/>
-          </a:xfrm>
-          <a:prstGeom prst="rect">
-            <a:avLst/>
-          </a:prstGeom>
-          <a:noFill/>
-          <a:ln/>
-        </p:spPr>
-        <p:txBody>
-          <a:bodyPr wrap="square" lIns="0" tIns="0" rIns="0" bIns="0" rtlCol="0" anchor="ctr"/>
-          <a:lstStyle/>
-          <a:p>
-            <a:pPr algn="ctr" indent="0" marL="0">
-              <a:buNone/>
-            </a:pPr>
-            <a:r>
-              <a:rPr lang="en-US" sz="1100" b="1" dirty="0">
-                <a:solidFill>
-                  <a:srgbClr val="475569"/>
-                </a:solidFill>
-                <a:latin typeface="Trebuchet MS" pitchFamily="34" charset="0"/>
-                <a:ea typeface="Trebuchet MS" pitchFamily="34" charset="-122"/>
-                <a:cs typeface="Trebuchet MS" pitchFamily="34" charset="-120"/>
-              </a:rPr>
-              <a:t>Phonemes</a:t>
-            </a:r>
-            <a:endParaRPr lang="en-US" sz="1100" dirty="0"/>
-          </a:p>
-        </p:txBody>
-      </p:sp>
-      <p:sp>
-        <p:nvSpPr>
-          <p:cNvPr id="44" name="Shape 42"/>
-          <p:cNvSpPr/>
-          <p:nvPr/>
-        </p:nvSpPr>
-        <p:spPr>
-          <a:xfrm>
-            <a:off x="1874520" y="4096512"/>
-            <a:ext cx="6903720" cy="804672"/>
-          </a:xfrm>
-          <a:prstGeom prst="rect">
-            <a:avLst>
-              <a:gd name="adj" fmla="val 6818"/>
-            </a:avLst>
-          </a:prstGeom>
-          <a:solidFill>
-            <a:srgbClr val="F8FAFC"/>
-          </a:solidFill>
-          <a:ln w="12700">
-            <a:solidFill>
-              <a:srgbClr val="E2E8F0"/>
-            </a:solidFill>
             <a:prstDash val="dash"/>
           </a:ln>
         </p:spPr>
       </p:sp>
       <p:sp>
         <p:nvSpPr>
-          <p:cNvPr id="45" name="Text 43"/>
+          <p:cNvPr id="39" name="Text 37"/>
           <p:cNvSpPr/>
           <p:nvPr/>
         </p:nvSpPr>
@@ -29448,7 +29088,7 @@
                 <a:ea typeface="Trebuchet MS" pitchFamily="34" charset="-122"/>
                 <a:cs typeface="Trebuchet MS" pitchFamily="34" charset="-120"/>
               </a:rPr>
-              <a:t>photosensitive</a:t>
+              <a:t>telephoto</a:t>
             </a:r>
             <a:endParaRPr lang="en-US" sz="2800" dirty="0"/>
           </a:p>
@@ -29528,7 +29168,7 @@
         </p:nvSpPr>
         <p:spPr>
           <a:xfrm>
-            <a:off x="2221992" y="2258568"/>
+            <a:off x="2938272" y="2258568"/>
             <a:ext cx="1828800" cy="292608"/>
           </a:xfrm>
           <a:prstGeom prst="rect">
@@ -29537,11 +29177,11 @@
             </a:avLst>
           </a:prstGeom>
           <a:solidFill>
-            <a:srgbClr val="CCFBF1"/>
+            <a:srgbClr val="DDD6FE"/>
           </a:solidFill>
           <a:ln w="19050">
             <a:solidFill>
-              <a:srgbClr val="0D9488"/>
+              <a:srgbClr val="7C3AED"/>
             </a:solidFill>
             <a:prstDash val="solid"/>
           </a:ln>
@@ -29562,7 +29202,7 @@
         </p:nvSpPr>
         <p:spPr>
           <a:xfrm>
-            <a:off x="2221992" y="2258568"/>
+            <a:off x="2938272" y="2258568"/>
             <a:ext cx="1828800" cy="292608"/>
           </a:xfrm>
           <a:prstGeom prst="rect">
@@ -29581,13 +29221,13 @@
             <a:r>
               <a:rPr lang="en-US" sz="1300" b="1" dirty="0">
                 <a:solidFill>
-                  <a:srgbClr val="0F766E"/>
+                  <a:srgbClr val="4C1D95"/>
                 </a:solidFill>
                 <a:latin typeface="Trebuchet MS" pitchFamily="34" charset="0"/>
                 <a:ea typeface="Trebuchet MS" pitchFamily="34" charset="-122"/>
                 <a:cs typeface="Trebuchet MS" pitchFamily="34" charset="-120"/>
               </a:rPr>
-              <a:t>photo</a:t>
+              <a:t>tele</a:t>
             </a:r>
             <a:endParaRPr lang="en-US" sz="1300" dirty="0"/>
           </a:p>
@@ -29601,7 +29241,7 @@
         </p:nvSpPr>
         <p:spPr>
           <a:xfrm>
-            <a:off x="2221992" y="2569464"/>
+            <a:off x="2938272" y="2569464"/>
             <a:ext cx="1828800" cy="201168"/>
           </a:xfrm>
           <a:prstGeom prst="rect">
@@ -29626,7 +29266,7 @@
                 <a:ea typeface="Calibri" pitchFamily="34" charset="-122"/>
                 <a:cs typeface="Calibri" pitchFamily="34" charset="-120"/>
               </a:rPr>
-              <a:t>light</a:t>
+              <a:t>far away</a:t>
             </a:r>
             <a:endParaRPr lang="en-US" sz="850" dirty="0"/>
           </a:p>
@@ -29640,7 +29280,7 @@
         </p:nvSpPr>
         <p:spPr>
           <a:xfrm>
-            <a:off x="4370832" y="2258568"/>
+            <a:off x="5803392" y="2258568"/>
             <a:ext cx="1828800" cy="292608"/>
           </a:xfrm>
           <a:prstGeom prst="rect">
@@ -29649,11 +29289,11 @@
             </a:avLst>
           </a:prstGeom>
           <a:solidFill>
-            <a:srgbClr val="FCE7F3"/>
+            <a:srgbClr val="CCFBF1"/>
           </a:solidFill>
           <a:ln w="19050">
             <a:solidFill>
-              <a:srgbClr val="DB2777"/>
+              <a:srgbClr val="0D9488"/>
             </a:solidFill>
             <a:prstDash val="solid"/>
           </a:ln>
@@ -29674,7 +29314,7 @@
         </p:nvSpPr>
         <p:spPr>
           <a:xfrm>
-            <a:off x="4370832" y="2258568"/>
+            <a:off x="5803392" y="2258568"/>
             <a:ext cx="1828800" cy="292608"/>
           </a:xfrm>
           <a:prstGeom prst="rect">
@@ -29693,13 +29333,13 @@
             <a:r>
               <a:rPr lang="en-US" sz="1300" b="1" dirty="0">
                 <a:solidFill>
-                  <a:srgbClr val="9D174D"/>
+                  <a:srgbClr val="0F766E"/>
                 </a:solidFill>
                 <a:latin typeface="Trebuchet MS" pitchFamily="34" charset="0"/>
                 <a:ea typeface="Trebuchet MS" pitchFamily="34" charset="-122"/>
                 <a:cs typeface="Trebuchet MS" pitchFamily="34" charset="-120"/>
               </a:rPr>
-              <a:t>sens</a:t>
+              <a:t>photo</a:t>
             </a:r>
             <a:endParaRPr lang="en-US" sz="1300" dirty="0"/>
           </a:p>
@@ -29713,7 +29353,7 @@
         </p:nvSpPr>
         <p:spPr>
           <a:xfrm>
-            <a:off x="4370832" y="2569464"/>
+            <a:off x="5803392" y="2569464"/>
             <a:ext cx="1828800" cy="201168"/>
           </a:xfrm>
           <a:prstGeom prst="rect">
@@ -29738,7 +29378,7 @@
                 <a:ea typeface="Calibri" pitchFamily="34" charset="-122"/>
                 <a:cs typeface="Calibri" pitchFamily="34" charset="-120"/>
               </a:rPr>
-              <a:t>feel or perceive</a:t>
+              <a:t>light</a:t>
             </a:r>
             <a:endParaRPr lang="en-US" sz="850" dirty="0"/>
           </a:p>
@@ -29752,30 +29392,23 @@
         </p:nvSpPr>
         <p:spPr>
           <a:xfrm>
-            <a:off x="6519672" y="2258568"/>
-            <a:ext cx="1828800" cy="292608"/>
+            <a:off x="365760" y="3273552"/>
+            <a:ext cx="1371600" cy="658368"/>
           </a:xfrm>
           <a:prstGeom prst="rect">
             <a:avLst>
-              <a:gd name="adj" fmla="val 25000"/>
+              <a:gd name="adj" fmla="val 8333"/>
             </a:avLst>
           </a:prstGeom>
           <a:solidFill>
-            <a:srgbClr val="FCE7F3"/>
-          </a:solidFill>
-          <a:ln w="19050">
-            <a:solidFill>
-              <a:srgbClr val="DB2777"/>
-            </a:solidFill>
-            <a:prstDash val="solid"/>
-          </a:ln>
-          <a:effectLst>
-            <a:outerShdw sx="100000" sy="100000" kx="0" ky="0" algn="bl" rotWithShape="0" blurRad="101600" dist="38100" dir="8100000">
-              <a:srgbClr val="000000">
-                <a:alpha val="12000"/>
-              </a:srgbClr>
-            </a:outerShdw>
-          </a:effectLst>
+            <a:srgbClr val="E2E8F0"/>
+          </a:solidFill>
+          <a:ln w="12700">
+            <a:solidFill>
+              <a:srgbClr val="E2E8F0"/>
+            </a:solidFill>
+            <a:prstDash val="solid"/>
+          </a:ln>
         </p:spPr>
       </p:sp>
       <p:sp>
@@ -29786,47 +29419,878 @@
         </p:nvSpPr>
         <p:spPr>
           <a:xfrm>
-            <a:off x="6519672" y="2258568"/>
-            <a:ext cx="1828800" cy="292608"/>
-          </a:xfrm>
-          <a:prstGeom prst="rect">
-            <a:avLst/>
-          </a:prstGeom>
-          <a:noFill/>
-          <a:ln/>
-        </p:spPr>
-        <p:txBody>
-          <a:bodyPr wrap="square" lIns="0" tIns="0" rIns="0" bIns="0" rtlCol="0" anchor="ctr"/>
-          <a:lstStyle/>
-          <a:p>
-            <a:pPr algn="ctr" indent="0" marL="0">
-              <a:buNone/>
-            </a:pPr>
-            <a:r>
-              <a:rPr lang="en-US" sz="1300" b="1" dirty="0">
-                <a:solidFill>
-                  <a:srgbClr val="9D174D"/>
+            <a:off x="365760" y="3273552"/>
+            <a:ext cx="1371600" cy="658368"/>
+          </a:xfrm>
+          <a:prstGeom prst="rect">
+            <a:avLst/>
+          </a:prstGeom>
+          <a:noFill/>
+          <a:ln/>
+        </p:spPr>
+        <p:txBody>
+          <a:bodyPr wrap="square" lIns="0" tIns="0" rIns="0" bIns="0" rtlCol="0" anchor="ctr"/>
+          <a:lstStyle/>
+          <a:p>
+            <a:pPr algn="ctr" indent="0" marL="0">
+              <a:buNone/>
+            </a:pPr>
+            <a:r>
+              <a:rPr lang="en-US" sz="1100" b="1" dirty="0">
+                <a:solidFill>
+                  <a:srgbClr val="475569"/>
                 </a:solidFill>
                 <a:latin typeface="Trebuchet MS" pitchFamily="34" charset="0"/>
                 <a:ea typeface="Trebuchet MS" pitchFamily="34" charset="-122"/>
                 <a:cs typeface="Trebuchet MS" pitchFamily="34" charset="-120"/>
               </a:rPr>
-              <a:t>itive</a:t>
-            </a:r>
-            <a:endParaRPr lang="en-US" sz="1300" dirty="0"/>
-          </a:p>
-        </p:txBody>
-      </p:sp>
-      <p:sp>
-        <p:nvSpPr>
-          <p:cNvPr id="24" name="Text 22"/>
-          <p:cNvSpPr/>
-          <p:nvPr/>
-        </p:nvSpPr>
-        <p:spPr>
-          <a:xfrm>
-            <a:off x="6519672" y="2569464"/>
-            <a:ext cx="1828800" cy="201168"/>
+              <a:t>Syllables</a:t>
+            </a:r>
+            <a:endParaRPr lang="en-US" sz="1100" dirty="0"/>
+          </a:p>
+        </p:txBody>
+      </p:sp>
+      <p:sp>
+        <p:nvSpPr>
+          <p:cNvPr id="24" name="Shape 22"/>
+          <p:cNvSpPr/>
+          <p:nvPr/>
+        </p:nvSpPr>
+        <p:spPr>
+          <a:xfrm>
+            <a:off x="1874520" y="3273552"/>
+            <a:ext cx="6903720" cy="658368"/>
+          </a:xfrm>
+          <a:prstGeom prst="rect">
+            <a:avLst>
+              <a:gd name="adj" fmla="val 8333"/>
+            </a:avLst>
+          </a:prstGeom>
+          <a:solidFill>
+            <a:srgbClr val="CCFBF1"/>
+          </a:solidFill>
+          <a:ln w="12700">
+            <a:solidFill>
+              <a:srgbClr val="0D9488"/>
+            </a:solidFill>
+            <a:prstDash val="solid"/>
+          </a:ln>
+        </p:spPr>
+      </p:sp>
+      <p:sp>
+        <p:nvSpPr>
+          <p:cNvPr id="25" name="Shape 23"/>
+          <p:cNvSpPr/>
+          <p:nvPr/>
+        </p:nvSpPr>
+        <p:spPr>
+          <a:xfrm>
+            <a:off x="1975104" y="3364992"/>
+            <a:ext cx="1554480" cy="475488"/>
+          </a:xfrm>
+          <a:prstGeom prst="rect">
+            <a:avLst>
+              <a:gd name="adj" fmla="val 9615"/>
+            </a:avLst>
+          </a:prstGeom>
+          <a:solidFill>
+            <a:srgbClr val="FFFFFF"/>
+          </a:solidFill>
+          <a:ln w="12700">
+            <a:solidFill>
+              <a:srgbClr val="0D9488"/>
+            </a:solidFill>
+            <a:prstDash val="solid"/>
+          </a:ln>
+        </p:spPr>
+      </p:sp>
+      <p:sp>
+        <p:nvSpPr>
+          <p:cNvPr id="26" name="Text 24"/>
+          <p:cNvSpPr/>
+          <p:nvPr/>
+        </p:nvSpPr>
+        <p:spPr>
+          <a:xfrm>
+            <a:off x="1975104" y="3364992"/>
+            <a:ext cx="1554480" cy="475488"/>
+          </a:xfrm>
+          <a:prstGeom prst="rect">
+            <a:avLst/>
+          </a:prstGeom>
+          <a:noFill/>
+          <a:ln/>
+        </p:spPr>
+        <p:txBody>
+          <a:bodyPr wrap="square" lIns="0" tIns="0" rIns="0" bIns="0" rtlCol="0" anchor="ctr"/>
+          <a:lstStyle/>
+          <a:p>
+            <a:pPr algn="ctr" indent="0" marL="0">
+              <a:buNone/>
+            </a:pPr>
+            <a:r>
+              <a:rPr lang="en-US" sz="1400" b="1" dirty="0">
+                <a:solidFill>
+                  <a:srgbClr val="0D9488"/>
+                </a:solidFill>
+                <a:latin typeface="Trebuchet MS" pitchFamily="34" charset="0"/>
+                <a:ea typeface="Trebuchet MS" pitchFamily="34" charset="-122"/>
+                <a:cs typeface="Trebuchet MS" pitchFamily="34" charset="-120"/>
+              </a:rPr>
+              <a:t>tel</a:t>
+            </a:r>
+            <a:endParaRPr lang="en-US" sz="1400" dirty="0"/>
+          </a:p>
+        </p:txBody>
+      </p:sp>
+      <p:sp>
+        <p:nvSpPr>
+          <p:cNvPr id="27" name="Text 25"/>
+          <p:cNvSpPr/>
+          <p:nvPr/>
+        </p:nvSpPr>
+        <p:spPr>
+          <a:xfrm>
+            <a:off x="3529584" y="3364992"/>
+            <a:ext cx="73152" cy="475488"/>
+          </a:xfrm>
+          <a:prstGeom prst="rect">
+            <a:avLst/>
+          </a:prstGeom>
+          <a:noFill/>
+          <a:ln/>
+        </p:spPr>
+        <p:txBody>
+          <a:bodyPr wrap="square" lIns="0" tIns="0" rIns="0" bIns="0" rtlCol="0" anchor="ctr"/>
+          <a:lstStyle/>
+          <a:p>
+            <a:pPr algn="ctr" indent="0" marL="0">
+              <a:buNone/>
+            </a:pPr>
+            <a:r>
+              <a:rPr lang="en-US" sz="1600" b="1" dirty="0">
+                <a:solidFill>
+                  <a:srgbClr val="0D9488"/>
+                </a:solidFill>
+                <a:latin typeface="Trebuchet MS" pitchFamily="34" charset="0"/>
+                <a:ea typeface="Trebuchet MS" pitchFamily="34" charset="-122"/>
+                <a:cs typeface="Trebuchet MS" pitchFamily="34" charset="-120"/>
+              </a:rPr>
+              <a:t>·</a:t>
+            </a:r>
+            <a:endParaRPr lang="en-US" sz="1600" dirty="0"/>
+          </a:p>
+        </p:txBody>
+      </p:sp>
+      <p:sp>
+        <p:nvSpPr>
+          <p:cNvPr id="28" name="Shape 26"/>
+          <p:cNvSpPr/>
+          <p:nvPr/>
+        </p:nvSpPr>
+        <p:spPr>
+          <a:xfrm>
+            <a:off x="3602736" y="3364992"/>
+            <a:ext cx="1554480" cy="475488"/>
+          </a:xfrm>
+          <a:prstGeom prst="rect">
+            <a:avLst>
+              <a:gd name="adj" fmla="val 9615"/>
+            </a:avLst>
+          </a:prstGeom>
+          <a:solidFill>
+            <a:srgbClr val="FFFFFF"/>
+          </a:solidFill>
+          <a:ln w="12700">
+            <a:solidFill>
+              <a:srgbClr val="0D9488"/>
+            </a:solidFill>
+            <a:prstDash val="solid"/>
+          </a:ln>
+        </p:spPr>
+      </p:sp>
+      <p:sp>
+        <p:nvSpPr>
+          <p:cNvPr id="29" name="Text 27"/>
+          <p:cNvSpPr/>
+          <p:nvPr/>
+        </p:nvSpPr>
+        <p:spPr>
+          <a:xfrm>
+            <a:off x="3602736" y="3364992"/>
+            <a:ext cx="1554480" cy="475488"/>
+          </a:xfrm>
+          <a:prstGeom prst="rect">
+            <a:avLst/>
+          </a:prstGeom>
+          <a:noFill/>
+          <a:ln/>
+        </p:spPr>
+        <p:txBody>
+          <a:bodyPr wrap="square" lIns="0" tIns="0" rIns="0" bIns="0" rtlCol="0" anchor="ctr"/>
+          <a:lstStyle/>
+          <a:p>
+            <a:pPr algn="ctr" indent="0" marL="0">
+              <a:buNone/>
+            </a:pPr>
+            <a:r>
+              <a:rPr lang="en-US" sz="1400" b="1" dirty="0">
+                <a:solidFill>
+                  <a:srgbClr val="0D9488"/>
+                </a:solidFill>
+                <a:latin typeface="Trebuchet MS" pitchFamily="34" charset="0"/>
+                <a:ea typeface="Trebuchet MS" pitchFamily="34" charset="-122"/>
+                <a:cs typeface="Trebuchet MS" pitchFamily="34" charset="-120"/>
+              </a:rPr>
+              <a:t>e</a:t>
+            </a:r>
+            <a:endParaRPr lang="en-US" sz="1400" dirty="0"/>
+          </a:p>
+        </p:txBody>
+      </p:sp>
+      <p:sp>
+        <p:nvSpPr>
+          <p:cNvPr id="30" name="Text 28"/>
+          <p:cNvSpPr/>
+          <p:nvPr/>
+        </p:nvSpPr>
+        <p:spPr>
+          <a:xfrm>
+            <a:off x="5157216" y="3364992"/>
+            <a:ext cx="73152" cy="475488"/>
+          </a:xfrm>
+          <a:prstGeom prst="rect">
+            <a:avLst/>
+          </a:prstGeom>
+          <a:noFill/>
+          <a:ln/>
+        </p:spPr>
+        <p:txBody>
+          <a:bodyPr wrap="square" lIns="0" tIns="0" rIns="0" bIns="0" rtlCol="0" anchor="ctr"/>
+          <a:lstStyle/>
+          <a:p>
+            <a:pPr algn="ctr" indent="0" marL="0">
+              <a:buNone/>
+            </a:pPr>
+            <a:r>
+              <a:rPr lang="en-US" sz="1600" b="1" dirty="0">
+                <a:solidFill>
+                  <a:srgbClr val="0D9488"/>
+                </a:solidFill>
+                <a:latin typeface="Trebuchet MS" pitchFamily="34" charset="0"/>
+                <a:ea typeface="Trebuchet MS" pitchFamily="34" charset="-122"/>
+                <a:cs typeface="Trebuchet MS" pitchFamily="34" charset="-120"/>
+              </a:rPr>
+              <a:t>·</a:t>
+            </a:r>
+            <a:endParaRPr lang="en-US" sz="1600" dirty="0"/>
+          </a:p>
+        </p:txBody>
+      </p:sp>
+      <p:sp>
+        <p:nvSpPr>
+          <p:cNvPr id="31" name="Shape 29"/>
+          <p:cNvSpPr/>
+          <p:nvPr/>
+        </p:nvSpPr>
+        <p:spPr>
+          <a:xfrm>
+            <a:off x="5230368" y="3364992"/>
+            <a:ext cx="1554480" cy="475488"/>
+          </a:xfrm>
+          <a:prstGeom prst="rect">
+            <a:avLst>
+              <a:gd name="adj" fmla="val 9615"/>
+            </a:avLst>
+          </a:prstGeom>
+          <a:solidFill>
+            <a:srgbClr val="FFFFFF"/>
+          </a:solidFill>
+          <a:ln w="12700">
+            <a:solidFill>
+              <a:srgbClr val="0D9488"/>
+            </a:solidFill>
+            <a:prstDash val="solid"/>
+          </a:ln>
+        </p:spPr>
+      </p:sp>
+      <p:sp>
+        <p:nvSpPr>
+          <p:cNvPr id="32" name="Text 30"/>
+          <p:cNvSpPr/>
+          <p:nvPr/>
+        </p:nvSpPr>
+        <p:spPr>
+          <a:xfrm>
+            <a:off x="5230368" y="3364992"/>
+            <a:ext cx="1554480" cy="475488"/>
+          </a:xfrm>
+          <a:prstGeom prst="rect">
+            <a:avLst/>
+          </a:prstGeom>
+          <a:noFill/>
+          <a:ln/>
+        </p:spPr>
+        <p:txBody>
+          <a:bodyPr wrap="square" lIns="0" tIns="0" rIns="0" bIns="0" rtlCol="0" anchor="ctr"/>
+          <a:lstStyle/>
+          <a:p>
+            <a:pPr algn="ctr" indent="0" marL="0">
+              <a:buNone/>
+            </a:pPr>
+            <a:r>
+              <a:rPr lang="en-US" sz="1400" b="1" dirty="0">
+                <a:solidFill>
+                  <a:srgbClr val="0D9488"/>
+                </a:solidFill>
+                <a:latin typeface="Trebuchet MS" pitchFamily="34" charset="0"/>
+                <a:ea typeface="Trebuchet MS" pitchFamily="34" charset="-122"/>
+                <a:cs typeface="Trebuchet MS" pitchFamily="34" charset="-120"/>
+              </a:rPr>
+              <a:t>pho</a:t>
+            </a:r>
+            <a:endParaRPr lang="en-US" sz="1400" dirty="0"/>
+          </a:p>
+        </p:txBody>
+      </p:sp>
+      <p:sp>
+        <p:nvSpPr>
+          <p:cNvPr id="33" name="Text 31"/>
+          <p:cNvSpPr/>
+          <p:nvPr/>
+        </p:nvSpPr>
+        <p:spPr>
+          <a:xfrm>
+            <a:off x="6784848" y="3364992"/>
+            <a:ext cx="73152" cy="475488"/>
+          </a:xfrm>
+          <a:prstGeom prst="rect">
+            <a:avLst/>
+          </a:prstGeom>
+          <a:noFill/>
+          <a:ln/>
+        </p:spPr>
+        <p:txBody>
+          <a:bodyPr wrap="square" lIns="0" tIns="0" rIns="0" bIns="0" rtlCol="0" anchor="ctr"/>
+          <a:lstStyle/>
+          <a:p>
+            <a:pPr algn="ctr" indent="0" marL="0">
+              <a:buNone/>
+            </a:pPr>
+            <a:r>
+              <a:rPr lang="en-US" sz="1600" b="1" dirty="0">
+                <a:solidFill>
+                  <a:srgbClr val="0D9488"/>
+                </a:solidFill>
+                <a:latin typeface="Trebuchet MS" pitchFamily="34" charset="0"/>
+                <a:ea typeface="Trebuchet MS" pitchFamily="34" charset="-122"/>
+                <a:cs typeface="Trebuchet MS" pitchFamily="34" charset="-120"/>
+              </a:rPr>
+              <a:t>·</a:t>
+            </a:r>
+            <a:endParaRPr lang="en-US" sz="1600" dirty="0"/>
+          </a:p>
+        </p:txBody>
+      </p:sp>
+      <p:sp>
+        <p:nvSpPr>
+          <p:cNvPr id="34" name="Shape 32"/>
+          <p:cNvSpPr/>
+          <p:nvPr/>
+        </p:nvSpPr>
+        <p:spPr>
+          <a:xfrm>
+            <a:off x="6858000" y="3364992"/>
+            <a:ext cx="1554480" cy="475488"/>
+          </a:xfrm>
+          <a:prstGeom prst="rect">
+            <a:avLst>
+              <a:gd name="adj" fmla="val 9615"/>
+            </a:avLst>
+          </a:prstGeom>
+          <a:solidFill>
+            <a:srgbClr val="FFFFFF"/>
+          </a:solidFill>
+          <a:ln w="12700">
+            <a:solidFill>
+              <a:srgbClr val="0D9488"/>
+            </a:solidFill>
+            <a:prstDash val="solid"/>
+          </a:ln>
+        </p:spPr>
+      </p:sp>
+      <p:sp>
+        <p:nvSpPr>
+          <p:cNvPr id="35" name="Text 33"/>
+          <p:cNvSpPr/>
+          <p:nvPr/>
+        </p:nvSpPr>
+        <p:spPr>
+          <a:xfrm>
+            <a:off x="6858000" y="3364992"/>
+            <a:ext cx="1554480" cy="475488"/>
+          </a:xfrm>
+          <a:prstGeom prst="rect">
+            <a:avLst/>
+          </a:prstGeom>
+          <a:noFill/>
+          <a:ln/>
+        </p:spPr>
+        <p:txBody>
+          <a:bodyPr wrap="square" lIns="0" tIns="0" rIns="0" bIns="0" rtlCol="0" anchor="ctr"/>
+          <a:lstStyle/>
+          <a:p>
+            <a:pPr algn="ctr" indent="0" marL="0">
+              <a:buNone/>
+            </a:pPr>
+            <a:r>
+              <a:rPr lang="en-US" sz="1400" b="1" dirty="0">
+                <a:solidFill>
+                  <a:srgbClr val="0D9488"/>
+                </a:solidFill>
+                <a:latin typeface="Trebuchet MS" pitchFamily="34" charset="0"/>
+                <a:ea typeface="Trebuchet MS" pitchFamily="34" charset="-122"/>
+                <a:cs typeface="Trebuchet MS" pitchFamily="34" charset="-120"/>
+              </a:rPr>
+              <a:t>to</a:t>
+            </a:r>
+            <a:endParaRPr lang="en-US" sz="1400" dirty="0"/>
+          </a:p>
+        </p:txBody>
+      </p:sp>
+      <p:sp>
+        <p:nvSpPr>
+          <p:cNvPr id="36" name="Shape 34"/>
+          <p:cNvSpPr/>
+          <p:nvPr/>
+        </p:nvSpPr>
+        <p:spPr>
+          <a:xfrm>
+            <a:off x="365760" y="4096512"/>
+            <a:ext cx="1371600" cy="804672"/>
+          </a:xfrm>
+          <a:prstGeom prst="rect">
+            <a:avLst>
+              <a:gd name="adj" fmla="val 6818"/>
+            </a:avLst>
+          </a:prstGeom>
+          <a:solidFill>
+            <a:srgbClr val="E2E8F0"/>
+          </a:solidFill>
+          <a:ln w="12700">
+            <a:solidFill>
+              <a:srgbClr val="E2E8F0"/>
+            </a:solidFill>
+            <a:prstDash val="solid"/>
+          </a:ln>
+        </p:spPr>
+      </p:sp>
+      <p:sp>
+        <p:nvSpPr>
+          <p:cNvPr id="37" name="Text 35"/>
+          <p:cNvSpPr/>
+          <p:nvPr/>
+        </p:nvSpPr>
+        <p:spPr>
+          <a:xfrm>
+            <a:off x="365760" y="4096512"/>
+            <a:ext cx="1371600" cy="804672"/>
+          </a:xfrm>
+          <a:prstGeom prst="rect">
+            <a:avLst/>
+          </a:prstGeom>
+          <a:noFill/>
+          <a:ln/>
+        </p:spPr>
+        <p:txBody>
+          <a:bodyPr wrap="square" lIns="0" tIns="0" rIns="0" bIns="0" rtlCol="0" anchor="ctr"/>
+          <a:lstStyle/>
+          <a:p>
+            <a:pPr algn="ctr" indent="0" marL="0">
+              <a:buNone/>
+            </a:pPr>
+            <a:r>
+              <a:rPr lang="en-US" sz="1100" b="1" dirty="0">
+                <a:solidFill>
+                  <a:srgbClr val="475569"/>
+                </a:solidFill>
+                <a:latin typeface="Trebuchet MS" pitchFamily="34" charset="0"/>
+                <a:ea typeface="Trebuchet MS" pitchFamily="34" charset="-122"/>
+                <a:cs typeface="Trebuchet MS" pitchFamily="34" charset="-120"/>
+              </a:rPr>
+              <a:t>Phonemes</a:t>
+            </a:r>
+            <a:endParaRPr lang="en-US" sz="1100" dirty="0"/>
+          </a:p>
+        </p:txBody>
+      </p:sp>
+      <p:sp>
+        <p:nvSpPr>
+          <p:cNvPr id="38" name="Shape 36"/>
+          <p:cNvSpPr/>
+          <p:nvPr/>
+        </p:nvSpPr>
+        <p:spPr>
+          <a:xfrm>
+            <a:off x="1874520" y="4096512"/>
+            <a:ext cx="6903720" cy="804672"/>
+          </a:xfrm>
+          <a:prstGeom prst="rect">
+            <a:avLst>
+              <a:gd name="adj" fmla="val 6818"/>
+            </a:avLst>
+          </a:prstGeom>
+          <a:solidFill>
+            <a:srgbClr val="FCE7F3"/>
+          </a:solidFill>
+          <a:ln w="12700">
+            <a:solidFill>
+              <a:srgbClr val="DB2777"/>
+            </a:solidFill>
+            <a:prstDash val="solid"/>
+          </a:ln>
+        </p:spPr>
+      </p:sp>
+      <p:sp>
+        <p:nvSpPr>
+          <p:cNvPr id="39" name="Shape 37"/>
+          <p:cNvSpPr/>
+          <p:nvPr/>
+        </p:nvSpPr>
+        <p:spPr>
+          <a:xfrm>
+            <a:off x="2023872" y="4169664"/>
+            <a:ext cx="685800" cy="384048"/>
+          </a:xfrm>
+          <a:prstGeom prst="rect">
+            <a:avLst>
+              <a:gd name="adj" fmla="val 9524"/>
+            </a:avLst>
+          </a:prstGeom>
+          <a:solidFill>
+            <a:srgbClr val="FFFFFF"/>
+          </a:solidFill>
+          <a:ln w="12700">
+            <a:solidFill>
+              <a:srgbClr val="DB2777"/>
+            </a:solidFill>
+            <a:prstDash val="solid"/>
+          </a:ln>
+        </p:spPr>
+      </p:sp>
+      <p:sp>
+        <p:nvSpPr>
+          <p:cNvPr id="40" name="Text 38"/>
+          <p:cNvSpPr/>
+          <p:nvPr/>
+        </p:nvSpPr>
+        <p:spPr>
+          <a:xfrm>
+            <a:off x="2023872" y="4169664"/>
+            <a:ext cx="685800" cy="384048"/>
+          </a:xfrm>
+          <a:prstGeom prst="rect">
+            <a:avLst/>
+          </a:prstGeom>
+          <a:noFill/>
+          <a:ln/>
+        </p:spPr>
+        <p:txBody>
+          <a:bodyPr wrap="square" lIns="0" tIns="0" rIns="0" bIns="0" rtlCol="0" anchor="ctr"/>
+          <a:lstStyle/>
+          <a:p>
+            <a:pPr algn="ctr" indent="0" marL="0">
+              <a:buNone/>
+            </a:pPr>
+            <a:r>
+              <a:rPr lang="en-US" sz="900" b="1" dirty="0">
+                <a:solidFill>
+                  <a:srgbClr val="9D174D"/>
+                </a:solidFill>
+                <a:latin typeface="Trebuchet MS" pitchFamily="34" charset="0"/>
+                <a:ea typeface="Trebuchet MS" pitchFamily="34" charset="-122"/>
+                <a:cs typeface="Trebuchet MS" pitchFamily="34" charset="-120"/>
+              </a:rPr>
+              <a:t>t</a:t>
+            </a:r>
+            <a:endParaRPr lang="en-US" sz="900" dirty="0"/>
+          </a:p>
+        </p:txBody>
+      </p:sp>
+      <p:sp>
+        <p:nvSpPr>
+          <p:cNvPr id="41" name="Shape 39"/>
+          <p:cNvSpPr/>
+          <p:nvPr/>
+        </p:nvSpPr>
+        <p:spPr>
+          <a:xfrm>
+            <a:off x="2831592" y="4169664"/>
+            <a:ext cx="685800" cy="384048"/>
+          </a:xfrm>
+          <a:prstGeom prst="rect">
+            <a:avLst>
+              <a:gd name="adj" fmla="val 9524"/>
+            </a:avLst>
+          </a:prstGeom>
+          <a:solidFill>
+            <a:srgbClr val="FFFFFF"/>
+          </a:solidFill>
+          <a:ln w="12700">
+            <a:solidFill>
+              <a:srgbClr val="DB2777"/>
+            </a:solidFill>
+            <a:prstDash val="solid"/>
+          </a:ln>
+        </p:spPr>
+      </p:sp>
+      <p:sp>
+        <p:nvSpPr>
+          <p:cNvPr id="42" name="Text 40"/>
+          <p:cNvSpPr/>
+          <p:nvPr/>
+        </p:nvSpPr>
+        <p:spPr>
+          <a:xfrm>
+            <a:off x="2831592" y="4169664"/>
+            <a:ext cx="685800" cy="384048"/>
+          </a:xfrm>
+          <a:prstGeom prst="rect">
+            <a:avLst/>
+          </a:prstGeom>
+          <a:noFill/>
+          <a:ln/>
+        </p:spPr>
+        <p:txBody>
+          <a:bodyPr wrap="square" lIns="0" tIns="0" rIns="0" bIns="0" rtlCol="0" anchor="ctr"/>
+          <a:lstStyle/>
+          <a:p>
+            <a:pPr algn="ctr" indent="0" marL="0">
+              <a:buNone/>
+            </a:pPr>
+            <a:r>
+              <a:rPr lang="en-US" sz="900" b="1" dirty="0">
+                <a:solidFill>
+                  <a:srgbClr val="9D174D"/>
+                </a:solidFill>
+                <a:latin typeface="Trebuchet MS" pitchFamily="34" charset="0"/>
+                <a:ea typeface="Trebuchet MS" pitchFamily="34" charset="-122"/>
+                <a:cs typeface="Trebuchet MS" pitchFamily="34" charset="-120"/>
+              </a:rPr>
+              <a:t>e</a:t>
+            </a:r>
+            <a:endParaRPr lang="en-US" sz="900" dirty="0"/>
+          </a:p>
+        </p:txBody>
+      </p:sp>
+      <p:sp>
+        <p:nvSpPr>
+          <p:cNvPr id="43" name="Shape 41"/>
+          <p:cNvSpPr/>
+          <p:nvPr/>
+        </p:nvSpPr>
+        <p:spPr>
+          <a:xfrm>
+            <a:off x="3639312" y="4169664"/>
+            <a:ext cx="685800" cy="384048"/>
+          </a:xfrm>
+          <a:prstGeom prst="rect">
+            <a:avLst>
+              <a:gd name="adj" fmla="val 9524"/>
+            </a:avLst>
+          </a:prstGeom>
+          <a:solidFill>
+            <a:srgbClr val="FFFFFF"/>
+          </a:solidFill>
+          <a:ln w="12700">
+            <a:solidFill>
+              <a:srgbClr val="DB2777"/>
+            </a:solidFill>
+            <a:prstDash val="solid"/>
+          </a:ln>
+        </p:spPr>
+      </p:sp>
+      <p:sp>
+        <p:nvSpPr>
+          <p:cNvPr id="44" name="Text 42"/>
+          <p:cNvSpPr/>
+          <p:nvPr/>
+        </p:nvSpPr>
+        <p:spPr>
+          <a:xfrm>
+            <a:off x="3639312" y="4169664"/>
+            <a:ext cx="685800" cy="384048"/>
+          </a:xfrm>
+          <a:prstGeom prst="rect">
+            <a:avLst/>
+          </a:prstGeom>
+          <a:noFill/>
+          <a:ln/>
+        </p:spPr>
+        <p:txBody>
+          <a:bodyPr wrap="square" lIns="0" tIns="0" rIns="0" bIns="0" rtlCol="0" anchor="ctr"/>
+          <a:lstStyle/>
+          <a:p>
+            <a:pPr algn="ctr" indent="0" marL="0">
+              <a:buNone/>
+            </a:pPr>
+            <a:r>
+              <a:rPr lang="en-US" sz="900" b="1" dirty="0">
+                <a:solidFill>
+                  <a:srgbClr val="9D174D"/>
+                </a:solidFill>
+                <a:latin typeface="Trebuchet MS" pitchFamily="34" charset="0"/>
+                <a:ea typeface="Trebuchet MS" pitchFamily="34" charset="-122"/>
+                <a:cs typeface="Trebuchet MS" pitchFamily="34" charset="-120"/>
+              </a:rPr>
+              <a:t>l</a:t>
+            </a:r>
+            <a:endParaRPr lang="en-US" sz="900" dirty="0"/>
+          </a:p>
+        </p:txBody>
+      </p:sp>
+      <p:sp>
+        <p:nvSpPr>
+          <p:cNvPr id="45" name="Shape 43"/>
+          <p:cNvSpPr/>
+          <p:nvPr/>
+        </p:nvSpPr>
+        <p:spPr>
+          <a:xfrm>
+            <a:off x="4447032" y="4169664"/>
+            <a:ext cx="685800" cy="384048"/>
+          </a:xfrm>
+          <a:prstGeom prst="rect">
+            <a:avLst>
+              <a:gd name="adj" fmla="val 9524"/>
+            </a:avLst>
+          </a:prstGeom>
+          <a:solidFill>
+            <a:srgbClr val="FFFFFF"/>
+          </a:solidFill>
+          <a:ln w="12700">
+            <a:solidFill>
+              <a:srgbClr val="DB2777"/>
+            </a:solidFill>
+            <a:prstDash val="solid"/>
+          </a:ln>
+        </p:spPr>
+      </p:sp>
+      <p:sp>
+        <p:nvSpPr>
+          <p:cNvPr id="46" name="Text 44"/>
+          <p:cNvSpPr/>
+          <p:nvPr/>
+        </p:nvSpPr>
+        <p:spPr>
+          <a:xfrm>
+            <a:off x="4447032" y="4169664"/>
+            <a:ext cx="685800" cy="384048"/>
+          </a:xfrm>
+          <a:prstGeom prst="rect">
+            <a:avLst/>
+          </a:prstGeom>
+          <a:noFill/>
+          <a:ln/>
+        </p:spPr>
+        <p:txBody>
+          <a:bodyPr wrap="square" lIns="0" tIns="0" rIns="0" bIns="0" rtlCol="0" anchor="ctr"/>
+          <a:lstStyle/>
+          <a:p>
+            <a:pPr algn="ctr" indent="0" marL="0">
+              <a:buNone/>
+            </a:pPr>
+            <a:r>
+              <a:rPr lang="en-US" sz="900" b="1" dirty="0">
+                <a:solidFill>
+                  <a:srgbClr val="9D174D"/>
+                </a:solidFill>
+                <a:latin typeface="Trebuchet MS" pitchFamily="34" charset="0"/>
+                <a:ea typeface="Trebuchet MS" pitchFamily="34" charset="-122"/>
+                <a:cs typeface="Trebuchet MS" pitchFamily="34" charset="-120"/>
+              </a:rPr>
+              <a:t>e</a:t>
+            </a:r>
+            <a:endParaRPr lang="en-US" sz="900" dirty="0"/>
+          </a:p>
+        </p:txBody>
+      </p:sp>
+      <p:sp>
+        <p:nvSpPr>
+          <p:cNvPr id="47" name="Shape 45"/>
+          <p:cNvSpPr/>
+          <p:nvPr/>
+        </p:nvSpPr>
+        <p:spPr>
+          <a:xfrm>
+            <a:off x="5254752" y="4169664"/>
+            <a:ext cx="685800" cy="384048"/>
+          </a:xfrm>
+          <a:prstGeom prst="rect">
+            <a:avLst>
+              <a:gd name="adj" fmla="val 9524"/>
+            </a:avLst>
+          </a:prstGeom>
+          <a:solidFill>
+            <a:srgbClr val="FFFFFF"/>
+          </a:solidFill>
+          <a:ln w="12700">
+            <a:solidFill>
+              <a:srgbClr val="DB2777"/>
+            </a:solidFill>
+            <a:prstDash val="solid"/>
+          </a:ln>
+        </p:spPr>
+      </p:sp>
+      <p:sp>
+        <p:nvSpPr>
+          <p:cNvPr id="48" name="Text 46"/>
+          <p:cNvSpPr/>
+          <p:nvPr/>
+        </p:nvSpPr>
+        <p:spPr>
+          <a:xfrm>
+            <a:off x="5254752" y="4169664"/>
+            <a:ext cx="685800" cy="384048"/>
+          </a:xfrm>
+          <a:prstGeom prst="rect">
+            <a:avLst/>
+          </a:prstGeom>
+          <a:noFill/>
+          <a:ln/>
+        </p:spPr>
+        <p:txBody>
+          <a:bodyPr wrap="square" lIns="0" tIns="0" rIns="0" bIns="0" rtlCol="0" anchor="ctr"/>
+          <a:lstStyle/>
+          <a:p>
+            <a:pPr algn="ctr" indent="0" marL="0">
+              <a:buNone/>
+            </a:pPr>
+            <a:r>
+              <a:rPr lang="en-US" sz="900" b="1" dirty="0">
+                <a:solidFill>
+                  <a:srgbClr val="9D174D"/>
+                </a:solidFill>
+                <a:latin typeface="Trebuchet MS" pitchFamily="34" charset="0"/>
+                <a:ea typeface="Trebuchet MS" pitchFamily="34" charset="-122"/>
+                <a:cs typeface="Trebuchet MS" pitchFamily="34" charset="-120"/>
+              </a:rPr>
+              <a:t>ph</a:t>
+            </a:r>
+            <a:endParaRPr lang="en-US" sz="900" dirty="0"/>
+          </a:p>
+        </p:txBody>
+      </p:sp>
+      <p:sp>
+        <p:nvSpPr>
+          <p:cNvPr id="49" name="Text 47"/>
+          <p:cNvSpPr/>
+          <p:nvPr/>
+        </p:nvSpPr>
+        <p:spPr>
+          <a:xfrm>
+            <a:off x="5254752" y="4572000"/>
+            <a:ext cx="685800" cy="219456"/>
           </a:xfrm>
           <a:prstGeom prst="rect">
             <a:avLst/>
@@ -29842,1518 +30306,213 @@
               <a:buNone/>
             </a:pPr>
             <a:r>
-              <a:rPr lang="en-US" sz="850" dirty="0">
-                <a:solidFill>
-                  <a:srgbClr val="475569"/>
+              <a:rPr lang="en-US" sz="750" i="1" dirty="0">
+                <a:solidFill>
+                  <a:srgbClr val="94A3B8"/>
                 </a:solidFill>
                 <a:latin typeface="Calibri" pitchFamily="34" charset="0"/>
                 <a:ea typeface="Calibri" pitchFamily="34" charset="-122"/>
                 <a:cs typeface="Calibri" pitchFamily="34" charset="-120"/>
               </a:rPr>
-              <a:t>having the quality of</a:t>
-            </a:r>
-            <a:endParaRPr lang="en-US" sz="850" dirty="0"/>
-          </a:p>
-        </p:txBody>
-      </p:sp>
-      <p:sp>
-        <p:nvSpPr>
-          <p:cNvPr id="25" name="Shape 23"/>
-          <p:cNvSpPr/>
-          <p:nvPr/>
-        </p:nvSpPr>
-        <p:spPr>
-          <a:xfrm>
-            <a:off x="365760" y="3273552"/>
-            <a:ext cx="1371600" cy="658368"/>
+              <a:t>/f/</a:t>
+            </a:r>
+            <a:endParaRPr lang="en-US" sz="750" dirty="0"/>
+          </a:p>
+        </p:txBody>
+      </p:sp>
+      <p:sp>
+        <p:nvSpPr>
+          <p:cNvPr id="50" name="Shape 48"/>
+          <p:cNvSpPr/>
+          <p:nvPr/>
+        </p:nvSpPr>
+        <p:spPr>
+          <a:xfrm>
+            <a:off x="6062472" y="4169664"/>
+            <a:ext cx="685800" cy="384048"/>
           </a:xfrm>
           <a:prstGeom prst="rect">
             <a:avLst>
-              <a:gd name="adj" fmla="val 8333"/>
+              <a:gd name="adj" fmla="val 9524"/>
             </a:avLst>
           </a:prstGeom>
           <a:solidFill>
-            <a:srgbClr val="E2E8F0"/>
-          </a:solidFill>
-          <a:ln w="12700">
-            <a:solidFill>
-              <a:srgbClr val="E2E8F0"/>
-            </a:solidFill>
-            <a:prstDash val="solid"/>
-          </a:ln>
-        </p:spPr>
-      </p:sp>
-      <p:sp>
-        <p:nvSpPr>
-          <p:cNvPr id="26" name="Text 24"/>
-          <p:cNvSpPr/>
-          <p:nvPr/>
-        </p:nvSpPr>
-        <p:spPr>
-          <a:xfrm>
-            <a:off x="365760" y="3273552"/>
-            <a:ext cx="1371600" cy="658368"/>
-          </a:xfrm>
-          <a:prstGeom prst="rect">
-            <a:avLst/>
-          </a:prstGeom>
-          <a:noFill/>
-          <a:ln/>
-        </p:spPr>
-        <p:txBody>
-          <a:bodyPr wrap="square" lIns="0" tIns="0" rIns="0" bIns="0" rtlCol="0" anchor="ctr"/>
-          <a:lstStyle/>
-          <a:p>
-            <a:pPr algn="ctr" indent="0" marL="0">
-              <a:buNone/>
-            </a:pPr>
-            <a:r>
-              <a:rPr lang="en-US" sz="1100" b="1" dirty="0">
-                <a:solidFill>
-                  <a:srgbClr val="475569"/>
+            <a:srgbClr val="FFFFFF"/>
+          </a:solidFill>
+          <a:ln w="12700">
+            <a:solidFill>
+              <a:srgbClr val="DB2777"/>
+            </a:solidFill>
+            <a:prstDash val="solid"/>
+          </a:ln>
+        </p:spPr>
+      </p:sp>
+      <p:sp>
+        <p:nvSpPr>
+          <p:cNvPr id="51" name="Text 49"/>
+          <p:cNvSpPr/>
+          <p:nvPr/>
+        </p:nvSpPr>
+        <p:spPr>
+          <a:xfrm>
+            <a:off x="6062472" y="4169664"/>
+            <a:ext cx="685800" cy="384048"/>
+          </a:xfrm>
+          <a:prstGeom prst="rect">
+            <a:avLst/>
+          </a:prstGeom>
+          <a:noFill/>
+          <a:ln/>
+        </p:spPr>
+        <p:txBody>
+          <a:bodyPr wrap="square" lIns="0" tIns="0" rIns="0" bIns="0" rtlCol="0" anchor="ctr"/>
+          <a:lstStyle/>
+          <a:p>
+            <a:pPr algn="ctr" indent="0" marL="0">
+              <a:buNone/>
+            </a:pPr>
+            <a:r>
+              <a:rPr lang="en-US" sz="900" b="1" dirty="0">
+                <a:solidFill>
+                  <a:srgbClr val="9D174D"/>
                 </a:solidFill>
                 <a:latin typeface="Trebuchet MS" pitchFamily="34" charset="0"/>
                 <a:ea typeface="Trebuchet MS" pitchFamily="34" charset="-122"/>
                 <a:cs typeface="Trebuchet MS" pitchFamily="34" charset="-120"/>
               </a:rPr>
-              <a:t>Syllables</a:t>
-            </a:r>
-            <a:endParaRPr lang="en-US" sz="1100" dirty="0"/>
-          </a:p>
-        </p:txBody>
-      </p:sp>
-      <p:sp>
-        <p:nvSpPr>
-          <p:cNvPr id="27" name="Shape 25"/>
-          <p:cNvSpPr/>
-          <p:nvPr/>
-        </p:nvSpPr>
-        <p:spPr>
-          <a:xfrm>
-            <a:off x="1874520" y="3273552"/>
-            <a:ext cx="6903720" cy="658368"/>
+              <a:t>o</a:t>
+            </a:r>
+            <a:endParaRPr lang="en-US" sz="900" dirty="0"/>
+          </a:p>
+        </p:txBody>
+      </p:sp>
+      <p:sp>
+        <p:nvSpPr>
+          <p:cNvPr id="52" name="Shape 50"/>
+          <p:cNvSpPr/>
+          <p:nvPr/>
+        </p:nvSpPr>
+        <p:spPr>
+          <a:xfrm>
+            <a:off x="6870192" y="4169664"/>
+            <a:ext cx="685800" cy="384048"/>
           </a:xfrm>
           <a:prstGeom prst="rect">
             <a:avLst>
-              <a:gd name="adj" fmla="val 8333"/>
+              <a:gd name="adj" fmla="val 9524"/>
             </a:avLst>
           </a:prstGeom>
           <a:solidFill>
-            <a:srgbClr val="CCFBF1"/>
-          </a:solidFill>
-          <a:ln w="12700">
-            <a:solidFill>
-              <a:srgbClr val="0D9488"/>
-            </a:solidFill>
-            <a:prstDash val="solid"/>
-          </a:ln>
-        </p:spPr>
-      </p:sp>
-      <p:sp>
-        <p:nvSpPr>
-          <p:cNvPr id="28" name="Shape 26"/>
-          <p:cNvSpPr/>
-          <p:nvPr/>
-        </p:nvSpPr>
-        <p:spPr>
-          <a:xfrm>
-            <a:off x="1978152" y="3364992"/>
-            <a:ext cx="1225296" cy="475488"/>
-          </a:xfrm>
-          <a:prstGeom prst="rect">
-            <a:avLst>
-              <a:gd name="adj" fmla="val 9615"/>
-            </a:avLst>
-          </a:prstGeom>
-          <a:solidFill>
             <a:srgbClr val="FFFFFF"/>
           </a:solidFill>
           <a:ln w="12700">
             <a:solidFill>
-              <a:srgbClr val="0D9488"/>
-            </a:solidFill>
-            <a:prstDash val="solid"/>
-          </a:ln>
-        </p:spPr>
-      </p:sp>
-      <p:sp>
-        <p:nvSpPr>
-          <p:cNvPr id="29" name="Text 27"/>
-          <p:cNvSpPr/>
-          <p:nvPr/>
-        </p:nvSpPr>
-        <p:spPr>
-          <a:xfrm>
-            <a:off x="1978152" y="3364992"/>
-            <a:ext cx="1225296" cy="475488"/>
-          </a:xfrm>
-          <a:prstGeom prst="rect">
-            <a:avLst/>
-          </a:prstGeom>
-          <a:noFill/>
-          <a:ln/>
-        </p:spPr>
-        <p:txBody>
-          <a:bodyPr wrap="square" lIns="0" tIns="0" rIns="0" bIns="0" rtlCol="0" anchor="ctr"/>
-          <a:lstStyle/>
-          <a:p>
-            <a:pPr algn="ctr" indent="0" marL="0">
-              <a:buNone/>
-            </a:pPr>
-            <a:r>
-              <a:rPr lang="en-US" sz="1400" b="1" dirty="0">
-                <a:solidFill>
-                  <a:srgbClr val="0D9488"/>
+              <a:srgbClr val="DB2777"/>
+            </a:solidFill>
+            <a:prstDash val="solid"/>
+          </a:ln>
+        </p:spPr>
+      </p:sp>
+      <p:sp>
+        <p:nvSpPr>
+          <p:cNvPr id="53" name="Text 51"/>
+          <p:cNvSpPr/>
+          <p:nvPr/>
+        </p:nvSpPr>
+        <p:spPr>
+          <a:xfrm>
+            <a:off x="6870192" y="4169664"/>
+            <a:ext cx="685800" cy="384048"/>
+          </a:xfrm>
+          <a:prstGeom prst="rect">
+            <a:avLst/>
+          </a:prstGeom>
+          <a:noFill/>
+          <a:ln/>
+        </p:spPr>
+        <p:txBody>
+          <a:bodyPr wrap="square" lIns="0" tIns="0" rIns="0" bIns="0" rtlCol="0" anchor="ctr"/>
+          <a:lstStyle/>
+          <a:p>
+            <a:pPr algn="ctr" indent="0" marL="0">
+              <a:buNone/>
+            </a:pPr>
+            <a:r>
+              <a:rPr lang="en-US" sz="900" b="1" dirty="0">
+                <a:solidFill>
+                  <a:srgbClr val="9D174D"/>
                 </a:solidFill>
                 <a:latin typeface="Trebuchet MS" pitchFamily="34" charset="0"/>
                 <a:ea typeface="Trebuchet MS" pitchFamily="34" charset="-122"/>
                 <a:cs typeface="Trebuchet MS" pitchFamily="34" charset="-120"/>
               </a:rPr>
-              <a:t>pho</a:t>
-            </a:r>
-            <a:endParaRPr lang="en-US" sz="1400" dirty="0"/>
-          </a:p>
-        </p:txBody>
-      </p:sp>
-      <p:sp>
-        <p:nvSpPr>
-          <p:cNvPr id="30" name="Text 28"/>
-          <p:cNvSpPr/>
-          <p:nvPr/>
-        </p:nvSpPr>
-        <p:spPr>
-          <a:xfrm>
-            <a:off x="3203448" y="3364992"/>
-            <a:ext cx="76200" cy="475488"/>
-          </a:xfrm>
-          <a:prstGeom prst="rect">
-            <a:avLst/>
-          </a:prstGeom>
-          <a:noFill/>
-          <a:ln/>
-        </p:spPr>
-        <p:txBody>
-          <a:bodyPr wrap="square" lIns="0" tIns="0" rIns="0" bIns="0" rtlCol="0" anchor="ctr"/>
-          <a:lstStyle/>
-          <a:p>
-            <a:pPr algn="ctr" indent="0" marL="0">
-              <a:buNone/>
-            </a:pPr>
-            <a:r>
-              <a:rPr lang="en-US" sz="1600" b="1" dirty="0">
-                <a:solidFill>
-                  <a:srgbClr val="0D9488"/>
+              <a:t>t</a:t>
+            </a:r>
+            <a:endParaRPr lang="en-US" sz="900" dirty="0"/>
+          </a:p>
+        </p:txBody>
+      </p:sp>
+      <p:sp>
+        <p:nvSpPr>
+          <p:cNvPr id="54" name="Shape 52"/>
+          <p:cNvSpPr/>
+          <p:nvPr/>
+        </p:nvSpPr>
+        <p:spPr>
+          <a:xfrm>
+            <a:off x="7677912" y="4169664"/>
+            <a:ext cx="685800" cy="384048"/>
+          </a:xfrm>
+          <a:prstGeom prst="rect">
+            <a:avLst>
+              <a:gd name="adj" fmla="val 9524"/>
+            </a:avLst>
+          </a:prstGeom>
+          <a:solidFill>
+            <a:srgbClr val="FFFFFF"/>
+          </a:solidFill>
+          <a:ln w="12700">
+            <a:solidFill>
+              <a:srgbClr val="DB2777"/>
+            </a:solidFill>
+            <a:prstDash val="solid"/>
+          </a:ln>
+        </p:spPr>
+      </p:sp>
+      <p:sp>
+        <p:nvSpPr>
+          <p:cNvPr id="55" name="Text 53"/>
+          <p:cNvSpPr/>
+          <p:nvPr/>
+        </p:nvSpPr>
+        <p:spPr>
+          <a:xfrm>
+            <a:off x="7677912" y="4169664"/>
+            <a:ext cx="685800" cy="384048"/>
+          </a:xfrm>
+          <a:prstGeom prst="rect">
+            <a:avLst/>
+          </a:prstGeom>
+          <a:noFill/>
+          <a:ln/>
+        </p:spPr>
+        <p:txBody>
+          <a:bodyPr wrap="square" lIns="0" tIns="0" rIns="0" bIns="0" rtlCol="0" anchor="ctr"/>
+          <a:lstStyle/>
+          <a:p>
+            <a:pPr algn="ctr" indent="0" marL="0">
+              <a:buNone/>
+            </a:pPr>
+            <a:r>
+              <a:rPr lang="en-US" sz="900" b="1" dirty="0">
+                <a:solidFill>
+                  <a:srgbClr val="9D174D"/>
                 </a:solidFill>
                 <a:latin typeface="Trebuchet MS" pitchFamily="34" charset="0"/>
                 <a:ea typeface="Trebuchet MS" pitchFamily="34" charset="-122"/>
                 <a:cs typeface="Trebuchet MS" pitchFamily="34" charset="-120"/>
               </a:rPr>
-              <a:t>·</a:t>
-            </a:r>
-            <a:endParaRPr lang="en-US" sz="1600" dirty="0"/>
-          </a:p>
-        </p:txBody>
-      </p:sp>
-      <p:sp>
-        <p:nvSpPr>
-          <p:cNvPr id="31" name="Shape 29"/>
-          <p:cNvSpPr/>
-          <p:nvPr/>
-        </p:nvSpPr>
-        <p:spPr>
-          <a:xfrm>
-            <a:off x="3279648" y="3364992"/>
-            <a:ext cx="1225296" cy="475488"/>
-          </a:xfrm>
-          <a:prstGeom prst="rect">
-            <a:avLst>
-              <a:gd name="adj" fmla="val 9615"/>
-            </a:avLst>
-          </a:prstGeom>
-          <a:solidFill>
-            <a:srgbClr val="FFFFFF"/>
-          </a:solidFill>
-          <a:ln w="12700">
-            <a:solidFill>
-              <a:srgbClr val="0D9488"/>
-            </a:solidFill>
-            <a:prstDash val="solid"/>
-          </a:ln>
-        </p:spPr>
-      </p:sp>
-      <p:sp>
-        <p:nvSpPr>
-          <p:cNvPr id="32" name="Text 30"/>
-          <p:cNvSpPr/>
-          <p:nvPr/>
-        </p:nvSpPr>
-        <p:spPr>
-          <a:xfrm>
-            <a:off x="3279648" y="3364992"/>
-            <a:ext cx="1225296" cy="475488"/>
-          </a:xfrm>
-          <a:prstGeom prst="rect">
-            <a:avLst/>
-          </a:prstGeom>
-          <a:noFill/>
-          <a:ln/>
-        </p:spPr>
-        <p:txBody>
-          <a:bodyPr wrap="square" lIns="0" tIns="0" rIns="0" bIns="0" rtlCol="0" anchor="ctr"/>
-          <a:lstStyle/>
-          <a:p>
-            <a:pPr algn="ctr" indent="0" marL="0">
-              <a:buNone/>
-            </a:pPr>
-            <a:r>
-              <a:rPr lang="en-US" sz="1400" b="1" dirty="0">
-                <a:solidFill>
-                  <a:srgbClr val="0D9488"/>
-                </a:solidFill>
-                <a:latin typeface="Trebuchet MS" pitchFamily="34" charset="0"/>
-                <a:ea typeface="Trebuchet MS" pitchFamily="34" charset="-122"/>
-                <a:cs typeface="Trebuchet MS" pitchFamily="34" charset="-120"/>
-              </a:rPr>
-              <a:t>to</a:t>
-            </a:r>
-            <a:endParaRPr lang="en-US" sz="1400" dirty="0"/>
-          </a:p>
-        </p:txBody>
-      </p:sp>
-      <p:sp>
-        <p:nvSpPr>
-          <p:cNvPr id="33" name="Text 31"/>
-          <p:cNvSpPr/>
-          <p:nvPr/>
-        </p:nvSpPr>
-        <p:spPr>
-          <a:xfrm>
-            <a:off x="4504944" y="3364992"/>
-            <a:ext cx="76200" cy="475488"/>
-          </a:xfrm>
-          <a:prstGeom prst="rect">
-            <a:avLst/>
-          </a:prstGeom>
-          <a:noFill/>
-          <a:ln/>
-        </p:spPr>
-        <p:txBody>
-          <a:bodyPr wrap="square" lIns="0" tIns="0" rIns="0" bIns="0" rtlCol="0" anchor="ctr"/>
-          <a:lstStyle/>
-          <a:p>
-            <a:pPr algn="ctr" indent="0" marL="0">
-              <a:buNone/>
-            </a:pPr>
-            <a:r>
-              <a:rPr lang="en-US" sz="1600" b="1" dirty="0">
-                <a:solidFill>
-                  <a:srgbClr val="0D9488"/>
-                </a:solidFill>
-                <a:latin typeface="Trebuchet MS" pitchFamily="34" charset="0"/>
-                <a:ea typeface="Trebuchet MS" pitchFamily="34" charset="-122"/>
-                <a:cs typeface="Trebuchet MS" pitchFamily="34" charset="-120"/>
-              </a:rPr>
-              <a:t>·</a:t>
-            </a:r>
-            <a:endParaRPr lang="en-US" sz="1600" dirty="0"/>
-          </a:p>
-        </p:txBody>
-      </p:sp>
-      <p:sp>
-        <p:nvSpPr>
-          <p:cNvPr id="34" name="Shape 32"/>
-          <p:cNvSpPr/>
-          <p:nvPr/>
-        </p:nvSpPr>
-        <p:spPr>
-          <a:xfrm>
-            <a:off x="4581144" y="3364992"/>
-            <a:ext cx="1225296" cy="475488"/>
-          </a:xfrm>
-          <a:prstGeom prst="rect">
-            <a:avLst>
-              <a:gd name="adj" fmla="val 9615"/>
-            </a:avLst>
-          </a:prstGeom>
-          <a:solidFill>
-            <a:srgbClr val="FFFFFF"/>
-          </a:solidFill>
-          <a:ln w="12700">
-            <a:solidFill>
-              <a:srgbClr val="0D9488"/>
-            </a:solidFill>
-            <a:prstDash val="solid"/>
-          </a:ln>
-        </p:spPr>
-      </p:sp>
-      <p:sp>
-        <p:nvSpPr>
-          <p:cNvPr id="35" name="Text 33"/>
-          <p:cNvSpPr/>
-          <p:nvPr/>
-        </p:nvSpPr>
-        <p:spPr>
-          <a:xfrm>
-            <a:off x="4581144" y="3364992"/>
-            <a:ext cx="1225296" cy="475488"/>
-          </a:xfrm>
-          <a:prstGeom prst="rect">
-            <a:avLst/>
-          </a:prstGeom>
-          <a:noFill/>
-          <a:ln/>
-        </p:spPr>
-        <p:txBody>
-          <a:bodyPr wrap="square" lIns="0" tIns="0" rIns="0" bIns="0" rtlCol="0" anchor="ctr"/>
-          <a:lstStyle/>
-          <a:p>
-            <a:pPr algn="ctr" indent="0" marL="0">
-              <a:buNone/>
-            </a:pPr>
-            <a:r>
-              <a:rPr lang="en-US" sz="1400" b="1" dirty="0">
-                <a:solidFill>
-                  <a:srgbClr val="0D9488"/>
-                </a:solidFill>
-                <a:latin typeface="Trebuchet MS" pitchFamily="34" charset="0"/>
-                <a:ea typeface="Trebuchet MS" pitchFamily="34" charset="-122"/>
-                <a:cs typeface="Trebuchet MS" pitchFamily="34" charset="-120"/>
-              </a:rPr>
-              <a:t>sen</a:t>
-            </a:r>
-            <a:endParaRPr lang="en-US" sz="1400" dirty="0"/>
-          </a:p>
-        </p:txBody>
-      </p:sp>
-      <p:sp>
-        <p:nvSpPr>
-          <p:cNvPr id="36" name="Text 34"/>
-          <p:cNvSpPr/>
-          <p:nvPr/>
-        </p:nvSpPr>
-        <p:spPr>
-          <a:xfrm>
-            <a:off x="5806440" y="3364992"/>
-            <a:ext cx="76200" cy="475488"/>
-          </a:xfrm>
-          <a:prstGeom prst="rect">
-            <a:avLst/>
-          </a:prstGeom>
-          <a:noFill/>
-          <a:ln/>
-        </p:spPr>
-        <p:txBody>
-          <a:bodyPr wrap="square" lIns="0" tIns="0" rIns="0" bIns="0" rtlCol="0" anchor="ctr"/>
-          <a:lstStyle/>
-          <a:p>
-            <a:pPr algn="ctr" indent="0" marL="0">
-              <a:buNone/>
-            </a:pPr>
-            <a:r>
-              <a:rPr lang="en-US" sz="1600" b="1" dirty="0">
-                <a:solidFill>
-                  <a:srgbClr val="0D9488"/>
-                </a:solidFill>
-                <a:latin typeface="Trebuchet MS" pitchFamily="34" charset="0"/>
-                <a:ea typeface="Trebuchet MS" pitchFamily="34" charset="-122"/>
-                <a:cs typeface="Trebuchet MS" pitchFamily="34" charset="-120"/>
-              </a:rPr>
-              <a:t>·</a:t>
-            </a:r>
-            <a:endParaRPr lang="en-US" sz="1600" dirty="0"/>
-          </a:p>
-        </p:txBody>
-      </p:sp>
-      <p:sp>
-        <p:nvSpPr>
-          <p:cNvPr id="37" name="Shape 35"/>
-          <p:cNvSpPr/>
-          <p:nvPr/>
-        </p:nvSpPr>
-        <p:spPr>
-          <a:xfrm>
-            <a:off x="5882640" y="3364992"/>
-            <a:ext cx="1225296" cy="475488"/>
-          </a:xfrm>
-          <a:prstGeom prst="rect">
-            <a:avLst>
-              <a:gd name="adj" fmla="val 9615"/>
-            </a:avLst>
-          </a:prstGeom>
-          <a:solidFill>
-            <a:srgbClr val="FFFFFF"/>
-          </a:solidFill>
-          <a:ln w="12700">
-            <a:solidFill>
-              <a:srgbClr val="0D9488"/>
-            </a:solidFill>
-            <a:prstDash val="solid"/>
-          </a:ln>
-        </p:spPr>
-      </p:sp>
-      <p:sp>
-        <p:nvSpPr>
-          <p:cNvPr id="38" name="Text 36"/>
-          <p:cNvSpPr/>
-          <p:nvPr/>
-        </p:nvSpPr>
-        <p:spPr>
-          <a:xfrm>
-            <a:off x="5882640" y="3364992"/>
-            <a:ext cx="1225296" cy="475488"/>
-          </a:xfrm>
-          <a:prstGeom prst="rect">
-            <a:avLst/>
-          </a:prstGeom>
-          <a:noFill/>
-          <a:ln/>
-        </p:spPr>
-        <p:txBody>
-          <a:bodyPr wrap="square" lIns="0" tIns="0" rIns="0" bIns="0" rtlCol="0" anchor="ctr"/>
-          <a:lstStyle/>
-          <a:p>
-            <a:pPr algn="ctr" indent="0" marL="0">
-              <a:buNone/>
-            </a:pPr>
-            <a:r>
-              <a:rPr lang="en-US" sz="1400" b="1" dirty="0">
-                <a:solidFill>
-                  <a:srgbClr val="0D9488"/>
-                </a:solidFill>
-                <a:latin typeface="Trebuchet MS" pitchFamily="34" charset="0"/>
-                <a:ea typeface="Trebuchet MS" pitchFamily="34" charset="-122"/>
-                <a:cs typeface="Trebuchet MS" pitchFamily="34" charset="-120"/>
-              </a:rPr>
-              <a:t>si</a:t>
-            </a:r>
-            <a:endParaRPr lang="en-US" sz="1400" dirty="0"/>
-          </a:p>
-        </p:txBody>
-      </p:sp>
-      <p:sp>
-        <p:nvSpPr>
-          <p:cNvPr id="39" name="Text 37"/>
-          <p:cNvSpPr/>
-          <p:nvPr/>
-        </p:nvSpPr>
-        <p:spPr>
-          <a:xfrm>
-            <a:off x="7107936" y="3364992"/>
-            <a:ext cx="76200" cy="475488"/>
-          </a:xfrm>
-          <a:prstGeom prst="rect">
-            <a:avLst/>
-          </a:prstGeom>
-          <a:noFill/>
-          <a:ln/>
-        </p:spPr>
-        <p:txBody>
-          <a:bodyPr wrap="square" lIns="0" tIns="0" rIns="0" bIns="0" rtlCol="0" anchor="ctr"/>
-          <a:lstStyle/>
-          <a:p>
-            <a:pPr algn="ctr" indent="0" marL="0">
-              <a:buNone/>
-            </a:pPr>
-            <a:r>
-              <a:rPr lang="en-US" sz="1600" b="1" dirty="0">
-                <a:solidFill>
-                  <a:srgbClr val="0D9488"/>
-                </a:solidFill>
-                <a:latin typeface="Trebuchet MS" pitchFamily="34" charset="0"/>
-                <a:ea typeface="Trebuchet MS" pitchFamily="34" charset="-122"/>
-                <a:cs typeface="Trebuchet MS" pitchFamily="34" charset="-120"/>
-              </a:rPr>
-              <a:t>·</a:t>
-            </a:r>
-            <a:endParaRPr lang="en-US" sz="1600" dirty="0"/>
-          </a:p>
-        </p:txBody>
-      </p:sp>
-      <p:sp>
-        <p:nvSpPr>
-          <p:cNvPr id="40" name="Shape 38"/>
-          <p:cNvSpPr/>
-          <p:nvPr/>
-        </p:nvSpPr>
-        <p:spPr>
-          <a:xfrm>
-            <a:off x="7184136" y="3364992"/>
-            <a:ext cx="1225296" cy="475488"/>
-          </a:xfrm>
-          <a:prstGeom prst="rect">
-            <a:avLst>
-              <a:gd name="adj" fmla="val 9615"/>
-            </a:avLst>
-          </a:prstGeom>
-          <a:solidFill>
-            <a:srgbClr val="FFFFFF"/>
-          </a:solidFill>
-          <a:ln w="12700">
-            <a:solidFill>
-              <a:srgbClr val="0D9488"/>
-            </a:solidFill>
-            <a:prstDash val="solid"/>
-          </a:ln>
-        </p:spPr>
-      </p:sp>
-      <p:sp>
-        <p:nvSpPr>
-          <p:cNvPr id="41" name="Text 39"/>
-          <p:cNvSpPr/>
-          <p:nvPr/>
-        </p:nvSpPr>
-        <p:spPr>
-          <a:xfrm>
-            <a:off x="7184136" y="3364992"/>
-            <a:ext cx="1225296" cy="475488"/>
-          </a:xfrm>
-          <a:prstGeom prst="rect">
-            <a:avLst/>
-          </a:prstGeom>
-          <a:noFill/>
-          <a:ln/>
-        </p:spPr>
-        <p:txBody>
-          <a:bodyPr wrap="square" lIns="0" tIns="0" rIns="0" bIns="0" rtlCol="0" anchor="ctr"/>
-          <a:lstStyle/>
-          <a:p>
-            <a:pPr algn="ctr" indent="0" marL="0">
-              <a:buNone/>
-            </a:pPr>
-            <a:r>
-              <a:rPr lang="en-US" sz="1400" b="1" dirty="0">
-                <a:solidFill>
-                  <a:srgbClr val="0D9488"/>
-                </a:solidFill>
-                <a:latin typeface="Trebuchet MS" pitchFamily="34" charset="0"/>
-                <a:ea typeface="Trebuchet MS" pitchFamily="34" charset="-122"/>
-                <a:cs typeface="Trebuchet MS" pitchFamily="34" charset="-120"/>
-              </a:rPr>
-              <a:t>tive</a:t>
-            </a:r>
-            <a:endParaRPr lang="en-US" sz="1400" dirty="0"/>
-          </a:p>
-        </p:txBody>
-      </p:sp>
-      <p:sp>
-        <p:nvSpPr>
-          <p:cNvPr id="42" name="Shape 40"/>
-          <p:cNvSpPr/>
-          <p:nvPr/>
-        </p:nvSpPr>
-        <p:spPr>
-          <a:xfrm>
-            <a:off x="365760" y="4096512"/>
-            <a:ext cx="1371600" cy="804672"/>
-          </a:xfrm>
-          <a:prstGeom prst="rect">
-            <a:avLst>
-              <a:gd name="adj" fmla="val 6818"/>
-            </a:avLst>
-          </a:prstGeom>
-          <a:solidFill>
-            <a:srgbClr val="E2E8F0"/>
-          </a:solidFill>
-          <a:ln w="12700">
-            <a:solidFill>
-              <a:srgbClr val="E2E8F0"/>
-            </a:solidFill>
-            <a:prstDash val="solid"/>
-          </a:ln>
-        </p:spPr>
-      </p:sp>
-      <p:sp>
-        <p:nvSpPr>
-          <p:cNvPr id="43" name="Text 41"/>
-          <p:cNvSpPr/>
-          <p:nvPr/>
-        </p:nvSpPr>
-        <p:spPr>
-          <a:xfrm>
-            <a:off x="365760" y="4096512"/>
-            <a:ext cx="1371600" cy="804672"/>
-          </a:xfrm>
-          <a:prstGeom prst="rect">
-            <a:avLst/>
-          </a:prstGeom>
-          <a:noFill/>
-          <a:ln/>
-        </p:spPr>
-        <p:txBody>
-          <a:bodyPr wrap="square" lIns="0" tIns="0" rIns="0" bIns="0" rtlCol="0" anchor="ctr"/>
-          <a:lstStyle/>
-          <a:p>
-            <a:pPr algn="ctr" indent="0" marL="0">
-              <a:buNone/>
-            </a:pPr>
-            <a:r>
-              <a:rPr lang="en-US" sz="1100" b="1" dirty="0">
-                <a:solidFill>
-                  <a:srgbClr val="475569"/>
-                </a:solidFill>
-                <a:latin typeface="Trebuchet MS" pitchFamily="34" charset="0"/>
-                <a:ea typeface="Trebuchet MS" pitchFamily="34" charset="-122"/>
-                <a:cs typeface="Trebuchet MS" pitchFamily="34" charset="-120"/>
-              </a:rPr>
-              <a:t>Phonemes</a:t>
-            </a:r>
-            <a:endParaRPr lang="en-US" sz="1100" dirty="0"/>
-          </a:p>
-        </p:txBody>
-      </p:sp>
-      <p:sp>
-        <p:nvSpPr>
-          <p:cNvPr id="44" name="Shape 42"/>
-          <p:cNvSpPr/>
-          <p:nvPr/>
-        </p:nvSpPr>
-        <p:spPr>
-          <a:xfrm>
-            <a:off x="1874520" y="4096512"/>
-            <a:ext cx="6903720" cy="804672"/>
-          </a:xfrm>
-          <a:prstGeom prst="rect">
-            <a:avLst>
-              <a:gd name="adj" fmla="val 6818"/>
-            </a:avLst>
-          </a:prstGeom>
-          <a:solidFill>
-            <a:srgbClr val="FCE7F3"/>
-          </a:solidFill>
-          <a:ln w="12700">
-            <a:solidFill>
-              <a:srgbClr val="DB2777"/>
-            </a:solidFill>
-            <a:prstDash val="solid"/>
-          </a:ln>
-        </p:spPr>
-      </p:sp>
-      <p:sp>
-        <p:nvSpPr>
-          <p:cNvPr id="45" name="Shape 43"/>
-          <p:cNvSpPr/>
-          <p:nvPr/>
-        </p:nvSpPr>
-        <p:spPr>
-          <a:xfrm>
-            <a:off x="1952596" y="4169664"/>
-            <a:ext cx="493776" cy="384048"/>
-          </a:xfrm>
-          <a:prstGeom prst="rect">
-            <a:avLst>
-              <a:gd name="adj" fmla="val 9524"/>
-            </a:avLst>
-          </a:prstGeom>
-          <a:solidFill>
-            <a:srgbClr val="FFFFFF"/>
-          </a:solidFill>
-          <a:ln w="12700">
-            <a:solidFill>
-              <a:srgbClr val="DB2777"/>
-            </a:solidFill>
-            <a:prstDash val="solid"/>
-          </a:ln>
-        </p:spPr>
-      </p:sp>
-      <p:sp>
-        <p:nvSpPr>
-          <p:cNvPr id="46" name="Text 44"/>
-          <p:cNvSpPr/>
-          <p:nvPr/>
-        </p:nvSpPr>
-        <p:spPr>
-          <a:xfrm>
-            <a:off x="1952596" y="4169664"/>
-            <a:ext cx="493776" cy="384048"/>
-          </a:xfrm>
-          <a:prstGeom prst="rect">
-            <a:avLst/>
-          </a:prstGeom>
-          <a:noFill/>
-          <a:ln/>
-        </p:spPr>
-        <p:txBody>
-          <a:bodyPr wrap="square" lIns="0" tIns="0" rIns="0" bIns="0" rtlCol="0" anchor="ctr"/>
-          <a:lstStyle/>
-          <a:p>
-            <a:pPr algn="ctr" indent="0" marL="0">
-              <a:buNone/>
-            </a:pPr>
-            <a:r>
-              <a:rPr lang="en-US" sz="900" b="1" dirty="0">
-                <a:solidFill>
-                  <a:srgbClr val="9D174D"/>
-                </a:solidFill>
-                <a:latin typeface="Trebuchet MS" pitchFamily="34" charset="0"/>
-                <a:ea typeface="Trebuchet MS" pitchFamily="34" charset="-122"/>
-                <a:cs typeface="Trebuchet MS" pitchFamily="34" charset="-120"/>
-              </a:rPr>
-              <a:t>ph</a:t>
-            </a:r>
-            <a:endParaRPr lang="en-US" sz="900" dirty="0"/>
-          </a:p>
-        </p:txBody>
-      </p:sp>
-      <p:sp>
-        <p:nvSpPr>
-          <p:cNvPr id="47" name="Text 45"/>
-          <p:cNvSpPr/>
-          <p:nvPr/>
-        </p:nvSpPr>
-        <p:spPr>
-          <a:xfrm>
-            <a:off x="1952596" y="4572000"/>
-            <a:ext cx="493776" cy="219456"/>
-          </a:xfrm>
-          <a:prstGeom prst="rect">
-            <a:avLst/>
-          </a:prstGeom>
-          <a:noFill/>
-          <a:ln/>
-        </p:spPr>
-        <p:txBody>
-          <a:bodyPr wrap="square" lIns="0" tIns="0" rIns="0" bIns="0" rtlCol="0" anchor="t"/>
-          <a:lstStyle/>
-          <a:p>
-            <a:pPr algn="ctr" indent="0" marL="0">
-              <a:buNone/>
-            </a:pPr>
-            <a:r>
-              <a:rPr lang="en-US" sz="750" i="1" dirty="0">
-                <a:solidFill>
-                  <a:srgbClr val="94A3B8"/>
-                </a:solidFill>
-                <a:latin typeface="Calibri" pitchFamily="34" charset="0"/>
-                <a:ea typeface="Calibri" pitchFamily="34" charset="-122"/>
-                <a:cs typeface="Calibri" pitchFamily="34" charset="-120"/>
-              </a:rPr>
-              <a:t>/f/</a:t>
-            </a:r>
-            <a:endParaRPr lang="en-US" sz="750" dirty="0"/>
-          </a:p>
-        </p:txBody>
-      </p:sp>
-      <p:sp>
-        <p:nvSpPr>
-          <p:cNvPr id="48" name="Shape 46"/>
-          <p:cNvSpPr/>
-          <p:nvPr/>
-        </p:nvSpPr>
-        <p:spPr>
-          <a:xfrm>
-            <a:off x="2497015" y="4169664"/>
-            <a:ext cx="493776" cy="384048"/>
-          </a:xfrm>
-          <a:prstGeom prst="rect">
-            <a:avLst>
-              <a:gd name="adj" fmla="val 9524"/>
-            </a:avLst>
-          </a:prstGeom>
-          <a:solidFill>
-            <a:srgbClr val="FFFFFF"/>
-          </a:solidFill>
-          <a:ln w="12700">
-            <a:solidFill>
-              <a:srgbClr val="DB2777"/>
-            </a:solidFill>
-            <a:prstDash val="solid"/>
-          </a:ln>
-        </p:spPr>
-      </p:sp>
-      <p:sp>
-        <p:nvSpPr>
-          <p:cNvPr id="49" name="Text 47"/>
-          <p:cNvSpPr/>
-          <p:nvPr/>
-        </p:nvSpPr>
-        <p:spPr>
-          <a:xfrm>
-            <a:off x="2497015" y="4169664"/>
-            <a:ext cx="493776" cy="384048"/>
-          </a:xfrm>
-          <a:prstGeom prst="rect">
-            <a:avLst/>
-          </a:prstGeom>
-          <a:noFill/>
-          <a:ln/>
-        </p:spPr>
-        <p:txBody>
-          <a:bodyPr wrap="square" lIns="0" tIns="0" rIns="0" bIns="0" rtlCol="0" anchor="ctr"/>
-          <a:lstStyle/>
-          <a:p>
-            <a:pPr algn="ctr" indent="0" marL="0">
-              <a:buNone/>
-            </a:pPr>
-            <a:r>
-              <a:rPr lang="en-US" sz="900" b="1" dirty="0">
-                <a:solidFill>
-                  <a:srgbClr val="9D174D"/>
-                </a:solidFill>
-                <a:latin typeface="Trebuchet MS" pitchFamily="34" charset="0"/>
-                <a:ea typeface="Trebuchet MS" pitchFamily="34" charset="-122"/>
-                <a:cs typeface="Trebuchet MS" pitchFamily="34" charset="-120"/>
-              </a:rPr>
               <a:t>o</a:t>
-            </a:r>
-            <a:endParaRPr lang="en-US" sz="900" dirty="0"/>
-          </a:p>
-        </p:txBody>
-      </p:sp>
-      <p:sp>
-        <p:nvSpPr>
-          <p:cNvPr id="50" name="Shape 48"/>
-          <p:cNvSpPr/>
-          <p:nvPr/>
-        </p:nvSpPr>
-        <p:spPr>
-          <a:xfrm>
-            <a:off x="3041435" y="4169664"/>
-            <a:ext cx="493776" cy="384048"/>
-          </a:xfrm>
-          <a:prstGeom prst="rect">
-            <a:avLst>
-              <a:gd name="adj" fmla="val 9524"/>
-            </a:avLst>
-          </a:prstGeom>
-          <a:solidFill>
-            <a:srgbClr val="FFFFFF"/>
-          </a:solidFill>
-          <a:ln w="12700">
-            <a:solidFill>
-              <a:srgbClr val="DB2777"/>
-            </a:solidFill>
-            <a:prstDash val="solid"/>
-          </a:ln>
-        </p:spPr>
-      </p:sp>
-      <p:sp>
-        <p:nvSpPr>
-          <p:cNvPr id="51" name="Text 49"/>
-          <p:cNvSpPr/>
-          <p:nvPr/>
-        </p:nvSpPr>
-        <p:spPr>
-          <a:xfrm>
-            <a:off x="3041435" y="4169664"/>
-            <a:ext cx="493776" cy="384048"/>
-          </a:xfrm>
-          <a:prstGeom prst="rect">
-            <a:avLst/>
-          </a:prstGeom>
-          <a:noFill/>
-          <a:ln/>
-        </p:spPr>
-        <p:txBody>
-          <a:bodyPr wrap="square" lIns="0" tIns="0" rIns="0" bIns="0" rtlCol="0" anchor="ctr"/>
-          <a:lstStyle/>
-          <a:p>
-            <a:pPr algn="ctr" indent="0" marL="0">
-              <a:buNone/>
-            </a:pPr>
-            <a:r>
-              <a:rPr lang="en-US" sz="900" b="1" dirty="0">
-                <a:solidFill>
-                  <a:srgbClr val="9D174D"/>
-                </a:solidFill>
-                <a:latin typeface="Trebuchet MS" pitchFamily="34" charset="0"/>
-                <a:ea typeface="Trebuchet MS" pitchFamily="34" charset="-122"/>
-                <a:cs typeface="Trebuchet MS" pitchFamily="34" charset="-120"/>
-              </a:rPr>
-              <a:t>t</a:t>
-            </a:r>
-            <a:endParaRPr lang="en-US" sz="900" dirty="0"/>
-          </a:p>
-        </p:txBody>
-      </p:sp>
-      <p:sp>
-        <p:nvSpPr>
-          <p:cNvPr id="52" name="Shape 50"/>
-          <p:cNvSpPr/>
-          <p:nvPr/>
-        </p:nvSpPr>
-        <p:spPr>
-          <a:xfrm>
-            <a:off x="3585855" y="4169664"/>
-            <a:ext cx="493776" cy="384048"/>
-          </a:xfrm>
-          <a:prstGeom prst="rect">
-            <a:avLst>
-              <a:gd name="adj" fmla="val 9524"/>
-            </a:avLst>
-          </a:prstGeom>
-          <a:solidFill>
-            <a:srgbClr val="FFFFFF"/>
-          </a:solidFill>
-          <a:ln w="12700">
-            <a:solidFill>
-              <a:srgbClr val="DB2777"/>
-            </a:solidFill>
-            <a:prstDash val="solid"/>
-          </a:ln>
-        </p:spPr>
-      </p:sp>
-      <p:sp>
-        <p:nvSpPr>
-          <p:cNvPr id="53" name="Text 51"/>
-          <p:cNvSpPr/>
-          <p:nvPr/>
-        </p:nvSpPr>
-        <p:spPr>
-          <a:xfrm>
-            <a:off x="3585855" y="4169664"/>
-            <a:ext cx="493776" cy="384048"/>
-          </a:xfrm>
-          <a:prstGeom prst="rect">
-            <a:avLst/>
-          </a:prstGeom>
-          <a:noFill/>
-          <a:ln/>
-        </p:spPr>
-        <p:txBody>
-          <a:bodyPr wrap="square" lIns="0" tIns="0" rIns="0" bIns="0" rtlCol="0" anchor="ctr"/>
-          <a:lstStyle/>
-          <a:p>
-            <a:pPr algn="ctr" indent="0" marL="0">
-              <a:buNone/>
-            </a:pPr>
-            <a:r>
-              <a:rPr lang="en-US" sz="900" b="1" dirty="0">
-                <a:solidFill>
-                  <a:srgbClr val="9D174D"/>
-                </a:solidFill>
-                <a:latin typeface="Trebuchet MS" pitchFamily="34" charset="0"/>
-                <a:ea typeface="Trebuchet MS" pitchFamily="34" charset="-122"/>
-                <a:cs typeface="Trebuchet MS" pitchFamily="34" charset="-120"/>
-              </a:rPr>
-              <a:t>o</a:t>
-            </a:r>
-            <a:endParaRPr lang="en-US" sz="900" dirty="0"/>
-          </a:p>
-        </p:txBody>
-      </p:sp>
-      <p:sp>
-        <p:nvSpPr>
-          <p:cNvPr id="54" name="Shape 52"/>
-          <p:cNvSpPr/>
-          <p:nvPr/>
-        </p:nvSpPr>
-        <p:spPr>
-          <a:xfrm>
-            <a:off x="4130274" y="4169664"/>
-            <a:ext cx="493776" cy="384048"/>
-          </a:xfrm>
-          <a:prstGeom prst="rect">
-            <a:avLst>
-              <a:gd name="adj" fmla="val 9524"/>
-            </a:avLst>
-          </a:prstGeom>
-          <a:solidFill>
-            <a:srgbClr val="FFFFFF"/>
-          </a:solidFill>
-          <a:ln w="12700">
-            <a:solidFill>
-              <a:srgbClr val="DB2777"/>
-            </a:solidFill>
-            <a:prstDash val="solid"/>
-          </a:ln>
-        </p:spPr>
-      </p:sp>
-      <p:sp>
-        <p:nvSpPr>
-          <p:cNvPr id="55" name="Text 53"/>
-          <p:cNvSpPr/>
-          <p:nvPr/>
-        </p:nvSpPr>
-        <p:spPr>
-          <a:xfrm>
-            <a:off x="4130274" y="4169664"/>
-            <a:ext cx="493776" cy="384048"/>
-          </a:xfrm>
-          <a:prstGeom prst="rect">
-            <a:avLst/>
-          </a:prstGeom>
-          <a:noFill/>
-          <a:ln/>
-        </p:spPr>
-        <p:txBody>
-          <a:bodyPr wrap="square" lIns="0" tIns="0" rIns="0" bIns="0" rtlCol="0" anchor="ctr"/>
-          <a:lstStyle/>
-          <a:p>
-            <a:pPr algn="ctr" indent="0" marL="0">
-              <a:buNone/>
-            </a:pPr>
-            <a:r>
-              <a:rPr lang="en-US" sz="900" b="1" dirty="0">
-                <a:solidFill>
-                  <a:srgbClr val="9D174D"/>
-                </a:solidFill>
-                <a:latin typeface="Trebuchet MS" pitchFamily="34" charset="0"/>
-                <a:ea typeface="Trebuchet MS" pitchFamily="34" charset="-122"/>
-                <a:cs typeface="Trebuchet MS" pitchFamily="34" charset="-120"/>
-              </a:rPr>
-              <a:t>s</a:t>
-            </a:r>
-            <a:endParaRPr lang="en-US" sz="900" dirty="0"/>
-          </a:p>
-        </p:txBody>
-      </p:sp>
-      <p:sp>
-        <p:nvSpPr>
-          <p:cNvPr id="56" name="Shape 54"/>
-          <p:cNvSpPr/>
-          <p:nvPr/>
-        </p:nvSpPr>
-        <p:spPr>
-          <a:xfrm>
-            <a:off x="4674694" y="4169664"/>
-            <a:ext cx="493776" cy="384048"/>
-          </a:xfrm>
-          <a:prstGeom prst="rect">
-            <a:avLst>
-              <a:gd name="adj" fmla="val 9524"/>
-            </a:avLst>
-          </a:prstGeom>
-          <a:solidFill>
-            <a:srgbClr val="FFFFFF"/>
-          </a:solidFill>
-          <a:ln w="12700">
-            <a:solidFill>
-              <a:srgbClr val="DB2777"/>
-            </a:solidFill>
-            <a:prstDash val="solid"/>
-          </a:ln>
-        </p:spPr>
-      </p:sp>
-      <p:sp>
-        <p:nvSpPr>
-          <p:cNvPr id="57" name="Text 55"/>
-          <p:cNvSpPr/>
-          <p:nvPr/>
-        </p:nvSpPr>
-        <p:spPr>
-          <a:xfrm>
-            <a:off x="4674694" y="4169664"/>
-            <a:ext cx="493776" cy="384048"/>
-          </a:xfrm>
-          <a:prstGeom prst="rect">
-            <a:avLst/>
-          </a:prstGeom>
-          <a:noFill/>
-          <a:ln/>
-        </p:spPr>
-        <p:txBody>
-          <a:bodyPr wrap="square" lIns="0" tIns="0" rIns="0" bIns="0" rtlCol="0" anchor="ctr"/>
-          <a:lstStyle/>
-          <a:p>
-            <a:pPr algn="ctr" indent="0" marL="0">
-              <a:buNone/>
-            </a:pPr>
-            <a:r>
-              <a:rPr lang="en-US" sz="900" b="1" dirty="0">
-                <a:solidFill>
-                  <a:srgbClr val="9D174D"/>
-                </a:solidFill>
-                <a:latin typeface="Trebuchet MS" pitchFamily="34" charset="0"/>
-                <a:ea typeface="Trebuchet MS" pitchFamily="34" charset="-122"/>
-                <a:cs typeface="Trebuchet MS" pitchFamily="34" charset="-120"/>
-              </a:rPr>
-              <a:t>e</a:t>
-            </a:r>
-            <a:endParaRPr lang="en-US" sz="900" dirty="0"/>
-          </a:p>
-        </p:txBody>
-      </p:sp>
-      <p:sp>
-        <p:nvSpPr>
-          <p:cNvPr id="58" name="Shape 56"/>
-          <p:cNvSpPr/>
-          <p:nvPr/>
-        </p:nvSpPr>
-        <p:spPr>
-          <a:xfrm>
-            <a:off x="5219114" y="4169664"/>
-            <a:ext cx="493776" cy="384048"/>
-          </a:xfrm>
-          <a:prstGeom prst="rect">
-            <a:avLst>
-              <a:gd name="adj" fmla="val 9524"/>
-            </a:avLst>
-          </a:prstGeom>
-          <a:solidFill>
-            <a:srgbClr val="FFFFFF"/>
-          </a:solidFill>
-          <a:ln w="12700">
-            <a:solidFill>
-              <a:srgbClr val="DB2777"/>
-            </a:solidFill>
-            <a:prstDash val="solid"/>
-          </a:ln>
-        </p:spPr>
-      </p:sp>
-      <p:sp>
-        <p:nvSpPr>
-          <p:cNvPr id="59" name="Text 57"/>
-          <p:cNvSpPr/>
-          <p:nvPr/>
-        </p:nvSpPr>
-        <p:spPr>
-          <a:xfrm>
-            <a:off x="5219114" y="4169664"/>
-            <a:ext cx="493776" cy="384048"/>
-          </a:xfrm>
-          <a:prstGeom prst="rect">
-            <a:avLst/>
-          </a:prstGeom>
-          <a:noFill/>
-          <a:ln/>
-        </p:spPr>
-        <p:txBody>
-          <a:bodyPr wrap="square" lIns="0" tIns="0" rIns="0" bIns="0" rtlCol="0" anchor="ctr"/>
-          <a:lstStyle/>
-          <a:p>
-            <a:pPr algn="ctr" indent="0" marL="0">
-              <a:buNone/>
-            </a:pPr>
-            <a:r>
-              <a:rPr lang="en-US" sz="900" b="1" dirty="0">
-                <a:solidFill>
-                  <a:srgbClr val="9D174D"/>
-                </a:solidFill>
-                <a:latin typeface="Trebuchet MS" pitchFamily="34" charset="0"/>
-                <a:ea typeface="Trebuchet MS" pitchFamily="34" charset="-122"/>
-                <a:cs typeface="Trebuchet MS" pitchFamily="34" charset="-120"/>
-              </a:rPr>
-              <a:t>n</a:t>
-            </a:r>
-            <a:endParaRPr lang="en-US" sz="900" dirty="0"/>
-          </a:p>
-        </p:txBody>
-      </p:sp>
-      <p:sp>
-        <p:nvSpPr>
-          <p:cNvPr id="60" name="Shape 58"/>
-          <p:cNvSpPr/>
-          <p:nvPr/>
-        </p:nvSpPr>
-        <p:spPr>
-          <a:xfrm>
-            <a:off x="5763534" y="4169664"/>
-            <a:ext cx="493776" cy="384048"/>
-          </a:xfrm>
-          <a:prstGeom prst="rect">
-            <a:avLst>
-              <a:gd name="adj" fmla="val 9524"/>
-            </a:avLst>
-          </a:prstGeom>
-          <a:solidFill>
-            <a:srgbClr val="FFFFFF"/>
-          </a:solidFill>
-          <a:ln w="12700">
-            <a:solidFill>
-              <a:srgbClr val="DB2777"/>
-            </a:solidFill>
-            <a:prstDash val="solid"/>
-          </a:ln>
-        </p:spPr>
-      </p:sp>
-      <p:sp>
-        <p:nvSpPr>
-          <p:cNvPr id="61" name="Text 59"/>
-          <p:cNvSpPr/>
-          <p:nvPr/>
-        </p:nvSpPr>
-        <p:spPr>
-          <a:xfrm>
-            <a:off x="5763534" y="4169664"/>
-            <a:ext cx="493776" cy="384048"/>
-          </a:xfrm>
-          <a:prstGeom prst="rect">
-            <a:avLst/>
-          </a:prstGeom>
-          <a:noFill/>
-          <a:ln/>
-        </p:spPr>
-        <p:txBody>
-          <a:bodyPr wrap="square" lIns="0" tIns="0" rIns="0" bIns="0" rtlCol="0" anchor="ctr"/>
-          <a:lstStyle/>
-          <a:p>
-            <a:pPr algn="ctr" indent="0" marL="0">
-              <a:buNone/>
-            </a:pPr>
-            <a:r>
-              <a:rPr lang="en-US" sz="900" b="1" dirty="0">
-                <a:solidFill>
-                  <a:srgbClr val="9D174D"/>
-                </a:solidFill>
-                <a:latin typeface="Trebuchet MS" pitchFamily="34" charset="0"/>
-                <a:ea typeface="Trebuchet MS" pitchFamily="34" charset="-122"/>
-                <a:cs typeface="Trebuchet MS" pitchFamily="34" charset="-120"/>
-              </a:rPr>
-              <a:t>s</a:t>
-            </a:r>
-            <a:endParaRPr lang="en-US" sz="900" dirty="0"/>
-          </a:p>
-        </p:txBody>
-      </p:sp>
-      <p:sp>
-        <p:nvSpPr>
-          <p:cNvPr id="62" name="Shape 60"/>
-          <p:cNvSpPr/>
-          <p:nvPr/>
-        </p:nvSpPr>
-        <p:spPr>
-          <a:xfrm>
-            <a:off x="6307953" y="4169664"/>
-            <a:ext cx="493776" cy="384048"/>
-          </a:xfrm>
-          <a:prstGeom prst="rect">
-            <a:avLst>
-              <a:gd name="adj" fmla="val 9524"/>
-            </a:avLst>
-          </a:prstGeom>
-          <a:solidFill>
-            <a:srgbClr val="FFFFFF"/>
-          </a:solidFill>
-          <a:ln w="12700">
-            <a:solidFill>
-              <a:srgbClr val="DB2777"/>
-            </a:solidFill>
-            <a:prstDash val="solid"/>
-          </a:ln>
-        </p:spPr>
-      </p:sp>
-      <p:sp>
-        <p:nvSpPr>
-          <p:cNvPr id="63" name="Text 61"/>
-          <p:cNvSpPr/>
-          <p:nvPr/>
-        </p:nvSpPr>
-        <p:spPr>
-          <a:xfrm>
-            <a:off x="6307953" y="4169664"/>
-            <a:ext cx="493776" cy="384048"/>
-          </a:xfrm>
-          <a:prstGeom prst="rect">
-            <a:avLst/>
-          </a:prstGeom>
-          <a:noFill/>
-          <a:ln/>
-        </p:spPr>
-        <p:txBody>
-          <a:bodyPr wrap="square" lIns="0" tIns="0" rIns="0" bIns="0" rtlCol="0" anchor="ctr"/>
-          <a:lstStyle/>
-          <a:p>
-            <a:pPr algn="ctr" indent="0" marL="0">
-              <a:buNone/>
-            </a:pPr>
-            <a:r>
-              <a:rPr lang="en-US" sz="900" b="1" dirty="0">
-                <a:solidFill>
-                  <a:srgbClr val="9D174D"/>
-                </a:solidFill>
-                <a:latin typeface="Trebuchet MS" pitchFamily="34" charset="0"/>
-                <a:ea typeface="Trebuchet MS" pitchFamily="34" charset="-122"/>
-                <a:cs typeface="Trebuchet MS" pitchFamily="34" charset="-120"/>
-              </a:rPr>
-              <a:t>i</a:t>
-            </a:r>
-            <a:endParaRPr lang="en-US" sz="900" dirty="0"/>
-          </a:p>
-        </p:txBody>
-      </p:sp>
-      <p:sp>
-        <p:nvSpPr>
-          <p:cNvPr id="64" name="Shape 62"/>
-          <p:cNvSpPr/>
-          <p:nvPr/>
-        </p:nvSpPr>
-        <p:spPr>
-          <a:xfrm>
-            <a:off x="6852373" y="4169664"/>
-            <a:ext cx="493776" cy="384048"/>
-          </a:xfrm>
-          <a:prstGeom prst="rect">
-            <a:avLst>
-              <a:gd name="adj" fmla="val 9524"/>
-            </a:avLst>
-          </a:prstGeom>
-          <a:solidFill>
-            <a:srgbClr val="FFFFFF"/>
-          </a:solidFill>
-          <a:ln w="12700">
-            <a:solidFill>
-              <a:srgbClr val="DB2777"/>
-            </a:solidFill>
-            <a:prstDash val="solid"/>
-          </a:ln>
-        </p:spPr>
-      </p:sp>
-      <p:sp>
-        <p:nvSpPr>
-          <p:cNvPr id="65" name="Text 63"/>
-          <p:cNvSpPr/>
-          <p:nvPr/>
-        </p:nvSpPr>
-        <p:spPr>
-          <a:xfrm>
-            <a:off x="6852373" y="4169664"/>
-            <a:ext cx="493776" cy="384048"/>
-          </a:xfrm>
-          <a:prstGeom prst="rect">
-            <a:avLst/>
-          </a:prstGeom>
-          <a:noFill/>
-          <a:ln/>
-        </p:spPr>
-        <p:txBody>
-          <a:bodyPr wrap="square" lIns="0" tIns="0" rIns="0" bIns="0" rtlCol="0" anchor="ctr"/>
-          <a:lstStyle/>
-          <a:p>
-            <a:pPr algn="ctr" indent="0" marL="0">
-              <a:buNone/>
-            </a:pPr>
-            <a:r>
-              <a:rPr lang="en-US" sz="900" b="1" dirty="0">
-                <a:solidFill>
-                  <a:srgbClr val="9D174D"/>
-                </a:solidFill>
-                <a:latin typeface="Trebuchet MS" pitchFamily="34" charset="0"/>
-                <a:ea typeface="Trebuchet MS" pitchFamily="34" charset="-122"/>
-                <a:cs typeface="Trebuchet MS" pitchFamily="34" charset="-120"/>
-              </a:rPr>
-              <a:t>t</a:t>
-            </a:r>
-            <a:endParaRPr lang="en-US" sz="900" dirty="0"/>
-          </a:p>
-        </p:txBody>
-      </p:sp>
-      <p:sp>
-        <p:nvSpPr>
-          <p:cNvPr id="66" name="Shape 64"/>
-          <p:cNvSpPr/>
-          <p:nvPr/>
-        </p:nvSpPr>
-        <p:spPr>
-          <a:xfrm>
-            <a:off x="7396793" y="4169664"/>
-            <a:ext cx="493776" cy="384048"/>
-          </a:xfrm>
-          <a:prstGeom prst="rect">
-            <a:avLst>
-              <a:gd name="adj" fmla="val 9524"/>
-            </a:avLst>
-          </a:prstGeom>
-          <a:solidFill>
-            <a:srgbClr val="FFFFFF"/>
-          </a:solidFill>
-          <a:ln w="12700">
-            <a:solidFill>
-              <a:srgbClr val="DB2777"/>
-            </a:solidFill>
-            <a:prstDash val="solid"/>
-          </a:ln>
-        </p:spPr>
-      </p:sp>
-      <p:sp>
-        <p:nvSpPr>
-          <p:cNvPr id="67" name="Text 65"/>
-          <p:cNvSpPr/>
-          <p:nvPr/>
-        </p:nvSpPr>
-        <p:spPr>
-          <a:xfrm>
-            <a:off x="7396793" y="4169664"/>
-            <a:ext cx="493776" cy="384048"/>
-          </a:xfrm>
-          <a:prstGeom prst="rect">
-            <a:avLst/>
-          </a:prstGeom>
-          <a:noFill/>
-          <a:ln/>
-        </p:spPr>
-        <p:txBody>
-          <a:bodyPr wrap="square" lIns="0" tIns="0" rIns="0" bIns="0" rtlCol="0" anchor="ctr"/>
-          <a:lstStyle/>
-          <a:p>
-            <a:pPr algn="ctr" indent="0" marL="0">
-              <a:buNone/>
-            </a:pPr>
-            <a:r>
-              <a:rPr lang="en-US" sz="900" b="1" dirty="0">
-                <a:solidFill>
-                  <a:srgbClr val="9D174D"/>
-                </a:solidFill>
-                <a:latin typeface="Trebuchet MS" pitchFamily="34" charset="0"/>
-                <a:ea typeface="Trebuchet MS" pitchFamily="34" charset="-122"/>
-                <a:cs typeface="Trebuchet MS" pitchFamily="34" charset="-120"/>
-              </a:rPr>
-              <a:t>i</a:t>
-            </a:r>
-            <a:endParaRPr lang="en-US" sz="900" dirty="0"/>
-          </a:p>
-        </p:txBody>
-      </p:sp>
-      <p:sp>
-        <p:nvSpPr>
-          <p:cNvPr id="68" name="Shape 66"/>
-          <p:cNvSpPr/>
-          <p:nvPr/>
-        </p:nvSpPr>
-        <p:spPr>
-          <a:xfrm>
-            <a:off x="7941212" y="4169664"/>
-            <a:ext cx="493776" cy="384048"/>
-          </a:xfrm>
-          <a:prstGeom prst="rect">
-            <a:avLst>
-              <a:gd name="adj" fmla="val 9524"/>
-            </a:avLst>
-          </a:prstGeom>
-          <a:solidFill>
-            <a:srgbClr val="FFFFFF"/>
-          </a:solidFill>
-          <a:ln w="12700">
-            <a:solidFill>
-              <a:srgbClr val="DB2777"/>
-            </a:solidFill>
-            <a:prstDash val="solid"/>
-          </a:ln>
-        </p:spPr>
-      </p:sp>
-      <p:sp>
-        <p:nvSpPr>
-          <p:cNvPr id="69" name="Text 67"/>
-          <p:cNvSpPr/>
-          <p:nvPr/>
-        </p:nvSpPr>
-        <p:spPr>
-          <a:xfrm>
-            <a:off x="7941212" y="4169664"/>
-            <a:ext cx="493776" cy="384048"/>
-          </a:xfrm>
-          <a:prstGeom prst="rect">
-            <a:avLst/>
-          </a:prstGeom>
-          <a:noFill/>
-          <a:ln/>
-        </p:spPr>
-        <p:txBody>
-          <a:bodyPr wrap="square" lIns="0" tIns="0" rIns="0" bIns="0" rtlCol="0" anchor="ctr"/>
-          <a:lstStyle/>
-          <a:p>
-            <a:pPr algn="ctr" indent="0" marL="0">
-              <a:buNone/>
-            </a:pPr>
-            <a:r>
-              <a:rPr lang="en-US" sz="900" b="1" dirty="0">
-                <a:solidFill>
-                  <a:srgbClr val="9D174D"/>
-                </a:solidFill>
-                <a:latin typeface="Trebuchet MS" pitchFamily="34" charset="0"/>
-                <a:ea typeface="Trebuchet MS" pitchFamily="34" charset="-122"/>
-                <a:cs typeface="Trebuchet MS" pitchFamily="34" charset="-120"/>
-              </a:rPr>
-              <a:t>ve</a:t>
             </a:r>
             <a:endParaRPr lang="en-US" sz="900" dirty="0"/>
           </a:p>
@@ -31784,7 +30943,7 @@
                 <a:ea typeface="Trebuchet MS" pitchFamily="34" charset="-122"/>
                 <a:cs typeface="Trebuchet MS" pitchFamily="34" charset="-120"/>
               </a:rPr>
-              <a:t>photographer</a:t>
+              <a:t>photogenic</a:t>
             </a:r>
             <a:endParaRPr lang="en-US" sz="2800" dirty="0"/>
           </a:p>
@@ -32611,7 +31770,7 @@
                 <a:ea typeface="Trebuchet MS" pitchFamily="34" charset="-122"/>
                 <a:cs typeface="Trebuchet MS" pitchFamily="34" charset="-120"/>
               </a:rPr>
-              <a:t>photographer</a:t>
+              <a:t>photogenic</a:t>
             </a:r>
             <a:endParaRPr lang="en-US" sz="2800" dirty="0"/>
           </a:p>
@@ -32862,7 +32021,7 @@
                 <a:ea typeface="Trebuchet MS" pitchFamily="34" charset="-122"/>
                 <a:cs typeface="Trebuchet MS" pitchFamily="34" charset="-120"/>
               </a:rPr>
-              <a:t>graph</a:t>
+              <a:t>gen</a:t>
             </a:r>
             <a:endParaRPr lang="en-US" sz="1300" dirty="0"/>
           </a:p>
@@ -32901,7 +32060,7 @@
                 <a:ea typeface="Calibri" pitchFamily="34" charset="-122"/>
                 <a:cs typeface="Calibri" pitchFamily="34" charset="-120"/>
               </a:rPr>
-              <a:t>write or record</a:t>
+              <a:t>produce or create</a:t>
             </a:r>
             <a:endParaRPr lang="en-US" sz="850" dirty="0"/>
           </a:p>
@@ -32974,7 +32133,7 @@
                 <a:ea typeface="Trebuchet MS" pitchFamily="34" charset="-122"/>
                 <a:cs typeface="Trebuchet MS" pitchFamily="34" charset="-120"/>
               </a:rPr>
-              <a:t>er</a:t>
+              <a:t>ic</a:t>
             </a:r>
             <a:endParaRPr lang="en-US" sz="1300" dirty="0"/>
           </a:p>
@@ -33013,7 +32172,7 @@
                 <a:ea typeface="Calibri" pitchFamily="34" charset="-122"/>
                 <a:cs typeface="Calibri" pitchFamily="34" charset="-120"/>
               </a:rPr>
-              <a:t>a person who does something</a:t>
+              <a:t>relating to</a:t>
             </a:r>
             <a:endParaRPr lang="en-US" sz="850" dirty="0"/>
           </a:p>
@@ -33708,7 +32867,7 @@
                 <a:ea typeface="Trebuchet MS" pitchFamily="34" charset="-122"/>
                 <a:cs typeface="Trebuchet MS" pitchFamily="34" charset="-120"/>
               </a:rPr>
-              <a:t>photographer</a:t>
+              <a:t>photogenic</a:t>
             </a:r>
             <a:endParaRPr lang="en-US" sz="2800" dirty="0"/>
           </a:p>
@@ -33959,7 +33118,7 @@
                 <a:ea typeface="Trebuchet MS" pitchFamily="34" charset="-122"/>
                 <a:cs typeface="Trebuchet MS" pitchFamily="34" charset="-120"/>
               </a:rPr>
-              <a:t>graph</a:t>
+              <a:t>gen</a:t>
             </a:r>
             <a:endParaRPr lang="en-US" sz="1300" dirty="0"/>
           </a:p>
@@ -33998,7 +33157,7 @@
                 <a:ea typeface="Calibri" pitchFamily="34" charset="-122"/>
                 <a:cs typeface="Calibri" pitchFamily="34" charset="-120"/>
               </a:rPr>
-              <a:t>write or record</a:t>
+              <a:t>produce or create</a:t>
             </a:r>
             <a:endParaRPr lang="en-US" sz="850" dirty="0"/>
           </a:p>
@@ -34071,7 +33230,7 @@
                 <a:ea typeface="Trebuchet MS" pitchFamily="34" charset="-122"/>
                 <a:cs typeface="Trebuchet MS" pitchFamily="34" charset="-120"/>
               </a:rPr>
-              <a:t>er</a:t>
+              <a:t>ic</a:t>
             </a:r>
             <a:endParaRPr lang="en-US" sz="1300" dirty="0"/>
           </a:p>
@@ -34110,7 +33269,7 @@
                 <a:ea typeface="Calibri" pitchFamily="34" charset="-122"/>
                 <a:cs typeface="Calibri" pitchFamily="34" charset="-120"/>
               </a:rPr>
-              <a:t>a person who does something</a:t>
+              <a:t>relating to</a:t>
             </a:r>
             <a:endParaRPr lang="en-US" sz="850" dirty="0"/>
           </a:p>
@@ -34374,7 +33533,7 @@
                 <a:ea typeface="Trebuchet MS" pitchFamily="34" charset="-122"/>
                 <a:cs typeface="Trebuchet MS" pitchFamily="34" charset="-120"/>
               </a:rPr>
-              <a:t>tog</a:t>
+              <a:t>to</a:t>
             </a:r>
             <a:endParaRPr lang="en-US" sz="1400" dirty="0"/>
           </a:p>
@@ -34479,7 +33638,7 @@
                 <a:ea typeface="Trebuchet MS" pitchFamily="34" charset="-122"/>
                 <a:cs typeface="Trebuchet MS" pitchFamily="34" charset="-120"/>
               </a:rPr>
-              <a:t>ra</a:t>
+              <a:t>gen</a:t>
             </a:r>
             <a:endParaRPr lang="en-US" sz="1400" dirty="0"/>
           </a:p>
@@ -34584,7 +33743,7 @@
                 <a:ea typeface="Trebuchet MS" pitchFamily="34" charset="-122"/>
                 <a:cs typeface="Trebuchet MS" pitchFamily="34" charset="-120"/>
               </a:rPr>
-              <a:t>pher</a:t>
+              <a:t>ic</a:t>
             </a:r>
             <a:endParaRPr lang="en-US" sz="1400" dirty="0"/>
           </a:p>
@@ -35147,7 +34306,7 @@
                 <a:ea typeface="Trebuchet MS" pitchFamily="34" charset="-122"/>
                 <a:cs typeface="Trebuchet MS" pitchFamily="34" charset="-120"/>
               </a:rPr>
-              <a:t>photographer</a:t>
+              <a:t>photogenic</a:t>
             </a:r>
             <a:endParaRPr lang="en-US" sz="2800" dirty="0"/>
           </a:p>
@@ -35398,7 +34557,7 @@
                 <a:ea typeface="Trebuchet MS" pitchFamily="34" charset="-122"/>
                 <a:cs typeface="Trebuchet MS" pitchFamily="34" charset="-120"/>
               </a:rPr>
-              <a:t>graph</a:t>
+              <a:t>gen</a:t>
             </a:r>
             <a:endParaRPr lang="en-US" sz="1300" dirty="0"/>
           </a:p>
@@ -35437,7 +34596,7 @@
                 <a:ea typeface="Calibri" pitchFamily="34" charset="-122"/>
                 <a:cs typeface="Calibri" pitchFamily="34" charset="-120"/>
               </a:rPr>
-              <a:t>write or record</a:t>
+              <a:t>produce or create</a:t>
             </a:r>
             <a:endParaRPr lang="en-US" sz="850" dirty="0"/>
           </a:p>
@@ -35510,7 +34669,7 @@
                 <a:ea typeface="Trebuchet MS" pitchFamily="34" charset="-122"/>
                 <a:cs typeface="Trebuchet MS" pitchFamily="34" charset="-120"/>
               </a:rPr>
-              <a:t>er</a:t>
+              <a:t>ic</a:t>
             </a:r>
             <a:endParaRPr lang="en-US" sz="1300" dirty="0"/>
           </a:p>
@@ -35549,7 +34708,7 @@
                 <a:ea typeface="Calibri" pitchFamily="34" charset="-122"/>
                 <a:cs typeface="Calibri" pitchFamily="34" charset="-120"/>
               </a:rPr>
-              <a:t>a person who does something</a:t>
+              <a:t>relating to</a:t>
             </a:r>
             <a:endParaRPr lang="en-US" sz="850" dirty="0"/>
           </a:p>
@@ -35813,7 +34972,7 @@
                 <a:ea typeface="Trebuchet MS" pitchFamily="34" charset="-122"/>
                 <a:cs typeface="Trebuchet MS" pitchFamily="34" charset="-120"/>
               </a:rPr>
-              <a:t>tog</a:t>
+              <a:t>to</a:t>
             </a:r>
             <a:endParaRPr lang="en-US" sz="1400" dirty="0"/>
           </a:p>
@@ -35918,7 +35077,7 @@
                 <a:ea typeface="Trebuchet MS" pitchFamily="34" charset="-122"/>
                 <a:cs typeface="Trebuchet MS" pitchFamily="34" charset="-120"/>
               </a:rPr>
-              <a:t>ra</a:t>
+              <a:t>gen</a:t>
             </a:r>
             <a:endParaRPr lang="en-US" sz="1400" dirty="0"/>
           </a:p>
@@ -36023,7 +35182,7 @@
                 <a:ea typeface="Trebuchet MS" pitchFamily="34" charset="-122"/>
                 <a:cs typeface="Trebuchet MS" pitchFamily="34" charset="-120"/>
               </a:rPr>
-              <a:t>pher</a:t>
+              <a:t>ic</a:t>
             </a:r>
             <a:endParaRPr lang="en-US" sz="1400" dirty="0"/>
           </a:p>
@@ -36551,7 +35710,7 @@
                 <a:ea typeface="Trebuchet MS" pitchFamily="34" charset="-122"/>
                 <a:cs typeface="Trebuchet MS" pitchFamily="34" charset="-120"/>
               </a:rPr>
-              <a:t>r</a:t>
+              <a:t>e</a:t>
             </a:r>
             <a:endParaRPr lang="en-US" sz="900" dirty="0"/>
           </a:p>
@@ -36617,7 +35776,7 @@
                 <a:ea typeface="Trebuchet MS" pitchFamily="34" charset="-122"/>
                 <a:cs typeface="Trebuchet MS" pitchFamily="34" charset="-120"/>
               </a:rPr>
-              <a:t>a</a:t>
+              <a:t>n</a:t>
             </a:r>
             <a:endParaRPr lang="en-US" sz="900" dirty="0"/>
           </a:p>
@@ -36683,7 +35842,7 @@
                 <a:ea typeface="Trebuchet MS" pitchFamily="34" charset="-122"/>
                 <a:cs typeface="Trebuchet MS" pitchFamily="34" charset="-120"/>
               </a:rPr>
-              <a:t>ph</a:t>
+              <a:t>i</a:t>
             </a:r>
             <a:endParaRPr lang="en-US" sz="900" dirty="0"/>
           </a:p>
@@ -36691,13 +35850,79 @@
       </p:sp>
       <p:sp>
         <p:nvSpPr>
-          <p:cNvPr id="59" name="Text 57"/>
-          <p:cNvSpPr/>
-          <p:nvPr/>
-        </p:nvSpPr>
-        <p:spPr>
-          <a:xfrm>
-            <a:off x="7033565" y="4572000"/>
+          <p:cNvPr id="59" name="Shape 57"/>
+          <p:cNvSpPr/>
+          <p:nvPr/>
+        </p:nvSpPr>
+        <p:spPr>
+          <a:xfrm>
+            <a:off x="7759598" y="4169664"/>
+            <a:ext cx="676656" cy="384048"/>
+          </a:xfrm>
+          <a:prstGeom prst="rect">
+            <a:avLst>
+              <a:gd name="adj" fmla="val 9524"/>
+            </a:avLst>
+          </a:prstGeom>
+          <a:solidFill>
+            <a:srgbClr val="FFFFFF"/>
+          </a:solidFill>
+          <a:ln w="12700">
+            <a:solidFill>
+              <a:srgbClr val="DB2777"/>
+            </a:solidFill>
+            <a:prstDash val="solid"/>
+          </a:ln>
+        </p:spPr>
+      </p:sp>
+      <p:sp>
+        <p:nvSpPr>
+          <p:cNvPr id="60" name="Text 58"/>
+          <p:cNvSpPr/>
+          <p:nvPr/>
+        </p:nvSpPr>
+        <p:spPr>
+          <a:xfrm>
+            <a:off x="7759598" y="4169664"/>
+            <a:ext cx="676656" cy="384048"/>
+          </a:xfrm>
+          <a:prstGeom prst="rect">
+            <a:avLst/>
+          </a:prstGeom>
+          <a:noFill/>
+          <a:ln/>
+        </p:spPr>
+        <p:txBody>
+          <a:bodyPr wrap="square" lIns="0" tIns="0" rIns="0" bIns="0" rtlCol="0" anchor="ctr"/>
+          <a:lstStyle/>
+          <a:p>
+            <a:pPr algn="ctr" indent="0" marL="0">
+              <a:buNone/>
+            </a:pPr>
+            <a:r>
+              <a:rPr lang="en-US" sz="900" b="1" dirty="0">
+                <a:solidFill>
+                  <a:srgbClr val="9D174D"/>
+                </a:solidFill>
+                <a:latin typeface="Trebuchet MS" pitchFamily="34" charset="0"/>
+                <a:ea typeface="Trebuchet MS" pitchFamily="34" charset="-122"/>
+                <a:cs typeface="Trebuchet MS" pitchFamily="34" charset="-120"/>
+              </a:rPr>
+              <a:t>c</a:t>
+            </a:r>
+            <a:endParaRPr lang="en-US" sz="900" dirty="0"/>
+          </a:p>
+        </p:txBody>
+      </p:sp>
+      <p:sp>
+        <p:nvSpPr>
+          <p:cNvPr id="61" name="Text 59"/>
+          <p:cNvSpPr/>
+          <p:nvPr/>
+        </p:nvSpPr>
+        <p:spPr>
+          <a:xfrm>
+            <a:off x="7759598" y="4572000"/>
             <a:ext cx="676656" cy="219456"/>
           </a:xfrm>
           <a:prstGeom prst="rect">
@@ -36722,75 +35947,9 @@
                 <a:ea typeface="Calibri" pitchFamily="34" charset="-122"/>
                 <a:cs typeface="Calibri" pitchFamily="34" charset="-120"/>
               </a:rPr>
-              <a:t>/f/</a:t>
+              <a:t>/k/</a:t>
             </a:r>
             <a:endParaRPr lang="en-US" sz="750" dirty="0"/>
-          </a:p>
-        </p:txBody>
-      </p:sp>
-      <p:sp>
-        <p:nvSpPr>
-          <p:cNvPr id="60" name="Shape 58"/>
-          <p:cNvSpPr/>
-          <p:nvPr/>
-        </p:nvSpPr>
-        <p:spPr>
-          <a:xfrm>
-            <a:off x="7759598" y="4169664"/>
-            <a:ext cx="676656" cy="384048"/>
-          </a:xfrm>
-          <a:prstGeom prst="rect">
-            <a:avLst>
-              <a:gd name="adj" fmla="val 9524"/>
-            </a:avLst>
-          </a:prstGeom>
-          <a:solidFill>
-            <a:srgbClr val="FFFFFF"/>
-          </a:solidFill>
-          <a:ln w="12700">
-            <a:solidFill>
-              <a:srgbClr val="DB2777"/>
-            </a:solidFill>
-            <a:prstDash val="solid"/>
-          </a:ln>
-        </p:spPr>
-      </p:sp>
-      <p:sp>
-        <p:nvSpPr>
-          <p:cNvPr id="61" name="Text 59"/>
-          <p:cNvSpPr/>
-          <p:nvPr/>
-        </p:nvSpPr>
-        <p:spPr>
-          <a:xfrm>
-            <a:off x="7759598" y="4169664"/>
-            <a:ext cx="676656" cy="384048"/>
-          </a:xfrm>
-          <a:prstGeom prst="rect">
-            <a:avLst/>
-          </a:prstGeom>
-          <a:noFill/>
-          <a:ln/>
-        </p:spPr>
-        <p:txBody>
-          <a:bodyPr wrap="square" lIns="0" tIns="0" rIns="0" bIns="0" rtlCol="0" anchor="ctr"/>
-          <a:lstStyle/>
-          <a:p>
-            <a:pPr algn="ctr" indent="0" marL="0">
-              <a:buNone/>
-            </a:pPr>
-            <a:r>
-              <a:rPr lang="en-US" sz="900" b="1" dirty="0">
-                <a:solidFill>
-                  <a:srgbClr val="9D174D"/>
-                </a:solidFill>
-                <a:latin typeface="Trebuchet MS" pitchFamily="34" charset="0"/>
-                <a:ea typeface="Trebuchet MS" pitchFamily="34" charset="-122"/>
-                <a:cs typeface="Trebuchet MS" pitchFamily="34" charset="-120"/>
-              </a:rPr>
-              <a:t>er</a:t>
-            </a:r>
-            <a:endParaRPr lang="en-US" sz="900" dirty="0"/>
           </a:p>
         </p:txBody>
       </p:sp>
@@ -38742,7 +37901,7 @@
                 <a:ea typeface="Trebuchet MS" pitchFamily="34" charset="-122"/>
                 <a:cs typeface="Trebuchet MS" pitchFamily="34" charset="-120"/>
               </a:rPr>
-              <a:t>micro-</a:t>
+              <a:t>stereo-</a:t>
             </a:r>
             <a:endParaRPr lang="en-US" sz="1300" dirty="0"/>
           </a:p>
@@ -38895,7 +38054,7 @@
                 <a:ea typeface="Trebuchet MS" pitchFamily="34" charset="-122"/>
                 <a:cs typeface="Trebuchet MS" pitchFamily="34" charset="-120"/>
               </a:rPr>
-              <a:t>mono-</a:t>
+              <a:t>micro-</a:t>
             </a:r>
             <a:endParaRPr lang="en-US" sz="1300" dirty="0"/>
           </a:p>
@@ -39048,7 +38207,7 @@
                 <a:ea typeface="Trebuchet MS" pitchFamily="34" charset="-122"/>
                 <a:cs typeface="Trebuchet MS" pitchFamily="34" charset="-120"/>
               </a:rPr>
-              <a:t>stereo-</a:t>
+              <a:t>auto-</a:t>
             </a:r>
             <a:endParaRPr lang="en-US" sz="1300" dirty="0"/>
           </a:p>
@@ -39201,7 +38360,7 @@
                 <a:ea typeface="Trebuchet MS" pitchFamily="34" charset="-122"/>
                 <a:cs typeface="Trebuchet MS" pitchFamily="34" charset="-120"/>
               </a:rPr>
-              <a:t>thermo-</a:t>
+              <a:t>re-</a:t>
             </a:r>
             <a:endParaRPr lang="en-US" sz="1300" dirty="0"/>
           </a:p>
@@ -39290,7 +38449,7 @@
                 <a:ea typeface="Trebuchet MS" pitchFamily="34" charset="-122"/>
                 <a:cs typeface="Trebuchet MS" pitchFamily="34" charset="-120"/>
               </a:rPr>
-              <a:t>-phobia</a:t>
+              <a:t>-electric</a:t>
             </a:r>
             <a:endParaRPr lang="en-US" sz="1300" dirty="0"/>
           </a:p>
@@ -39659,7 +38818,7 @@
                 <a:ea typeface="Trebuchet MS" pitchFamily="34" charset="-122"/>
                 <a:cs typeface="Trebuchet MS" pitchFamily="34" charset="-120"/>
               </a:rPr>
-              <a:t>photon</a:t>
+              <a:t>photographer</a:t>
             </a:r>
             <a:endParaRPr lang="en-US" sz="1200" dirty="0"/>
           </a:p>
@@ -39857,7 +39016,7 @@
                 <a:ea typeface="Trebuchet MS" pitchFamily="34" charset="-122"/>
                 <a:cs typeface="Trebuchet MS" pitchFamily="34" charset="-120"/>
               </a:rPr>
-              <a:t>photosensitive</a:t>
+              <a:t>photoelectric</a:t>
             </a:r>
             <a:endParaRPr lang="en-US" sz="1200" dirty="0"/>
           </a:p>
@@ -41045,7 +40204,7 @@
                 <a:ea typeface="Calibri" pitchFamily="34" charset="-122"/>
                 <a:cs typeface="Calibri" pitchFamily="34" charset="-120"/>
               </a:rPr>
-              <a:t>1.  The morpheme 'photo' comes from a Greek word meaning light.</a:t>
+              <a:t>1.  The word 'photosynthesis' has nothing to do with light.</a:t>
             </a:r>
             <a:endParaRPr lang="en-US" sz="1300" dirty="0"/>
           </a:p>
@@ -41068,11 +40227,11 @@
             </a:avLst>
           </a:prstGeom>
           <a:solidFill>
-            <a:srgbClr val="DCFCE7"/>
-          </a:solidFill>
-          <a:ln w="12700">
-            <a:solidFill>
-              <a:srgbClr val="16A34A"/>
+            <a:srgbClr val="FEE2E2"/>
+          </a:solidFill>
+          <a:ln w="12700">
+            <a:solidFill>
+              <a:srgbClr val="DC2626"/>
             </a:solidFill>
             <a:prstDash val="solid"/>
           </a:ln>
@@ -41105,13 +40264,13 @@
             <a:r>
               <a:rPr lang="en-US" sz="1100" b="1" dirty="0">
                 <a:solidFill>
-                  <a:srgbClr val="16A34A"/>
+                  <a:srgbClr val="DC2626"/>
                 </a:solidFill>
                 <a:latin typeface="Trebuchet MS" pitchFamily="34" charset="0"/>
                 <a:ea typeface="Trebuchet MS" pitchFamily="34" charset="-122"/>
                 <a:cs typeface="Trebuchet MS" pitchFamily="34" charset="-120"/>
               </a:rPr>
-              <a:t>TRUE</a:t>
+              <a:t>FALSE</a:t>
             </a:r>
             <a:endParaRPr lang="en-US" sz="1100" dirty="0"/>
           </a:p>
@@ -41184,7 +40343,7 @@
                 <a:ea typeface="Calibri" pitchFamily="34" charset="-122"/>
                 <a:cs typeface="Calibri" pitchFamily="34" charset="-120"/>
               </a:rPr>
-              <a:t>2.  A photograph is a picture made using sound waves.</a:t>
+              <a:t>2.  The morpheme 'photo' comes from a Greek word meaning light.</a:t>
             </a:r>
             <a:endParaRPr lang="en-US" sz="1300" dirty="0"/>
           </a:p>
@@ -41207,11 +40366,11 @@
             </a:avLst>
           </a:prstGeom>
           <a:solidFill>
-            <a:srgbClr val="FEE2E2"/>
-          </a:solidFill>
-          <a:ln w="12700">
-            <a:solidFill>
-              <a:srgbClr val="DC2626"/>
+            <a:srgbClr val="DCFCE7"/>
+          </a:solidFill>
+          <a:ln w="12700">
+            <a:solidFill>
+              <a:srgbClr val="16A34A"/>
             </a:solidFill>
             <a:prstDash val="solid"/>
           </a:ln>
@@ -41244,13 +40403,13 @@
             <a:r>
               <a:rPr lang="en-US" sz="1100" b="1" dirty="0">
                 <a:solidFill>
-                  <a:srgbClr val="DC2626"/>
+                  <a:srgbClr val="16A34A"/>
                 </a:solidFill>
                 <a:latin typeface="Trebuchet MS" pitchFamily="34" charset="0"/>
                 <a:ea typeface="Trebuchet MS" pitchFamily="34" charset="-122"/>
                 <a:cs typeface="Trebuchet MS" pitchFamily="34" charset="-120"/>
               </a:rPr>
-              <a:t>FALSE</a:t>
+              <a:t>TRUE</a:t>
             </a:r>
             <a:endParaRPr lang="en-US" sz="1100" dirty="0"/>
           </a:p>
@@ -41323,7 +40482,7 @@
                 <a:ea typeface="Calibri" pitchFamily="34" charset="-122"/>
                 <a:cs typeface="Calibri" pitchFamily="34" charset="-120"/>
               </a:rPr>
-              <a:t>3.  Photosynthesis is a process that involves light.</a:t>
+              <a:t>3.  The morpheme 'photo' means sound or noise.</a:t>
             </a:r>
             <a:endParaRPr lang="en-US" sz="1300" dirty="0"/>
           </a:p>
@@ -41346,11 +40505,11 @@
             </a:avLst>
           </a:prstGeom>
           <a:solidFill>
-            <a:srgbClr val="DCFCE7"/>
-          </a:solidFill>
-          <a:ln w="12700">
-            <a:solidFill>
-              <a:srgbClr val="16A34A"/>
+            <a:srgbClr val="FEE2E2"/>
+          </a:solidFill>
+          <a:ln w="12700">
+            <a:solidFill>
+              <a:srgbClr val="DC2626"/>
             </a:solidFill>
             <a:prstDash val="solid"/>
           </a:ln>
@@ -41383,13 +40542,13 @@
             <a:r>
               <a:rPr lang="en-US" sz="1100" b="1" dirty="0">
                 <a:solidFill>
-                  <a:srgbClr val="16A34A"/>
+                  <a:srgbClr val="DC2626"/>
                 </a:solidFill>
                 <a:latin typeface="Trebuchet MS" pitchFamily="34" charset="0"/>
                 <a:ea typeface="Trebuchet MS" pitchFamily="34" charset="-122"/>
                 <a:cs typeface="Trebuchet MS" pitchFamily="34" charset="-120"/>
               </a:rPr>
-              <a:t>TRUE</a:t>
+              <a:t>FALSE</a:t>
             </a:r>
             <a:endParaRPr lang="en-US" sz="1100" dirty="0"/>
           </a:p>
@@ -41462,7 +40621,7 @@
                 <a:ea typeface="Calibri" pitchFamily="34" charset="-122"/>
                 <a:cs typeface="Calibri" pitchFamily="34" charset="-120"/>
               </a:rPr>
-              <a:t>4.  Words containing 'photo' are always connected to the idea of light.</a:t>
+              <a:t>4.  The morpheme 'photo' can appear at the start of a word.</a:t>
             </a:r>
             <a:endParaRPr lang="en-US" sz="1300" dirty="0"/>
           </a:p>
@@ -41601,7 +40760,7 @@
                 <a:ea typeface="Calibri" pitchFamily="34" charset="-122"/>
                 <a:cs typeface="Calibri" pitchFamily="34" charset="-120"/>
               </a:rPr>
-              <a:t>5.  The morpheme 'photo' means to write or record.</a:t>
+              <a:t>5.  A photographer is a person who works with light to take pictures.</a:t>
             </a:r>
             <a:endParaRPr lang="en-US" sz="1300" dirty="0"/>
           </a:p>
@@ -41624,11 +40783,11 @@
             </a:avLst>
           </a:prstGeom>
           <a:solidFill>
-            <a:srgbClr val="FEE2E2"/>
-          </a:solidFill>
-          <a:ln w="12700">
-            <a:solidFill>
-              <a:srgbClr val="DC2626"/>
+            <a:srgbClr val="DCFCE7"/>
+          </a:solidFill>
+          <a:ln w="12700">
+            <a:solidFill>
+              <a:srgbClr val="16A34A"/>
             </a:solidFill>
             <a:prstDash val="solid"/>
           </a:ln>
@@ -41661,13 +40820,13 @@
             <a:r>
               <a:rPr lang="en-US" sz="1100" b="1" dirty="0">
                 <a:solidFill>
-                  <a:srgbClr val="DC2626"/>
+                  <a:srgbClr val="16A34A"/>
                 </a:solidFill>
                 <a:latin typeface="Trebuchet MS" pitchFamily="34" charset="0"/>
                 <a:ea typeface="Trebuchet MS" pitchFamily="34" charset="-122"/>
                 <a:cs typeface="Trebuchet MS" pitchFamily="34" charset="-120"/>
               </a:rPr>
-              <a:t>FALSE</a:t>
+              <a:t>TRUE</a:t>
             </a:r>
             <a:endParaRPr lang="en-US" sz="1100" dirty="0"/>
           </a:p>
@@ -42135,7 +41294,7 @@
                 <a:ea typeface="Calibri" pitchFamily="34" charset="-122"/>
                 <a:cs typeface="Calibri" pitchFamily="34" charset="-120"/>
               </a:rPr>
-              <a:t>Origin: Greek: phos/photos</a:t>
+              <a:t>Origin: Greek: phōs, phōtos</a:t>
             </a:r>
             <a:endParaRPr lang="en-US" sz="1100" dirty="0"/>
           </a:p>
@@ -42504,7 +41663,7 @@
                 <a:ea typeface="Trebuchet MS" pitchFamily="34" charset="-122"/>
                 <a:cs typeface="Trebuchet MS" pitchFamily="34" charset="-120"/>
               </a:rPr>
-              <a:t>photon</a:t>
+              <a:t>photographer</a:t>
             </a:r>
             <a:endParaRPr lang="en-US" sz="1300" dirty="0"/>
           </a:p>
@@ -43421,7 +42580,7 @@
                 <a:ea typeface="Trebuchet MS" pitchFamily="34" charset="-122"/>
                 <a:cs typeface="Trebuchet MS" pitchFamily="34" charset="-120"/>
               </a:rPr>
-              <a:t>micro-</a:t>
+              <a:t>stereo-</a:t>
             </a:r>
             <a:endParaRPr lang="en-US" sz="1300" dirty="0"/>
           </a:p>
@@ -43574,7 +42733,7 @@
                 <a:ea typeface="Trebuchet MS" pitchFamily="34" charset="-122"/>
                 <a:cs typeface="Trebuchet MS" pitchFamily="34" charset="-120"/>
               </a:rPr>
-              <a:t>mono-</a:t>
+              <a:t>micro-</a:t>
             </a:r>
             <a:endParaRPr lang="en-US" sz="1300" dirty="0"/>
           </a:p>
@@ -43727,7 +42886,7 @@
                 <a:ea typeface="Trebuchet MS" pitchFamily="34" charset="-122"/>
                 <a:cs typeface="Trebuchet MS" pitchFamily="34" charset="-120"/>
               </a:rPr>
-              <a:t>stereo-</a:t>
+              <a:t>auto-</a:t>
             </a:r>
             <a:endParaRPr lang="en-US" sz="1300" dirty="0"/>
           </a:p>
@@ -43880,7 +43039,7 @@
                 <a:ea typeface="Trebuchet MS" pitchFamily="34" charset="-122"/>
                 <a:cs typeface="Trebuchet MS" pitchFamily="34" charset="-120"/>
               </a:rPr>
-              <a:t>thermo-</a:t>
+              <a:t>re-</a:t>
             </a:r>
             <a:endParaRPr lang="en-US" sz="1300" dirty="0"/>
           </a:p>
@@ -43969,7 +43128,7 @@
                 <a:ea typeface="Trebuchet MS" pitchFamily="34" charset="-122"/>
                 <a:cs typeface="Trebuchet MS" pitchFamily="34" charset="-120"/>
               </a:rPr>
-              <a:t>-phobia</a:t>
+              <a:t>-electric</a:t>
             </a:r>
             <a:endParaRPr lang="en-US" sz="1300" dirty="0"/>
           </a:p>
@@ -44880,7 +44039,7 @@
                 <a:ea typeface="Calibri" pitchFamily="34" charset="-122"/>
                 <a:cs typeface="Calibri" pitchFamily="34" charset="-120"/>
               </a:rPr>
-              <a:t>The process plants use to turn sunlight into food.</a:t>
+              <a:t>The process plants use to make food from sunlight, water, and air.</a:t>
             </a:r>
             <a:endParaRPr lang="en-US" sz="1200" dirty="0"/>
           </a:p>
@@ -45019,7 +44178,7 @@
                 <a:ea typeface="Calibri" pitchFamily="34" charset="-122"/>
                 <a:cs typeface="Calibri" pitchFamily="34" charset="-120"/>
               </a:rPr>
-              <a:t>A tiny particle of light energy.</a:t>
+              <a:t>A person who takes photographs as a job or hobby.</a:t>
             </a:r>
             <a:endParaRPr lang="en-US" sz="1200" dirty="0"/>
           </a:p>
@@ -45370,7 +44529,7 @@
                 <a:ea typeface="Trebuchet MS" pitchFamily="34" charset="-122"/>
                 <a:cs typeface="Trebuchet MS" pitchFamily="34" charset="-120"/>
               </a:rPr>
-              <a:t>photon</a:t>
+              <a:t>photographer</a:t>
             </a:r>
             <a:endParaRPr lang="en-US" sz="1200" dirty="0"/>
           </a:p>
@@ -45436,7 +44595,7 @@
                 <a:ea typeface="Calibri" pitchFamily="34" charset="-122"/>
                 <a:cs typeface="Calibri" pitchFamily="34" charset="-120"/>
               </a:rPr>
-              <a:t>A copy of a document made using light and a special machine.</a:t>
+              <a:t>A copy of a document made by a machine using light.</a:t>
             </a:r>
             <a:endParaRPr lang="en-US" sz="1200" dirty="0"/>
           </a:p>
@@ -45575,7 +44734,7 @@
                 <a:ea typeface="Calibri" pitchFamily="34" charset="-122"/>
                 <a:cs typeface="Calibri" pitchFamily="34" charset="-120"/>
               </a:rPr>
-              <a:t>Looking good or attractive in photographs.</a:t>
+              <a:t>Looking attractive or great in photos.</a:t>
             </a:r>
             <a:endParaRPr lang="en-US" sz="1200" dirty="0"/>
           </a:p>
@@ -46209,7 +45368,7 @@
                 <a:ea typeface="Calibri" pitchFamily="34" charset="-122"/>
                 <a:cs typeface="Calibri" pitchFamily="34" charset="-120"/>
               </a:rPr>
-              <a:t>The photographer used a telephoto lens to take a close-up picture of the kangaroo in the bush.</a:t>
+              <a:t>The photographer set up her camera carefully before taking a photograph of the sunset.</a:t>
             </a:r>
             <a:endParaRPr lang="en-US" sz="1500" dirty="0"/>
           </a:p>
@@ -46537,7 +45696,7 @@
                 <a:ea typeface="Calibri" pitchFamily="34" charset="-122"/>
                 <a:cs typeface="Calibri" pitchFamily="34" charset="-120"/>
               </a:rPr>
-              <a:t>Mia made a photocopy of her project so she could hand one copy to her teacher and keep one for herself.</a:t>
+              <a:t>Our teacher made a photocopy of the worksheet so every student could have one.</a:t>
             </a:r>
             <a:endParaRPr lang="en-US" sz="1500" dirty="0"/>
           </a:p>
